--- a/cloudflare-deploy/public/library/agency/agency-en.pptx
+++ b/cloudflare-deploy/public/library/agency/agency-en.pptx
@@ -36,6 +36,8 @@
     <p:sldId id="284" r:id="rId35"/>
     <p:sldId id="285" r:id="rId36"/>
     <p:sldId id="286" r:id="rId37"/>
+    <p:sldId id="287" r:id="rId38"/>
+    <p:sldId id="288" r:id="rId39"/>
   </p:sldIdLst>
   <p:sldSz cx="12191695" cy="6858000" type="screen4x3"/>
   <p:notesSz cx="6858000" cy="9144000"/>
@@ -20834,7 +20836,7 @@
                 </a:solidFill>
                 <a:latin typeface="Malgun Gothic"/>
               </a:rPr>
-              <a:t>Feature Summary · Data</a:t>
+              <a:t>How to Use the Main Features</a:t>
             </a:r>
           </a:p>
         </p:txBody>
@@ -20847,8 +20849,8 @@
         </p:nvSpPr>
         <p:spPr>
           <a:xfrm>
-            <a:off x="365760" y="841248"/>
-            <a:ext cx="658368" cy="512064"/>
+            <a:off x="365760" y="822960"/>
+            <a:ext cx="868680" cy="868680"/>
           </a:xfrm>
           <a:prstGeom prst="roundRect">
             <a:avLst/>
@@ -20891,9 +20893,2149 @@
         </p:nvSpPr>
         <p:spPr>
           <a:xfrm>
+            <a:off x="365760" y="822960"/>
+            <a:ext cx="868680" cy="868680"/>
+          </a:xfrm>
+          <a:prstGeom prst="rect">
+            <a:avLst/>
+          </a:prstGeom>
+          <a:noFill/>
+        </p:spPr>
+        <p:txBody>
+          <a:bodyPr wrap="square" anchor="ctr">
+            <a:spAutoFit/>
+          </a:bodyPr>
+          <a:lstStyle/>
+          <a:p>
+            <a:pPr algn="ctr">
+              <a:lnSpc>
+                <a:spcPct val="100000"/>
+              </a:lnSpc>
+            </a:pPr>
+            <a:r>
+              <a:rPr sz="2600" b="1">
+                <a:solidFill>
+                  <a:srgbClr val="FFFFFF"/>
+                </a:solidFill>
+                <a:latin typeface="Malgun Gothic"/>
+              </a:rPr>
+              <a:t>23</a:t>
+            </a:r>
+          </a:p>
+        </p:txBody>
+      </p:sp>
+      <p:sp>
+        <p:nvSpPr>
+          <p:cNvPr id="8" name="TextBox 7"/>
+          <p:cNvSpPr txBox="1"/>
+          <p:nvPr/>
+        </p:nvSpPr>
+        <p:spPr>
+          <a:xfrm>
+            <a:off x="1371600" y="822960"/>
+            <a:ext cx="10424160" cy="502920"/>
+          </a:xfrm>
+          <a:prstGeom prst="rect">
+            <a:avLst/>
+          </a:prstGeom>
+          <a:noFill/>
+        </p:spPr>
+        <p:txBody>
+          <a:bodyPr wrap="square" anchor="t">
+            <a:spAutoFit/>
+          </a:bodyPr>
+          <a:lstStyle/>
+          <a:p>
+            <a:pPr algn="l">
+              <a:lnSpc>
+                <a:spcPct val="100000"/>
+              </a:lnSpc>
+            </a:pPr>
+            <a:r>
+              <a:rPr sz="2300" b="1">
+                <a:solidFill>
+                  <a:srgbClr val="1E2340"/>
+                </a:solidFill>
+                <a:latin typeface="Malgun Gothic"/>
+              </a:rPr>
+              <a:t>🗂️ Teacher Management, redesigned (roster filters · groups · detail tabs)</a:t>
+            </a:r>
+          </a:p>
+        </p:txBody>
+      </p:sp>
+      <p:sp>
+        <p:nvSpPr>
+          <p:cNvPr id="9" name="TextBox 8"/>
+          <p:cNvSpPr txBox="1"/>
+          <p:nvPr/>
+        </p:nvSpPr>
+        <p:spPr>
+          <a:xfrm>
+            <a:off x="1417320" y="1353312"/>
+            <a:ext cx="10424160" cy="320040"/>
+          </a:xfrm>
+          <a:prstGeom prst="rect">
+            <a:avLst/>
+          </a:prstGeom>
+          <a:noFill/>
+        </p:spPr>
+        <p:txBody>
+          <a:bodyPr wrap="square" anchor="t">
+            <a:spAutoFit/>
+          </a:bodyPr>
+          <a:lstStyle/>
+          <a:p>
+            <a:pPr algn="l">
+              <a:lnSpc>
+                <a:spcPct val="100000"/>
+              </a:lnSpc>
+            </a:pPr>
+            <a:r>
+              <a:rPr sz="1300" b="0">
+                <a:solidFill>
+                  <a:srgbClr val="64748B"/>
+                </a:solidFill>
+                <a:latin typeface="Malgun Gothic"/>
+              </a:rPr>
+              <a:t>Easy-to-search roster · detail at a glance</a:t>
+            </a:r>
+          </a:p>
+        </p:txBody>
+      </p:sp>
+      <p:sp>
+        <p:nvSpPr>
+          <p:cNvPr id="10" name="Rounded Rectangle 9"/>
+          <p:cNvSpPr/>
+          <p:nvPr/>
+        </p:nvSpPr>
+        <p:spPr>
+          <a:xfrm>
+            <a:off x="365760" y="1828800"/>
+            <a:ext cx="11430000" cy="777240"/>
+          </a:xfrm>
+          <a:prstGeom prst="roundRect">
+            <a:avLst/>
+          </a:prstGeom>
+          <a:solidFill>
+            <a:srgbClr val="FFF1F2"/>
+          </a:solidFill>
+          <a:ln>
+            <a:noFill/>
+          </a:ln>
+          <a:effectLst/>
+        </p:spPr>
+        <p:style>
+          <a:lnRef idx="1">
+            <a:schemeClr val="accent1"/>
+          </a:lnRef>
+          <a:fillRef idx="3">
+            <a:schemeClr val="accent1"/>
+          </a:fillRef>
+          <a:effectRef idx="2">
+            <a:schemeClr val="accent1"/>
+          </a:effectRef>
+          <a:fontRef idx="minor">
+            <a:schemeClr val="lt1"/>
+          </a:fontRef>
+        </p:style>
+        <p:txBody>
+          <a:bodyPr rtlCol="0" anchor="ctr"/>
+          <a:lstStyle/>
+          <a:p>
+            <a:pPr algn="ctr"/>
+          </a:p>
+        </p:txBody>
+      </p:sp>
+      <p:sp>
+        <p:nvSpPr>
+          <p:cNvPr id="11" name="TextBox 10"/>
+          <p:cNvSpPr txBox="1"/>
+          <p:nvPr/>
+        </p:nvSpPr>
+        <p:spPr>
+          <a:xfrm>
+            <a:off x="548640" y="1901952"/>
+            <a:ext cx="11064240" cy="640080"/>
+          </a:xfrm>
+          <a:prstGeom prst="rect">
+            <a:avLst/>
+          </a:prstGeom>
+          <a:noFill/>
+        </p:spPr>
+        <p:txBody>
+          <a:bodyPr wrap="square" anchor="t">
+            <a:spAutoFit/>
+          </a:bodyPr>
+          <a:lstStyle/>
+          <a:p>
+            <a:pPr algn="l">
+              <a:lnSpc>
+                <a:spcPct val="115000"/>
+              </a:lnSpc>
+            </a:pPr>
+            <a:r>
+              <a:rPr sz="1200" b="0">
+                <a:solidFill>
+                  <a:srgbClr val="334155"/>
+                </a:solidFill>
+                <a:latin typeface="Malgun Gothic"/>
+              </a:rPr>
+              <a:t>The teacher-management screen is now easier to search and read. Scattered menus are grouped into four bundles in the sidebar, and above the roster there are status/group dropdown filters with applied-filter chips. Tapping a teacher opens a detail view split into Profile / Payroll / Evaluation tabs, with a manager badge and employment status (active / on-leave / left) shown at a glance.</a:t>
+            </a:r>
+          </a:p>
+        </p:txBody>
+      </p:sp>
+      <p:sp>
+        <p:nvSpPr>
+          <p:cNvPr id="12" name="TextBox 11"/>
+          <p:cNvSpPr txBox="1"/>
+          <p:nvPr/>
+        </p:nvSpPr>
+        <p:spPr>
+          <a:xfrm>
+            <a:off x="457200" y="2743200"/>
+            <a:ext cx="5669280" cy="320040"/>
+          </a:xfrm>
+          <a:prstGeom prst="rect">
+            <a:avLst/>
+          </a:prstGeom>
+          <a:noFill/>
+        </p:spPr>
+        <p:txBody>
+          <a:bodyPr wrap="square" anchor="t">
+            <a:spAutoFit/>
+          </a:bodyPr>
+          <a:lstStyle/>
+          <a:p>
+            <a:pPr algn="l">
+              <a:lnSpc>
+                <a:spcPct val="100000"/>
+              </a:lnSpc>
+            </a:pPr>
+            <a:r>
+              <a:rPr sz="1350" b="1">
+                <a:solidFill>
+                  <a:srgbClr val="E11D48"/>
+                </a:solidFill>
+                <a:latin typeface="Malgun Gothic"/>
+              </a:rPr>
+              <a:t>How to use</a:t>
+            </a:r>
+          </a:p>
+        </p:txBody>
+      </p:sp>
+      <p:sp>
+        <p:nvSpPr>
+          <p:cNvPr id="13" name="TextBox 12"/>
+          <p:cNvSpPr txBox="1"/>
+          <p:nvPr/>
+        </p:nvSpPr>
+        <p:spPr>
+          <a:xfrm>
+            <a:off x="457200" y="3108960"/>
+            <a:ext cx="5669280" cy="2377440"/>
+          </a:xfrm>
+          <a:prstGeom prst="rect">
+            <a:avLst/>
+          </a:prstGeom>
+          <a:noFill/>
+        </p:spPr>
+        <p:txBody>
+          <a:bodyPr wrap="square">
+            <a:spAutoFit/>
+          </a:bodyPr>
+          <a:lstStyle/>
+          <a:p>
+            <a:pPr>
+              <a:lnSpc>
+                <a:spcPct val="115000"/>
+              </a:lnSpc>
+              <a:spcAft>
+                <a:spcPts val="600"/>
+              </a:spcAft>
+            </a:pPr>
+            <a:r>
+              <a:rPr sz="1050" b="1">
+                <a:solidFill>
+                  <a:srgbClr val="E11D48"/>
+                </a:solidFill>
+                <a:latin typeface="Malgun Gothic"/>
+              </a:rPr>
+              <a:t>● </a:t>
+            </a:r>
+            <a:r>
+              <a:rPr sz="1250">
+                <a:solidFill>
+                  <a:srgbClr val="334155"/>
+                </a:solidFill>
+                <a:latin typeface="Malgun Gothic"/>
+              </a:rPr>
+              <a:t>Open Teachers in the admin menu (menus are tidied into four bundles).</a:t>
+            </a:r>
+          </a:p>
+          <a:p>
+            <a:pPr>
+              <a:lnSpc>
+                <a:spcPct val="115000"/>
+              </a:lnSpc>
+              <a:spcAft>
+                <a:spcPts val="600"/>
+              </a:spcAft>
+            </a:pPr>
+            <a:r>
+              <a:rPr sz="1050" b="1">
+                <a:solidFill>
+                  <a:srgbClr val="E11D48"/>
+                </a:solidFill>
+                <a:latin typeface="Malgun Gothic"/>
+              </a:rPr>
+              <a:t>● </a:t>
+            </a:r>
+            <a:r>
+              <a:rPr sz="1250">
+                <a:solidFill>
+                  <a:srgbClr val="334155"/>
+                </a:solidFill>
+                <a:latin typeface="Malgun Gothic"/>
+              </a:rPr>
+              <a:t>Filter to just the teachers you want with the status/group dropdowns above the roster.</a:t>
+            </a:r>
+          </a:p>
+          <a:p>
+            <a:pPr>
+              <a:lnSpc>
+                <a:spcPct val="115000"/>
+              </a:lnSpc>
+              <a:spcAft>
+                <a:spcPts val="600"/>
+              </a:spcAft>
+            </a:pPr>
+            <a:r>
+              <a:rPr sz="1050" b="1">
+                <a:solidFill>
+                  <a:srgbClr val="E11D48"/>
+                </a:solidFill>
+                <a:latin typeface="Malgun Gothic"/>
+              </a:rPr>
+              <a:t>● </a:t>
+            </a:r>
+            <a:r>
+              <a:rPr sz="1250">
+                <a:solidFill>
+                  <a:srgbClr val="334155"/>
+                </a:solidFill>
+                <a:latin typeface="Malgun Gothic"/>
+              </a:rPr>
+              <a:t>Applied filters show as chips; remove a chip to clear it.</a:t>
+            </a:r>
+          </a:p>
+          <a:p>
+            <a:pPr>
+              <a:lnSpc>
+                <a:spcPct val="115000"/>
+              </a:lnSpc>
+              <a:spcAft>
+                <a:spcPts val="600"/>
+              </a:spcAft>
+            </a:pPr>
+            <a:r>
+              <a:rPr sz="1050" b="1">
+                <a:solidFill>
+                  <a:srgbClr val="E11D48"/>
+                </a:solidFill>
+                <a:latin typeface="Malgun Gothic"/>
+              </a:rPr>
+              <a:t>● </a:t>
+            </a:r>
+            <a:r>
+              <a:rPr sz="1250">
+                <a:solidFill>
+                  <a:srgbClr val="334155"/>
+                </a:solidFill>
+                <a:latin typeface="Malgun Gothic"/>
+              </a:rPr>
+              <a:t>Tap a teacher to open the Profile / Payroll / Evaluation detail tabs.</a:t>
+            </a:r>
+          </a:p>
+          <a:p>
+            <a:pPr>
+              <a:lnSpc>
+                <a:spcPct val="115000"/>
+              </a:lnSpc>
+              <a:spcAft>
+                <a:spcPts val="600"/>
+              </a:spcAft>
+            </a:pPr>
+            <a:r>
+              <a:rPr sz="1050" b="1">
+                <a:solidFill>
+                  <a:srgbClr val="E11D48"/>
+                </a:solidFill>
+                <a:latin typeface="Malgun Gothic"/>
+              </a:rPr>
+              <a:t>● </a:t>
+            </a:r>
+            <a:r>
+              <a:rPr sz="1250">
+                <a:solidFill>
+                  <a:srgbClr val="334155"/>
+                </a:solidFill>
+                <a:latin typeface="Malgun Gothic"/>
+              </a:rPr>
+              <a:t>The summary numbers on the payroll/evaluation tabs load only as needed when opened.</a:t>
+            </a:r>
+          </a:p>
+        </p:txBody>
+      </p:sp>
+      <p:sp>
+        <p:nvSpPr>
+          <p:cNvPr id="14" name="Rounded Rectangle 13"/>
+          <p:cNvSpPr/>
+          <p:nvPr/>
+        </p:nvSpPr>
+        <p:spPr>
+          <a:xfrm>
+            <a:off x="457200" y="5166360"/>
+            <a:ext cx="5669280" cy="1627632"/>
+          </a:xfrm>
+          <a:prstGeom prst="roundRect">
+            <a:avLst/>
+          </a:prstGeom>
+          <a:solidFill>
+            <a:srgbClr val="F4F7FF"/>
+          </a:solidFill>
+          <a:ln w="12700">
+            <a:solidFill>
+              <a:srgbClr val="E11D48"/>
+            </a:solidFill>
+          </a:ln>
+          <a:effectLst/>
+        </p:spPr>
+        <p:style>
+          <a:lnRef idx="1">
+            <a:schemeClr val="accent1"/>
+          </a:lnRef>
+          <a:fillRef idx="3">
+            <a:schemeClr val="accent1"/>
+          </a:fillRef>
+          <a:effectRef idx="2">
+            <a:schemeClr val="accent1"/>
+          </a:effectRef>
+          <a:fontRef idx="minor">
+            <a:schemeClr val="lt1"/>
+          </a:fontRef>
+        </p:style>
+        <p:txBody>
+          <a:bodyPr rtlCol="0" anchor="ctr"/>
+          <a:lstStyle/>
+          <a:p>
+            <a:pPr algn="ctr"/>
+          </a:p>
+        </p:txBody>
+      </p:sp>
+      <p:sp>
+        <p:nvSpPr>
+          <p:cNvPr id="15" name="TextBox 14"/>
+          <p:cNvSpPr txBox="1"/>
+          <p:nvPr/>
+        </p:nvSpPr>
+        <p:spPr>
+          <a:xfrm>
+            <a:off x="594360" y="5221224"/>
+            <a:ext cx="5394960" cy="274320"/>
+          </a:xfrm>
+          <a:prstGeom prst="rect">
+            <a:avLst/>
+          </a:prstGeom>
+          <a:noFill/>
+        </p:spPr>
+        <p:txBody>
+          <a:bodyPr wrap="square" anchor="t">
+            <a:spAutoFit/>
+          </a:bodyPr>
+          <a:lstStyle/>
+          <a:p>
+            <a:pPr algn="l">
+              <a:lnSpc>
+                <a:spcPct val="100000"/>
+              </a:lnSpc>
+            </a:pPr>
+            <a:r>
+              <a:rPr sz="1150" b="1">
+                <a:solidFill>
+                  <a:srgbClr val="E11D48"/>
+                </a:solidFill>
+                <a:latin typeface="Malgun Gothic"/>
+              </a:rPr>
+              <a:t>✅ Key Points</a:t>
+            </a:r>
+          </a:p>
+        </p:txBody>
+      </p:sp>
+      <p:sp>
+        <p:nvSpPr>
+          <p:cNvPr id="16" name="TextBox 15"/>
+          <p:cNvSpPr txBox="1"/>
+          <p:nvPr/>
+        </p:nvSpPr>
+        <p:spPr>
+          <a:xfrm>
+            <a:off x="594360" y="5495544"/>
+            <a:ext cx="5394960" cy="1261872"/>
+          </a:xfrm>
+          <a:prstGeom prst="rect">
+            <a:avLst/>
+          </a:prstGeom>
+          <a:noFill/>
+        </p:spPr>
+        <p:txBody>
+          <a:bodyPr wrap="square">
+            <a:spAutoFit/>
+          </a:bodyPr>
+          <a:lstStyle/>
+          <a:p>
+            <a:pPr>
+              <a:lnSpc>
+                <a:spcPct val="115000"/>
+              </a:lnSpc>
+              <a:spcAft>
+                <a:spcPts val="200"/>
+              </a:spcAft>
+            </a:pPr>
+            <a:r>
+              <a:rPr sz="900" b="1">
+                <a:solidFill>
+                  <a:srgbClr val="E11D48"/>
+                </a:solidFill>
+                <a:latin typeface="Malgun Gothic"/>
+              </a:rPr>
+              <a:t>● </a:t>
+            </a:r>
+            <a:r>
+              <a:rPr sz="1100">
+                <a:solidFill>
+                  <a:srgbClr val="334155"/>
+                </a:solidFill>
+                <a:latin typeface="Malgun Gothic"/>
+              </a:rPr>
+              <a:t>Managers are marked with a badge, and status shows as active / on-leave / left (3 states).</a:t>
+            </a:r>
+          </a:p>
+          <a:p>
+            <a:pPr>
+              <a:lnSpc>
+                <a:spcPct val="115000"/>
+              </a:lnSpc>
+              <a:spcAft>
+                <a:spcPts val="200"/>
+              </a:spcAft>
+            </a:pPr>
+            <a:r>
+              <a:rPr sz="900" b="1">
+                <a:solidFill>
+                  <a:srgbClr val="E11D48"/>
+                </a:solidFill>
+                <a:latin typeface="Malgun Gothic"/>
+              </a:rPr>
+              <a:t>● </a:t>
+            </a:r>
+            <a:r>
+              <a:rPr sz="1100">
+                <a:solidFill>
+                  <a:srgbClr val="334155"/>
+                </a:solidFill>
+                <a:latin typeface="Malgun Gothic"/>
+              </a:rPr>
+              <a:t>A blank name falls back to the ID, so there are no empty cells.</a:t>
+            </a:r>
+          </a:p>
+          <a:p>
+            <a:pPr>
+              <a:lnSpc>
+                <a:spcPct val="115000"/>
+              </a:lnSpc>
+              <a:spcAft>
+                <a:spcPts val="200"/>
+              </a:spcAft>
+            </a:pPr>
+            <a:r>
+              <a:rPr sz="900" b="1">
+                <a:solidFill>
+                  <a:srgbClr val="E11D48"/>
+                </a:solidFill>
+                <a:latin typeface="Malgun Gothic"/>
+              </a:rPr>
+              <a:t>● </a:t>
+            </a:r>
+            <a:r>
+              <a:rPr sz="1100">
+                <a:solidFill>
+                  <a:srgbClr val="334155"/>
+                </a:solidFill>
+                <a:latin typeface="Malgun Gothic"/>
+              </a:rPr>
+              <a:t>Detail tabs reuse existing APIs for speed, and the screen is bilingual (KO/EN).</a:t>
+            </a:r>
+          </a:p>
+          <a:p>
+            <a:pPr>
+              <a:lnSpc>
+                <a:spcPct val="115000"/>
+              </a:lnSpc>
+              <a:spcAft>
+                <a:spcPts val="200"/>
+              </a:spcAft>
+            </a:pPr>
+            <a:r>
+              <a:rPr sz="900" b="1">
+                <a:solidFill>
+                  <a:srgbClr val="E11D48"/>
+                </a:solidFill>
+                <a:latin typeface="Malgun Gothic"/>
+              </a:rPr>
+              <a:t>● </a:t>
+            </a:r>
+            <a:r>
+              <a:rPr sz="1100">
+                <a:solidFill>
+                  <a:srgbClr val="334155"/>
+                </a:solidFill>
+                <a:latin typeface="Malgun Gothic"/>
+              </a:rPr>
+              <a:t>The duplicate payroll entry was tidied and bug reports moved to a separate system.</a:t>
+            </a:r>
+          </a:p>
+        </p:txBody>
+      </p:sp>
+      <p:sp>
+        <p:nvSpPr>
+          <p:cNvPr id="17" name="Rounded Rectangle 16"/>
+          <p:cNvSpPr/>
+          <p:nvPr/>
+        </p:nvSpPr>
+        <p:spPr>
+          <a:xfrm>
+            <a:off x="457200" y="6903720"/>
+            <a:ext cx="5669280" cy="640080"/>
+          </a:xfrm>
+          <a:prstGeom prst="roundRect">
+            <a:avLst/>
+          </a:prstGeom>
+          <a:solidFill>
+            <a:srgbClr val="FFFBEB"/>
+          </a:solidFill>
+          <a:ln w="12700">
+            <a:solidFill>
+              <a:srgbClr val="F59E0B"/>
+            </a:solidFill>
+          </a:ln>
+          <a:effectLst/>
+        </p:spPr>
+        <p:style>
+          <a:lnRef idx="1">
+            <a:schemeClr val="accent1"/>
+          </a:lnRef>
+          <a:fillRef idx="3">
+            <a:schemeClr val="accent1"/>
+          </a:fillRef>
+          <a:effectRef idx="2">
+            <a:schemeClr val="accent1"/>
+          </a:effectRef>
+          <a:fontRef idx="minor">
+            <a:schemeClr val="lt1"/>
+          </a:fontRef>
+        </p:style>
+        <p:txBody>
+          <a:bodyPr rtlCol="0" anchor="ctr"/>
+          <a:lstStyle/>
+          <a:p>
+            <a:pPr algn="ctr"/>
+          </a:p>
+        </p:txBody>
+      </p:sp>
+      <p:sp>
+        <p:nvSpPr>
+          <p:cNvPr id="18" name="TextBox 17"/>
+          <p:cNvSpPr txBox="1"/>
+          <p:nvPr/>
+        </p:nvSpPr>
+        <p:spPr>
+          <a:xfrm>
+            <a:off x="594360" y="6949440"/>
+            <a:ext cx="5394960" cy="548640"/>
+          </a:xfrm>
+          <a:prstGeom prst="rect">
+            <a:avLst/>
+          </a:prstGeom>
+          <a:noFill/>
+        </p:spPr>
+        <p:txBody>
+          <a:bodyPr wrap="square" anchor="t">
+            <a:spAutoFit/>
+          </a:bodyPr>
+          <a:lstStyle/>
+          <a:p>
+            <a:pPr algn="l">
+              <a:lnSpc>
+                <a:spcPct val="105000"/>
+              </a:lnSpc>
+            </a:pPr>
+            <a:r>
+              <a:rPr sz="1050" b="0">
+                <a:solidFill>
+                  <a:srgbClr val="92670A"/>
+                </a:solidFill>
+                <a:latin typeface="Malgun Gothic"/>
+              </a:rPr>
+              <a:t>⚠️ Good to know · This is a filtering/detail cleanup. Registering, editing and deleting teachers works exactly as before.</a:t>
+            </a:r>
+          </a:p>
+        </p:txBody>
+      </p:sp>
+      <p:sp>
+        <p:nvSpPr>
+          <p:cNvPr id="19" name="Rounded Rectangle 18"/>
+          <p:cNvSpPr/>
+          <p:nvPr/>
+        </p:nvSpPr>
+        <p:spPr>
+          <a:xfrm>
+            <a:off x="457200" y="7635240"/>
+            <a:ext cx="5669280" cy="658368"/>
+          </a:xfrm>
+          <a:prstGeom prst="roundRect">
+            <a:avLst/>
+          </a:prstGeom>
+          <a:solidFill>
+            <a:srgbClr val="FFF7E6"/>
+          </a:solidFill>
+          <a:ln w="12700">
+            <a:solidFill>
+              <a:srgbClr val="0EA5E9"/>
+            </a:solidFill>
+          </a:ln>
+          <a:effectLst/>
+        </p:spPr>
+        <p:style>
+          <a:lnRef idx="1">
+            <a:schemeClr val="accent1"/>
+          </a:lnRef>
+          <a:fillRef idx="3">
+            <a:schemeClr val="accent1"/>
+          </a:fillRef>
+          <a:effectRef idx="2">
+            <a:schemeClr val="accent1"/>
+          </a:effectRef>
+          <a:fontRef idx="minor">
+            <a:schemeClr val="lt1"/>
+          </a:fontRef>
+        </p:style>
+        <p:txBody>
+          <a:bodyPr rtlCol="0" anchor="ctr"/>
+          <a:lstStyle/>
+          <a:p>
+            <a:pPr algn="ctr"/>
+          </a:p>
+        </p:txBody>
+      </p:sp>
+      <p:sp>
+        <p:nvSpPr>
+          <p:cNvPr id="20" name="TextBox 19"/>
+          <p:cNvSpPr txBox="1"/>
+          <p:nvPr/>
+        </p:nvSpPr>
+        <p:spPr>
+          <a:xfrm>
+            <a:off x="594360" y="7680960"/>
+            <a:ext cx="5394960" cy="566928"/>
+          </a:xfrm>
+          <a:prstGeom prst="rect">
+            <a:avLst/>
+          </a:prstGeom>
+          <a:noFill/>
+        </p:spPr>
+        <p:txBody>
+          <a:bodyPr wrap="square" anchor="t">
+            <a:spAutoFit/>
+          </a:bodyPr>
+          <a:lstStyle/>
+          <a:p>
+            <a:pPr algn="l">
+              <a:lnSpc>
+                <a:spcPct val="105000"/>
+              </a:lnSpc>
+            </a:pPr>
+            <a:r>
+              <a:rPr sz="1050" b="0">
+                <a:solidFill>
+                  <a:srgbClr val="5B4A2A"/>
+                </a:solidFill>
+                <a:latin typeface="Malgun Gothic"/>
+              </a:rPr>
+              <a:t>💡 Tip · The more teachers you have, the more the status/group filters help. Keep your usual conditions filtered.</a:t>
+            </a:r>
+          </a:p>
+        </p:txBody>
+      </p:sp>
+      <p:sp>
+        <p:nvSpPr>
+          <p:cNvPr id="21" name="Rectangle 20"/>
+          <p:cNvSpPr/>
+          <p:nvPr/>
+        </p:nvSpPr>
+        <p:spPr>
+          <a:xfrm>
+            <a:off x="6300216" y="2345436"/>
+            <a:ext cx="5596128" cy="3538728"/>
+          </a:xfrm>
+          <a:prstGeom prst="rect">
+            <a:avLst/>
+          </a:prstGeom>
+          <a:solidFill>
+            <a:srgbClr val="FFFFFF"/>
+          </a:solidFill>
+          <a:ln w="12700">
+            <a:solidFill>
+              <a:srgbClr val="E2E8F0"/>
+            </a:solidFill>
+          </a:ln>
+          <a:effectLst/>
+        </p:spPr>
+        <p:style>
+          <a:lnRef idx="1">
+            <a:schemeClr val="accent1"/>
+          </a:lnRef>
+          <a:fillRef idx="3">
+            <a:schemeClr val="accent1"/>
+          </a:fillRef>
+          <a:effectRef idx="2">
+            <a:schemeClr val="accent1"/>
+          </a:effectRef>
+          <a:fontRef idx="minor">
+            <a:schemeClr val="lt1"/>
+          </a:fontRef>
+        </p:style>
+        <p:txBody>
+          <a:bodyPr rtlCol="0" anchor="ctr"/>
+          <a:lstStyle/>
+          <a:p>
+            <a:pPr algn="ctr"/>
+          </a:p>
+        </p:txBody>
+      </p:sp>
+      <p:pic>
+        <p:nvPicPr>
+          <p:cNvPr id="22" name="Picture 21" descr="admin_teachers.jpg"/>
+          <p:cNvPicPr>
+            <a:picLocks noChangeAspect="1"/>
+          </p:cNvPicPr>
+          <p:nvPr/>
+        </p:nvPicPr>
+        <p:blipFill>
+          <a:blip r:embed="rId2"/>
+          <a:stretch>
+            <a:fillRect/>
+          </a:stretch>
+        </p:blipFill>
+        <p:spPr>
+          <a:xfrm>
+            <a:off x="6355080" y="2400300"/>
+            <a:ext cx="5486400" cy="3429000"/>
+          </a:xfrm>
+          <a:prstGeom prst="rect">
+            <a:avLst/>
+          </a:prstGeom>
+        </p:spPr>
+      </p:pic>
+    </p:spTree>
+  </p:cSld>
+  <p:clrMapOvr>
+    <a:masterClrMapping/>
+  </p:clrMapOvr>
+</p:sld>
+</file>
+
+<file path=ppt/slides/slide27.xml><?xml version="1.0" encoding="utf-8"?>
+<p:sld xmlns:a="http://schemas.openxmlformats.org/drawingml/2006/main" xmlns:p="http://schemas.openxmlformats.org/presentationml/2006/main" xmlns:r="http://schemas.openxmlformats.org/officeDocument/2006/relationships">
+  <p:cSld>
+    <p:bg>
+      <p:bgPr>
+        <a:solidFill>
+          <a:srgbClr val="FFFFFF"/>
+        </a:solidFill>
+        <a:effectLst/>
+      </p:bgPr>
+    </p:bg>
+    <p:spTree>
+      <p:nvGrpSpPr>
+        <p:cNvPr id="1" name=""/>
+        <p:cNvGrpSpPr/>
+        <p:nvPr/>
+      </p:nvGrpSpPr>
+      <p:grpSpPr/>
+      <p:sp>
+        <p:nvSpPr>
+          <p:cNvPr id="2" name="Rectangle 1"/>
+          <p:cNvSpPr/>
+          <p:nvPr/>
+        </p:nvSpPr>
+        <p:spPr>
+          <a:xfrm>
+            <a:off x="0" y="0"/>
+            <a:ext cx="12191695" cy="566928"/>
+          </a:xfrm>
+          <a:prstGeom prst="rect">
+            <a:avLst/>
+          </a:prstGeom>
+          <a:solidFill>
+            <a:srgbClr val="E11D48"/>
+          </a:solidFill>
+          <a:ln>
+            <a:noFill/>
+          </a:ln>
+          <a:effectLst/>
+        </p:spPr>
+        <p:style>
+          <a:lnRef idx="1">
+            <a:schemeClr val="accent1"/>
+          </a:lnRef>
+          <a:fillRef idx="3">
+            <a:schemeClr val="accent1"/>
+          </a:fillRef>
+          <a:effectRef idx="2">
+            <a:schemeClr val="accent1"/>
+          </a:effectRef>
+          <a:fontRef idx="minor">
+            <a:schemeClr val="lt1"/>
+          </a:fontRef>
+        </p:style>
+        <p:txBody>
+          <a:bodyPr rtlCol="0" anchor="ctr"/>
+          <a:lstStyle/>
+          <a:p>
+            <a:pPr algn="ctr"/>
+          </a:p>
+        </p:txBody>
+      </p:sp>
+      <p:sp>
+        <p:nvSpPr>
+          <p:cNvPr id="3" name="Rectangle 2"/>
+          <p:cNvSpPr/>
+          <p:nvPr/>
+        </p:nvSpPr>
+        <p:spPr>
+          <a:xfrm>
+            <a:off x="0" y="566928"/>
+            <a:ext cx="12191695" cy="54864"/>
+          </a:xfrm>
+          <a:prstGeom prst="rect">
+            <a:avLst/>
+          </a:prstGeom>
+          <a:solidFill>
+            <a:srgbClr val="0EA5E9"/>
+          </a:solidFill>
+          <a:ln>
+            <a:noFill/>
+          </a:ln>
+          <a:effectLst/>
+        </p:spPr>
+        <p:style>
+          <a:lnRef idx="1">
+            <a:schemeClr val="accent1"/>
+          </a:lnRef>
+          <a:fillRef idx="3">
+            <a:schemeClr val="accent1"/>
+          </a:fillRef>
+          <a:effectRef idx="2">
+            <a:schemeClr val="accent1"/>
+          </a:effectRef>
+          <a:fontRef idx="minor">
+            <a:schemeClr val="lt1"/>
+          </a:fontRef>
+        </p:style>
+        <p:txBody>
+          <a:bodyPr rtlCol="0" anchor="ctr"/>
+          <a:lstStyle/>
+          <a:p>
+            <a:pPr algn="ctr"/>
+          </a:p>
+        </p:txBody>
+      </p:sp>
+      <p:sp>
+        <p:nvSpPr>
+          <p:cNvPr id="4" name="TextBox 3"/>
+          <p:cNvSpPr txBox="1"/>
+          <p:nvPr/>
+        </p:nvSpPr>
+        <p:spPr>
+          <a:xfrm>
+            <a:off x="365760" y="27432"/>
+            <a:ext cx="7315200" cy="502920"/>
+          </a:xfrm>
+          <a:prstGeom prst="rect">
+            <a:avLst/>
+          </a:prstGeom>
+          <a:noFill/>
+        </p:spPr>
+        <p:txBody>
+          <a:bodyPr wrap="square" anchor="ctr">
+            <a:spAutoFit/>
+          </a:bodyPr>
+          <a:lstStyle/>
+          <a:p>
+            <a:pPr algn="l">
+              <a:lnSpc>
+                <a:spcPct val="100000"/>
+              </a:lnSpc>
+            </a:pPr>
+            <a:r>
+              <a:rPr sz="1500" b="1">
+                <a:solidFill>
+                  <a:srgbClr val="FFFFFF"/>
+                </a:solidFill>
+                <a:latin typeface="Malgun Gothic"/>
+              </a:rPr>
+              <a:t>🤝 Mangoi Agency User Guide</a:t>
+            </a:r>
+          </a:p>
+        </p:txBody>
+      </p:sp>
+      <p:sp>
+        <p:nvSpPr>
+          <p:cNvPr id="5" name="TextBox 4"/>
+          <p:cNvSpPr txBox="1"/>
+          <p:nvPr/>
+        </p:nvSpPr>
+        <p:spPr>
+          <a:xfrm>
+            <a:off x="8168335" y="27432"/>
+            <a:ext cx="3657600" cy="502920"/>
+          </a:xfrm>
+          <a:prstGeom prst="rect">
+            <a:avLst/>
+          </a:prstGeom>
+          <a:noFill/>
+        </p:spPr>
+        <p:txBody>
+          <a:bodyPr wrap="square" anchor="ctr">
+            <a:spAutoFit/>
+          </a:bodyPr>
+          <a:lstStyle/>
+          <a:p>
+            <a:pPr algn="r">
+              <a:lnSpc>
+                <a:spcPct val="100000"/>
+              </a:lnSpc>
+            </a:pPr>
+            <a:r>
+              <a:rPr sz="1300" b="1">
+                <a:solidFill>
+                  <a:srgbClr val="F1F5F9"/>
+                </a:solidFill>
+                <a:latin typeface="Malgun Gothic"/>
+              </a:rPr>
+              <a:t>How to Use the Main Features</a:t>
+            </a:r>
+          </a:p>
+        </p:txBody>
+      </p:sp>
+      <p:sp>
+        <p:nvSpPr>
+          <p:cNvPr id="6" name="Rounded Rectangle 5"/>
+          <p:cNvSpPr/>
+          <p:nvPr/>
+        </p:nvSpPr>
+        <p:spPr>
+          <a:xfrm>
+            <a:off x="365760" y="822960"/>
+            <a:ext cx="868680" cy="868680"/>
+          </a:xfrm>
+          <a:prstGeom prst="roundRect">
+            <a:avLst/>
+          </a:prstGeom>
+          <a:solidFill>
+            <a:srgbClr val="E11D48"/>
+          </a:solidFill>
+          <a:ln>
+            <a:noFill/>
+          </a:ln>
+          <a:effectLst/>
+        </p:spPr>
+        <p:style>
+          <a:lnRef idx="1">
+            <a:schemeClr val="accent1"/>
+          </a:lnRef>
+          <a:fillRef idx="3">
+            <a:schemeClr val="accent1"/>
+          </a:fillRef>
+          <a:effectRef idx="2">
+            <a:schemeClr val="accent1"/>
+          </a:effectRef>
+          <a:fontRef idx="minor">
+            <a:schemeClr val="lt1"/>
+          </a:fontRef>
+        </p:style>
+        <p:txBody>
+          <a:bodyPr rtlCol="0" anchor="ctr"/>
+          <a:lstStyle/>
+          <a:p>
+            <a:pPr algn="ctr"/>
+          </a:p>
+        </p:txBody>
+      </p:sp>
+      <p:sp>
+        <p:nvSpPr>
+          <p:cNvPr id="7" name="TextBox 6"/>
+          <p:cNvSpPr txBox="1"/>
+          <p:nvPr/>
+        </p:nvSpPr>
+        <p:spPr>
+          <a:xfrm>
+            <a:off x="365760" y="822960"/>
+            <a:ext cx="868680" cy="868680"/>
+          </a:xfrm>
+          <a:prstGeom prst="rect">
+            <a:avLst/>
+          </a:prstGeom>
+          <a:noFill/>
+        </p:spPr>
+        <p:txBody>
+          <a:bodyPr wrap="square" anchor="ctr">
+            <a:spAutoFit/>
+          </a:bodyPr>
+          <a:lstStyle/>
+          <a:p>
+            <a:pPr algn="ctr">
+              <a:lnSpc>
+                <a:spcPct val="100000"/>
+              </a:lnSpc>
+            </a:pPr>
+            <a:r>
+              <a:rPr sz="2600" b="1">
+                <a:solidFill>
+                  <a:srgbClr val="FFFFFF"/>
+                </a:solidFill>
+                <a:latin typeface="Malgun Gothic"/>
+              </a:rPr>
+              <a:t>24</a:t>
+            </a:r>
+          </a:p>
+        </p:txBody>
+      </p:sp>
+      <p:sp>
+        <p:nvSpPr>
+          <p:cNvPr id="8" name="TextBox 7"/>
+          <p:cNvSpPr txBox="1"/>
+          <p:nvPr/>
+        </p:nvSpPr>
+        <p:spPr>
+          <a:xfrm>
+            <a:off x="1371600" y="822960"/>
+            <a:ext cx="10424160" cy="502920"/>
+          </a:xfrm>
+          <a:prstGeom prst="rect">
+            <a:avLst/>
+          </a:prstGeom>
+          <a:noFill/>
+        </p:spPr>
+        <p:txBody>
+          <a:bodyPr wrap="square" anchor="t">
+            <a:spAutoFit/>
+          </a:bodyPr>
+          <a:lstStyle/>
+          <a:p>
+            <a:pPr algn="l">
+              <a:lnSpc>
+                <a:spcPct val="100000"/>
+              </a:lnSpc>
+            </a:pPr>
+            <a:r>
+              <a:rPr sz="2300" b="1">
+                <a:solidFill>
+                  <a:srgbClr val="1E2340"/>
+                </a:solidFill>
+                <a:latin typeface="Malgun Gothic"/>
+              </a:rPr>
+              <a:t>🌟 Sending the Parent Monthly Report (pentagon)</a:t>
+            </a:r>
+          </a:p>
+        </p:txBody>
+      </p:sp>
+      <p:sp>
+        <p:nvSpPr>
+          <p:cNvPr id="9" name="TextBox 8"/>
+          <p:cNvSpPr txBox="1"/>
+          <p:nvPr/>
+        </p:nvSpPr>
+        <p:spPr>
+          <a:xfrm>
+            <a:off x="1417320" y="1353312"/>
+            <a:ext cx="10424160" cy="320040"/>
+          </a:xfrm>
+          <a:prstGeom prst="rect">
+            <a:avLst/>
+          </a:prstGeom>
+          <a:noFill/>
+        </p:spPr>
+        <p:txBody>
+          <a:bodyPr wrap="square" anchor="t">
+            <a:spAutoFit/>
+          </a:bodyPr>
+          <a:lstStyle/>
+          <a:p>
+            <a:pPr algn="l">
+              <a:lnSpc>
+                <a:spcPct val="100000"/>
+              </a:lnSpc>
+            </a:pPr>
+            <a:r>
+              <a:rPr sz="1300" b="0">
+                <a:solidFill>
+                  <a:srgbClr val="64748B"/>
+                </a:solidFill>
+                <a:latin typeface="Malgun Gothic"/>
+              </a:rPr>
+              <a:t>Preview the 5-axis report, then share the link</a:t>
+            </a:r>
+          </a:p>
+        </p:txBody>
+      </p:sp>
+      <p:sp>
+        <p:nvSpPr>
+          <p:cNvPr id="10" name="Rounded Rectangle 9"/>
+          <p:cNvSpPr/>
+          <p:nvPr/>
+        </p:nvSpPr>
+        <p:spPr>
+          <a:xfrm>
+            <a:off x="365760" y="1828800"/>
+            <a:ext cx="11430000" cy="777240"/>
+          </a:xfrm>
+          <a:prstGeom prst="roundRect">
+            <a:avLst/>
+          </a:prstGeom>
+          <a:solidFill>
+            <a:srgbClr val="FFF1F2"/>
+          </a:solidFill>
+          <a:ln>
+            <a:noFill/>
+          </a:ln>
+          <a:effectLst/>
+        </p:spPr>
+        <p:style>
+          <a:lnRef idx="1">
+            <a:schemeClr val="accent1"/>
+          </a:lnRef>
+          <a:fillRef idx="3">
+            <a:schemeClr val="accent1"/>
+          </a:fillRef>
+          <a:effectRef idx="2">
+            <a:schemeClr val="accent1"/>
+          </a:effectRef>
+          <a:fontRef idx="minor">
+            <a:schemeClr val="lt1"/>
+          </a:fontRef>
+        </p:style>
+        <p:txBody>
+          <a:bodyPr rtlCol="0" anchor="ctr"/>
+          <a:lstStyle/>
+          <a:p>
+            <a:pPr algn="ctr"/>
+          </a:p>
+        </p:txBody>
+      </p:sp>
+      <p:sp>
+        <p:nvSpPr>
+          <p:cNvPr id="11" name="TextBox 10"/>
+          <p:cNvSpPr txBox="1"/>
+          <p:nvPr/>
+        </p:nvSpPr>
+        <p:spPr>
+          <a:xfrm>
+            <a:off x="548640" y="1901952"/>
+            <a:ext cx="11064240" cy="640080"/>
+          </a:xfrm>
+          <a:prstGeom prst="rect">
+            <a:avLst/>
+          </a:prstGeom>
+          <a:noFill/>
+        </p:spPr>
+        <p:txBody>
+          <a:bodyPr wrap="square" anchor="t">
+            <a:spAutoFit/>
+          </a:bodyPr>
+          <a:lstStyle/>
+          <a:p>
+            <a:pPr algn="l">
+              <a:lnSpc>
+                <a:spcPct val="115000"/>
+              </a:lnSpc>
+            </a:pPr>
+            <a:r>
+              <a:rPr sz="1200" b="0">
+                <a:solidFill>
+                  <a:srgbClr val="334155"/>
+                </a:solidFill>
+                <a:latin typeface="Malgun Gothic"/>
+              </a:rPr>
+              <a:t>The monthly report sent to parents is renewed as a pentagon 5-axis graph — Pronunciation &amp; Fluency / Vocabulary / Sentence Building / Class Attitude / Participation — at a glance, with attendance, judgment and a teacher's note. Admins and teachers enter a student ID and month to preview, then send the KakaoTalk link.</a:t>
+            </a:r>
+          </a:p>
+        </p:txBody>
+      </p:sp>
+      <p:sp>
+        <p:nvSpPr>
+          <p:cNvPr id="12" name="TextBox 11"/>
+          <p:cNvSpPr txBox="1"/>
+          <p:nvPr/>
+        </p:nvSpPr>
+        <p:spPr>
+          <a:xfrm>
+            <a:off x="457200" y="2743200"/>
+            <a:ext cx="5669280" cy="320040"/>
+          </a:xfrm>
+          <a:prstGeom prst="rect">
+            <a:avLst/>
+          </a:prstGeom>
+          <a:noFill/>
+        </p:spPr>
+        <p:txBody>
+          <a:bodyPr wrap="square" anchor="t">
+            <a:spAutoFit/>
+          </a:bodyPr>
+          <a:lstStyle/>
+          <a:p>
+            <a:pPr algn="l">
+              <a:lnSpc>
+                <a:spcPct val="100000"/>
+              </a:lnSpc>
+            </a:pPr>
+            <a:r>
+              <a:rPr sz="1350" b="1">
+                <a:solidFill>
+                  <a:srgbClr val="E11D48"/>
+                </a:solidFill>
+                <a:latin typeface="Malgun Gothic"/>
+              </a:rPr>
+              <a:t>How to use</a:t>
+            </a:r>
+          </a:p>
+        </p:txBody>
+      </p:sp>
+      <p:sp>
+        <p:nvSpPr>
+          <p:cNvPr id="13" name="TextBox 12"/>
+          <p:cNvSpPr txBox="1"/>
+          <p:nvPr/>
+        </p:nvSpPr>
+        <p:spPr>
+          <a:xfrm>
+            <a:off x="457200" y="3108960"/>
+            <a:ext cx="5669280" cy="2377440"/>
+          </a:xfrm>
+          <a:prstGeom prst="rect">
+            <a:avLst/>
+          </a:prstGeom>
+          <a:noFill/>
+        </p:spPr>
+        <p:txBody>
+          <a:bodyPr wrap="square">
+            <a:spAutoFit/>
+          </a:bodyPr>
+          <a:lstStyle/>
+          <a:p>
+            <a:pPr>
+              <a:lnSpc>
+                <a:spcPct val="115000"/>
+              </a:lnSpc>
+              <a:spcAft>
+                <a:spcPts val="600"/>
+              </a:spcAft>
+            </a:pPr>
+            <a:r>
+              <a:rPr sz="1050" b="1">
+                <a:solidFill>
+                  <a:srgbClr val="E11D48"/>
+                </a:solidFill>
+                <a:latin typeface="Malgun Gothic"/>
+              </a:rPr>
+              <a:t>● </a:t>
+            </a:r>
+            <a:r>
+              <a:rPr sz="1250">
+                <a:solidFill>
+                  <a:srgbClr val="334155"/>
+                </a:solidFill>
+                <a:latin typeface="Malgun Gothic"/>
+              </a:rPr>
+              <a:t>Open the Monthly Report screen.</a:t>
+            </a:r>
+          </a:p>
+          <a:p>
+            <a:pPr>
+              <a:lnSpc>
+                <a:spcPct val="115000"/>
+              </a:lnSpc>
+              <a:spcAft>
+                <a:spcPts val="600"/>
+              </a:spcAft>
+            </a:pPr>
+            <a:r>
+              <a:rPr sz="1050" b="1">
+                <a:solidFill>
+                  <a:srgbClr val="E11D48"/>
+                </a:solidFill>
+                <a:latin typeface="Malgun Gothic"/>
+              </a:rPr>
+              <a:t>● </a:t>
+            </a:r>
+            <a:r>
+              <a:rPr sz="1250">
+                <a:solidFill>
+                  <a:srgbClr val="334155"/>
+                </a:solidFill>
+                <a:latin typeface="Malgun Gothic"/>
+              </a:rPr>
+              <a:t>Enter a student ID and month, press View Report to preview.</a:t>
+            </a:r>
+          </a:p>
+          <a:p>
+            <a:pPr>
+              <a:lnSpc>
+                <a:spcPct val="115000"/>
+              </a:lnSpc>
+              <a:spcAft>
+                <a:spcPts val="600"/>
+              </a:spcAft>
+            </a:pPr>
+            <a:r>
+              <a:rPr sz="1050" b="1">
+                <a:solidFill>
+                  <a:srgbClr val="E11D48"/>
+                </a:solidFill>
+                <a:latin typeface="Malgun Gothic"/>
+              </a:rPr>
+              <a:t>● </a:t>
+            </a:r>
+            <a:r>
+              <a:rPr sz="1250">
+                <a:solidFill>
+                  <a:srgbClr val="334155"/>
+                </a:solidFill>
+                <a:latin typeface="Malgun Gothic"/>
+              </a:rPr>
+              <a:t>Check the pentagon and teacher's note; top up evaluations if needed.</a:t>
+            </a:r>
+          </a:p>
+          <a:p>
+            <a:pPr>
+              <a:lnSpc>
+                <a:spcPct val="115000"/>
+              </a:lnSpc>
+              <a:spcAft>
+                <a:spcPts val="600"/>
+              </a:spcAft>
+            </a:pPr>
+            <a:r>
+              <a:rPr sz="1050" b="1">
+                <a:solidFill>
+                  <a:srgbClr val="E11D48"/>
+                </a:solidFill>
+                <a:latin typeface="Malgun Gothic"/>
+              </a:rPr>
+              <a:t>● </a:t>
+            </a:r>
+            <a:r>
+              <a:rPr sz="1250">
+                <a:solidFill>
+                  <a:srgbClr val="334155"/>
+                </a:solidFill>
+                <a:latin typeface="Malgun Gothic"/>
+              </a:rPr>
+              <a:t>Append ?uid=ID&amp;period=YYYY-MM to the URL and send the KakaoTalk link.</a:t>
+            </a:r>
+          </a:p>
+        </p:txBody>
+      </p:sp>
+      <p:sp>
+        <p:nvSpPr>
+          <p:cNvPr id="14" name="Rounded Rectangle 13"/>
+          <p:cNvSpPr/>
+          <p:nvPr/>
+        </p:nvSpPr>
+        <p:spPr>
+          <a:xfrm>
+            <a:off x="457200" y="4782312"/>
+            <a:ext cx="5669280" cy="1316736"/>
+          </a:xfrm>
+          <a:prstGeom prst="roundRect">
+            <a:avLst/>
+          </a:prstGeom>
+          <a:solidFill>
+            <a:srgbClr val="F4F7FF"/>
+          </a:solidFill>
+          <a:ln w="12700">
+            <a:solidFill>
+              <a:srgbClr val="E11D48"/>
+            </a:solidFill>
+          </a:ln>
+          <a:effectLst/>
+        </p:spPr>
+        <p:style>
+          <a:lnRef idx="1">
+            <a:schemeClr val="accent1"/>
+          </a:lnRef>
+          <a:fillRef idx="3">
+            <a:schemeClr val="accent1"/>
+          </a:fillRef>
+          <a:effectRef idx="2">
+            <a:schemeClr val="accent1"/>
+          </a:effectRef>
+          <a:fontRef idx="minor">
+            <a:schemeClr val="lt1"/>
+          </a:fontRef>
+        </p:style>
+        <p:txBody>
+          <a:bodyPr rtlCol="0" anchor="ctr"/>
+          <a:lstStyle/>
+          <a:p>
+            <a:pPr algn="ctr"/>
+          </a:p>
+        </p:txBody>
+      </p:sp>
+      <p:sp>
+        <p:nvSpPr>
+          <p:cNvPr id="15" name="TextBox 14"/>
+          <p:cNvSpPr txBox="1"/>
+          <p:nvPr/>
+        </p:nvSpPr>
+        <p:spPr>
+          <a:xfrm>
+            <a:off x="594360" y="4837175"/>
+            <a:ext cx="5394960" cy="274320"/>
+          </a:xfrm>
+          <a:prstGeom prst="rect">
+            <a:avLst/>
+          </a:prstGeom>
+          <a:noFill/>
+        </p:spPr>
+        <p:txBody>
+          <a:bodyPr wrap="square" anchor="t">
+            <a:spAutoFit/>
+          </a:bodyPr>
+          <a:lstStyle/>
+          <a:p>
+            <a:pPr algn="l">
+              <a:lnSpc>
+                <a:spcPct val="100000"/>
+              </a:lnSpc>
+            </a:pPr>
+            <a:r>
+              <a:rPr sz="1150" b="1">
+                <a:solidFill>
+                  <a:srgbClr val="E11D48"/>
+                </a:solidFill>
+                <a:latin typeface="Malgun Gothic"/>
+              </a:rPr>
+              <a:t>✅ Key Points</a:t>
+            </a:r>
+          </a:p>
+        </p:txBody>
+      </p:sp>
+      <p:sp>
+        <p:nvSpPr>
+          <p:cNvPr id="16" name="TextBox 15"/>
+          <p:cNvSpPr txBox="1"/>
+          <p:nvPr/>
+        </p:nvSpPr>
+        <p:spPr>
+          <a:xfrm>
+            <a:off x="594360" y="5111496"/>
+            <a:ext cx="5394960" cy="950976"/>
+          </a:xfrm>
+          <a:prstGeom prst="rect">
+            <a:avLst/>
+          </a:prstGeom>
+          <a:noFill/>
+        </p:spPr>
+        <p:txBody>
+          <a:bodyPr wrap="square">
+            <a:spAutoFit/>
+          </a:bodyPr>
+          <a:lstStyle/>
+          <a:p>
+            <a:pPr>
+              <a:lnSpc>
+                <a:spcPct val="115000"/>
+              </a:lnSpc>
+              <a:spcAft>
+                <a:spcPts val="200"/>
+              </a:spcAft>
+            </a:pPr>
+            <a:r>
+              <a:rPr sz="900" b="1">
+                <a:solidFill>
+                  <a:srgbClr val="E11D48"/>
+                </a:solidFill>
+                <a:latin typeface="Malgun Gothic"/>
+              </a:rPr>
+              <a:t>● </a:t>
+            </a:r>
+            <a:r>
+              <a:rPr sz="1100">
+                <a:solidFill>
+                  <a:srgbClr val="334155"/>
+                </a:solidFill>
+                <a:latin typeface="Malgun Gothic"/>
+              </a:rPr>
+              <a:t>Only axes with real records are filled, so it's trustworthy.</a:t>
+            </a:r>
+          </a:p>
+          <a:p>
+            <a:pPr>
+              <a:lnSpc>
+                <a:spcPct val="115000"/>
+              </a:lnSpc>
+              <a:spcAft>
+                <a:spcPts val="200"/>
+              </a:spcAft>
+            </a:pPr>
+            <a:r>
+              <a:rPr sz="900" b="1">
+                <a:solidFill>
+                  <a:srgbClr val="E11D48"/>
+                </a:solidFill>
+                <a:latin typeface="Malgun Gothic"/>
+              </a:rPr>
+              <a:t>● </a:t>
+            </a:r>
+            <a:r>
+              <a:rPr sz="1100">
+                <a:solidFill>
+                  <a:srgbClr val="334155"/>
+                </a:solidFill>
+                <a:latin typeface="Malgun Gothic"/>
+              </a:rPr>
+              <a:t>Compiled on a two-month cycle — conveys change without tiring parents.</a:t>
+            </a:r>
+          </a:p>
+          <a:p>
+            <a:pPr>
+              <a:lnSpc>
+                <a:spcPct val="115000"/>
+              </a:lnSpc>
+              <a:spcAft>
+                <a:spcPts val="200"/>
+              </a:spcAft>
+            </a:pPr>
+            <a:r>
+              <a:rPr sz="900" b="1">
+                <a:solidFill>
+                  <a:srgbClr val="E11D48"/>
+                </a:solidFill>
+                <a:latin typeface="Malgun Gothic"/>
+              </a:rPr>
+              <a:t>● </a:t>
+            </a:r>
+            <a:r>
+              <a:rPr sz="1100">
+                <a:solidFill>
+                  <a:srgbClr val="334155"/>
+                </a:solidFill>
+                <a:latin typeface="Malgun Gothic"/>
+              </a:rPr>
+              <a:t>The Print/PDF button makes a paper report for consultations instantly.</a:t>
+            </a:r>
+          </a:p>
+        </p:txBody>
+      </p:sp>
+      <p:sp>
+        <p:nvSpPr>
+          <p:cNvPr id="17" name="Rounded Rectangle 16"/>
+          <p:cNvSpPr/>
+          <p:nvPr/>
+        </p:nvSpPr>
+        <p:spPr>
+          <a:xfrm>
+            <a:off x="457200" y="6208775"/>
+            <a:ext cx="5669280" cy="640080"/>
+          </a:xfrm>
+          <a:prstGeom prst="roundRect">
+            <a:avLst/>
+          </a:prstGeom>
+          <a:solidFill>
+            <a:srgbClr val="FFFBEB"/>
+          </a:solidFill>
+          <a:ln w="12700">
+            <a:solidFill>
+              <a:srgbClr val="F59E0B"/>
+            </a:solidFill>
+          </a:ln>
+          <a:effectLst/>
+        </p:spPr>
+        <p:style>
+          <a:lnRef idx="1">
+            <a:schemeClr val="accent1"/>
+          </a:lnRef>
+          <a:fillRef idx="3">
+            <a:schemeClr val="accent1"/>
+          </a:fillRef>
+          <a:effectRef idx="2">
+            <a:schemeClr val="accent1"/>
+          </a:effectRef>
+          <a:fontRef idx="minor">
+            <a:schemeClr val="lt1"/>
+          </a:fontRef>
+        </p:style>
+        <p:txBody>
+          <a:bodyPr rtlCol="0" anchor="ctr"/>
+          <a:lstStyle/>
+          <a:p>
+            <a:pPr algn="ctr"/>
+          </a:p>
+        </p:txBody>
+      </p:sp>
+      <p:sp>
+        <p:nvSpPr>
+          <p:cNvPr id="18" name="TextBox 17"/>
+          <p:cNvSpPr txBox="1"/>
+          <p:nvPr/>
+        </p:nvSpPr>
+        <p:spPr>
+          <a:xfrm>
+            <a:off x="594360" y="6254495"/>
+            <a:ext cx="5394960" cy="548640"/>
+          </a:xfrm>
+          <a:prstGeom prst="rect">
+            <a:avLst/>
+          </a:prstGeom>
+          <a:noFill/>
+        </p:spPr>
+        <p:txBody>
+          <a:bodyPr wrap="square" anchor="t">
+            <a:spAutoFit/>
+          </a:bodyPr>
+          <a:lstStyle/>
+          <a:p>
+            <a:pPr algn="l">
+              <a:lnSpc>
+                <a:spcPct val="105000"/>
+              </a:lnSpc>
+            </a:pPr>
+            <a:r>
+              <a:rPr sz="1050" b="0">
+                <a:solidFill>
+                  <a:srgbClr val="92670A"/>
+                </a:solidFill>
+                <a:latin typeface="Malgun Gothic"/>
+              </a:rPr>
+              <a:t>⚠️ Good to know · Report access passes an approval gate — admins via their login session, parents only via the issued link (token).</a:t>
+            </a:r>
+          </a:p>
+        </p:txBody>
+      </p:sp>
+      <p:sp>
+        <p:nvSpPr>
+          <p:cNvPr id="19" name="Rounded Rectangle 18"/>
+          <p:cNvSpPr/>
+          <p:nvPr/>
+        </p:nvSpPr>
+        <p:spPr>
+          <a:xfrm>
+            <a:off x="457200" y="6940295"/>
+            <a:ext cx="5669280" cy="658368"/>
+          </a:xfrm>
+          <a:prstGeom prst="roundRect">
+            <a:avLst/>
+          </a:prstGeom>
+          <a:solidFill>
+            <a:srgbClr val="FFF7E6"/>
+          </a:solidFill>
+          <a:ln w="12700">
+            <a:solidFill>
+              <a:srgbClr val="0EA5E9"/>
+            </a:solidFill>
+          </a:ln>
+          <a:effectLst/>
+        </p:spPr>
+        <p:style>
+          <a:lnRef idx="1">
+            <a:schemeClr val="accent1"/>
+          </a:lnRef>
+          <a:fillRef idx="3">
+            <a:schemeClr val="accent1"/>
+          </a:fillRef>
+          <a:effectRef idx="2">
+            <a:schemeClr val="accent1"/>
+          </a:effectRef>
+          <a:fontRef idx="minor">
+            <a:schemeClr val="lt1"/>
+          </a:fontRef>
+        </p:style>
+        <p:txBody>
+          <a:bodyPr rtlCol="0" anchor="ctr"/>
+          <a:lstStyle/>
+          <a:p>
+            <a:pPr algn="ctr"/>
+          </a:p>
+        </p:txBody>
+      </p:sp>
+      <p:sp>
+        <p:nvSpPr>
+          <p:cNvPr id="20" name="TextBox 19"/>
+          <p:cNvSpPr txBox="1"/>
+          <p:nvPr/>
+        </p:nvSpPr>
+        <p:spPr>
+          <a:xfrm>
+            <a:off x="594360" y="6986015"/>
+            <a:ext cx="5394960" cy="566928"/>
+          </a:xfrm>
+          <a:prstGeom prst="rect">
+            <a:avLst/>
+          </a:prstGeom>
+          <a:noFill/>
+        </p:spPr>
+        <p:txBody>
+          <a:bodyPr wrap="square" anchor="t">
+            <a:spAutoFit/>
+          </a:bodyPr>
+          <a:lstStyle/>
+          <a:p>
+            <a:pPr algn="l">
+              <a:lnSpc>
+                <a:spcPct val="105000"/>
+              </a:lnSpc>
+            </a:pPr>
+            <a:r>
+              <a:rPr sz="1050" b="0">
+                <a:solidFill>
+                  <a:srgbClr val="5B4A2A"/>
+                </a:solidFill>
+                <a:latin typeface="Malgun Gothic"/>
+              </a:rPr>
+              <a:t>💡 Tip · Sending the report link ahead of a booked consultation makes the meeting much smoother.</a:t>
+            </a:r>
+          </a:p>
+        </p:txBody>
+      </p:sp>
+      <p:sp>
+        <p:nvSpPr>
+          <p:cNvPr id="21" name="Rectangle 20"/>
+          <p:cNvSpPr/>
+          <p:nvPr/>
+        </p:nvSpPr>
+        <p:spPr>
+          <a:xfrm>
+            <a:off x="6300216" y="2345436"/>
+            <a:ext cx="5596128" cy="3538728"/>
+          </a:xfrm>
+          <a:prstGeom prst="rect">
+            <a:avLst/>
+          </a:prstGeom>
+          <a:solidFill>
+            <a:srgbClr val="FFFFFF"/>
+          </a:solidFill>
+          <a:ln w="12700">
+            <a:solidFill>
+              <a:srgbClr val="E2E8F0"/>
+            </a:solidFill>
+          </a:ln>
+          <a:effectLst/>
+        </p:spPr>
+        <p:style>
+          <a:lnRef idx="1">
+            <a:schemeClr val="accent1"/>
+          </a:lnRef>
+          <a:fillRef idx="3">
+            <a:schemeClr val="accent1"/>
+          </a:fillRef>
+          <a:effectRef idx="2">
+            <a:schemeClr val="accent1"/>
+          </a:effectRef>
+          <a:fontRef idx="minor">
+            <a:schemeClr val="lt1"/>
+          </a:fontRef>
+        </p:style>
+        <p:txBody>
+          <a:bodyPr rtlCol="0" anchor="ctr"/>
+          <a:lstStyle/>
+          <a:p>
+            <a:pPr algn="ctr"/>
+          </a:p>
+        </p:txBody>
+      </p:sp>
+      <p:pic>
+        <p:nvPicPr>
+          <p:cNvPr id="22" name="Picture 21" descr="student_report_pentagon.jpg"/>
+          <p:cNvPicPr>
+            <a:picLocks noChangeAspect="1"/>
+          </p:cNvPicPr>
+          <p:nvPr/>
+        </p:nvPicPr>
+        <p:blipFill>
+          <a:blip r:embed="rId2"/>
+          <a:stretch>
+            <a:fillRect/>
+          </a:stretch>
+        </p:blipFill>
+        <p:spPr>
+          <a:xfrm>
+            <a:off x="6355080" y="2400300"/>
+            <a:ext cx="5486400" cy="3429000"/>
+          </a:xfrm>
+          <a:prstGeom prst="rect">
+            <a:avLst/>
+          </a:prstGeom>
+        </p:spPr>
+      </p:pic>
+    </p:spTree>
+  </p:cSld>
+  <p:clrMapOvr>
+    <a:masterClrMapping/>
+  </p:clrMapOvr>
+</p:sld>
+</file>
+
+<file path=ppt/slides/slide28.xml><?xml version="1.0" encoding="utf-8"?>
+<p:sld xmlns:a="http://schemas.openxmlformats.org/drawingml/2006/main" xmlns:p="http://schemas.openxmlformats.org/presentationml/2006/main" xmlns:r="http://schemas.openxmlformats.org/officeDocument/2006/relationships">
+  <p:cSld>
+    <p:bg>
+      <p:bgPr>
+        <a:solidFill>
+          <a:srgbClr val="FFFFFF"/>
+        </a:solidFill>
+        <a:effectLst/>
+      </p:bgPr>
+    </p:bg>
+    <p:spTree>
+      <p:nvGrpSpPr>
+        <p:cNvPr id="1" name=""/>
+        <p:cNvGrpSpPr/>
+        <p:nvPr/>
+      </p:nvGrpSpPr>
+      <p:grpSpPr/>
+      <p:sp>
+        <p:nvSpPr>
+          <p:cNvPr id="2" name="Rectangle 1"/>
+          <p:cNvSpPr/>
+          <p:nvPr/>
+        </p:nvSpPr>
+        <p:spPr>
+          <a:xfrm>
+            <a:off x="0" y="0"/>
+            <a:ext cx="12191695" cy="566928"/>
+          </a:xfrm>
+          <a:prstGeom prst="rect">
+            <a:avLst/>
+          </a:prstGeom>
+          <a:solidFill>
+            <a:srgbClr val="E11D48"/>
+          </a:solidFill>
+          <a:ln>
+            <a:noFill/>
+          </a:ln>
+          <a:effectLst/>
+        </p:spPr>
+        <p:style>
+          <a:lnRef idx="1">
+            <a:schemeClr val="accent1"/>
+          </a:lnRef>
+          <a:fillRef idx="3">
+            <a:schemeClr val="accent1"/>
+          </a:fillRef>
+          <a:effectRef idx="2">
+            <a:schemeClr val="accent1"/>
+          </a:effectRef>
+          <a:fontRef idx="minor">
+            <a:schemeClr val="lt1"/>
+          </a:fontRef>
+        </p:style>
+        <p:txBody>
+          <a:bodyPr rtlCol="0" anchor="ctr"/>
+          <a:lstStyle/>
+          <a:p>
+            <a:pPr algn="ctr"/>
+          </a:p>
+        </p:txBody>
+      </p:sp>
+      <p:sp>
+        <p:nvSpPr>
+          <p:cNvPr id="3" name="Rectangle 2"/>
+          <p:cNvSpPr/>
+          <p:nvPr/>
+        </p:nvSpPr>
+        <p:spPr>
+          <a:xfrm>
+            <a:off x="0" y="566928"/>
+            <a:ext cx="12191695" cy="54864"/>
+          </a:xfrm>
+          <a:prstGeom prst="rect">
+            <a:avLst/>
+          </a:prstGeom>
+          <a:solidFill>
+            <a:srgbClr val="0EA5E9"/>
+          </a:solidFill>
+          <a:ln>
+            <a:noFill/>
+          </a:ln>
+          <a:effectLst/>
+        </p:spPr>
+        <p:style>
+          <a:lnRef idx="1">
+            <a:schemeClr val="accent1"/>
+          </a:lnRef>
+          <a:fillRef idx="3">
+            <a:schemeClr val="accent1"/>
+          </a:fillRef>
+          <a:effectRef idx="2">
+            <a:schemeClr val="accent1"/>
+          </a:effectRef>
+          <a:fontRef idx="minor">
+            <a:schemeClr val="lt1"/>
+          </a:fontRef>
+        </p:style>
+        <p:txBody>
+          <a:bodyPr rtlCol="0" anchor="ctr"/>
+          <a:lstStyle/>
+          <a:p>
+            <a:pPr algn="ctr"/>
+          </a:p>
+        </p:txBody>
+      </p:sp>
+      <p:sp>
+        <p:nvSpPr>
+          <p:cNvPr id="4" name="TextBox 3"/>
+          <p:cNvSpPr txBox="1"/>
+          <p:nvPr/>
+        </p:nvSpPr>
+        <p:spPr>
+          <a:xfrm>
+            <a:off x="365760" y="27432"/>
+            <a:ext cx="7315200" cy="502920"/>
+          </a:xfrm>
+          <a:prstGeom prst="rect">
+            <a:avLst/>
+          </a:prstGeom>
+          <a:noFill/>
+        </p:spPr>
+        <p:txBody>
+          <a:bodyPr wrap="square" anchor="ctr">
+            <a:spAutoFit/>
+          </a:bodyPr>
+          <a:lstStyle/>
+          <a:p>
+            <a:pPr algn="l">
+              <a:lnSpc>
+                <a:spcPct val="100000"/>
+              </a:lnSpc>
+            </a:pPr>
+            <a:r>
+              <a:rPr sz="1500" b="1">
+                <a:solidFill>
+                  <a:srgbClr val="FFFFFF"/>
+                </a:solidFill>
+                <a:latin typeface="Malgun Gothic"/>
+              </a:rPr>
+              <a:t>🤝 Mangoi Agency User Guide</a:t>
+            </a:r>
+          </a:p>
+        </p:txBody>
+      </p:sp>
+      <p:sp>
+        <p:nvSpPr>
+          <p:cNvPr id="5" name="TextBox 4"/>
+          <p:cNvSpPr txBox="1"/>
+          <p:nvPr/>
+        </p:nvSpPr>
+        <p:spPr>
+          <a:xfrm>
+            <a:off x="8168335" y="27432"/>
+            <a:ext cx="3657600" cy="502920"/>
+          </a:xfrm>
+          <a:prstGeom prst="rect">
+            <a:avLst/>
+          </a:prstGeom>
+          <a:noFill/>
+        </p:spPr>
+        <p:txBody>
+          <a:bodyPr wrap="square" anchor="ctr">
+            <a:spAutoFit/>
+          </a:bodyPr>
+          <a:lstStyle/>
+          <a:p>
+            <a:pPr algn="r">
+              <a:lnSpc>
+                <a:spcPct val="100000"/>
+              </a:lnSpc>
+            </a:pPr>
+            <a:r>
+              <a:rPr sz="1300" b="1">
+                <a:solidFill>
+                  <a:srgbClr val="F1F5F9"/>
+                </a:solidFill>
+                <a:latin typeface="Malgun Gothic"/>
+              </a:rPr>
+              <a:t>Feature Summary · Data</a:t>
+            </a:r>
+          </a:p>
+        </p:txBody>
+      </p:sp>
+      <p:sp>
+        <p:nvSpPr>
+          <p:cNvPr id="6" name="Rounded Rectangle 5"/>
+          <p:cNvSpPr/>
+          <p:nvPr/>
+        </p:nvSpPr>
+        <p:spPr>
+          <a:xfrm>
             <a:off x="365760" y="841248"/>
             <a:ext cx="658368" cy="512064"/>
           </a:xfrm>
+          <a:prstGeom prst="roundRect">
+            <a:avLst/>
+          </a:prstGeom>
+          <a:solidFill>
+            <a:srgbClr val="E11D48"/>
+          </a:solidFill>
+          <a:ln>
+            <a:noFill/>
+          </a:ln>
+          <a:effectLst/>
+        </p:spPr>
+        <p:style>
+          <a:lnRef idx="1">
+            <a:schemeClr val="accent1"/>
+          </a:lnRef>
+          <a:fillRef idx="3">
+            <a:schemeClr val="accent1"/>
+          </a:fillRef>
+          <a:effectRef idx="2">
+            <a:schemeClr val="accent1"/>
+          </a:effectRef>
+          <a:fontRef idx="minor">
+            <a:schemeClr val="lt1"/>
+          </a:fontRef>
+        </p:style>
+        <p:txBody>
+          <a:bodyPr rtlCol="0" anchor="ctr"/>
+          <a:lstStyle/>
+          <a:p>
+            <a:pPr algn="ctr"/>
+          </a:p>
+        </p:txBody>
+      </p:sp>
+      <p:sp>
+        <p:nvSpPr>
+          <p:cNvPr id="7" name="TextBox 6"/>
+          <p:cNvSpPr txBox="1"/>
+          <p:nvPr/>
+        </p:nvSpPr>
+        <p:spPr>
+          <a:xfrm>
+            <a:off x="365760" y="841248"/>
+            <a:ext cx="658368" cy="512064"/>
+          </a:xfrm>
           <a:prstGeom prst="rect">
             <a:avLst/>
           </a:prstGeom>
@@ -20917,7 +23059,7 @@
                 </a:solidFill>
                 <a:latin typeface="Malgun Gothic"/>
               </a:rPr>
-              <a:t>23</a:t>
+              <a:t>25</a:t>
             </a:r>
           </a:p>
         </p:txBody>
@@ -21843,7 +23985,7 @@
 </p:sld>
 </file>
 
-<file path=ppt/slides/slide27.xml><?xml version="1.0" encoding="utf-8"?>
+<file path=ppt/slides/slide29.xml><?xml version="1.0" encoding="utf-8"?>
 <p:sld xmlns:a="http://schemas.openxmlformats.org/drawingml/2006/main" xmlns:p="http://schemas.openxmlformats.org/presentationml/2006/main" xmlns:r="http://schemas.openxmlformats.org/officeDocument/2006/relationships">
   <p:cSld>
     <p:bg>
@@ -22105,7 +24247,7 @@
                 </a:solidFill>
                 <a:latin typeface="Malgun Gothic"/>
               </a:rPr>
-              <a:t>24</a:t>
+              <a:t>26</a:t>
             </a:r>
           </a:p>
         </p:txBody>
@@ -22263,1873 +24405,6 @@
           </a:graphicData>
         </a:graphic>
       </p:graphicFrame>
-    </p:spTree>
-  </p:cSld>
-  <p:clrMapOvr>
-    <a:masterClrMapping/>
-  </p:clrMapOvr>
-</p:sld>
-</file>
-
-<file path=ppt/slides/slide28.xml><?xml version="1.0" encoding="utf-8"?>
-<p:sld xmlns:a="http://schemas.openxmlformats.org/drawingml/2006/main" xmlns:p="http://schemas.openxmlformats.org/presentationml/2006/main" xmlns:r="http://schemas.openxmlformats.org/officeDocument/2006/relationships">
-  <p:cSld>
-    <p:bg>
-      <p:bgPr>
-        <a:solidFill>
-          <a:srgbClr val="FFFFFF"/>
-        </a:solidFill>
-        <a:effectLst/>
-      </p:bgPr>
-    </p:bg>
-    <p:spTree>
-      <p:nvGrpSpPr>
-        <p:cNvPr id="1" name=""/>
-        <p:cNvGrpSpPr/>
-        <p:nvPr/>
-      </p:nvGrpSpPr>
-      <p:grpSpPr/>
-      <p:sp>
-        <p:nvSpPr>
-          <p:cNvPr id="2" name="Rectangle 1"/>
-          <p:cNvSpPr/>
-          <p:nvPr/>
-        </p:nvSpPr>
-        <p:spPr>
-          <a:xfrm>
-            <a:off x="0" y="0"/>
-            <a:ext cx="12191695" cy="566928"/>
-          </a:xfrm>
-          <a:prstGeom prst="rect">
-            <a:avLst/>
-          </a:prstGeom>
-          <a:solidFill>
-            <a:srgbClr val="E11D48"/>
-          </a:solidFill>
-          <a:ln>
-            <a:noFill/>
-          </a:ln>
-          <a:effectLst/>
-        </p:spPr>
-        <p:style>
-          <a:lnRef idx="1">
-            <a:schemeClr val="accent1"/>
-          </a:lnRef>
-          <a:fillRef idx="3">
-            <a:schemeClr val="accent1"/>
-          </a:fillRef>
-          <a:effectRef idx="2">
-            <a:schemeClr val="accent1"/>
-          </a:effectRef>
-          <a:fontRef idx="minor">
-            <a:schemeClr val="lt1"/>
-          </a:fontRef>
-        </p:style>
-        <p:txBody>
-          <a:bodyPr rtlCol="0" anchor="ctr"/>
-          <a:lstStyle/>
-          <a:p>
-            <a:pPr algn="ctr"/>
-          </a:p>
-        </p:txBody>
-      </p:sp>
-      <p:sp>
-        <p:nvSpPr>
-          <p:cNvPr id="3" name="Rectangle 2"/>
-          <p:cNvSpPr/>
-          <p:nvPr/>
-        </p:nvSpPr>
-        <p:spPr>
-          <a:xfrm>
-            <a:off x="0" y="566928"/>
-            <a:ext cx="12191695" cy="54864"/>
-          </a:xfrm>
-          <a:prstGeom prst="rect">
-            <a:avLst/>
-          </a:prstGeom>
-          <a:solidFill>
-            <a:srgbClr val="0EA5E9"/>
-          </a:solidFill>
-          <a:ln>
-            <a:noFill/>
-          </a:ln>
-          <a:effectLst/>
-        </p:spPr>
-        <p:style>
-          <a:lnRef idx="1">
-            <a:schemeClr val="accent1"/>
-          </a:lnRef>
-          <a:fillRef idx="3">
-            <a:schemeClr val="accent1"/>
-          </a:fillRef>
-          <a:effectRef idx="2">
-            <a:schemeClr val="accent1"/>
-          </a:effectRef>
-          <a:fontRef idx="minor">
-            <a:schemeClr val="lt1"/>
-          </a:fontRef>
-        </p:style>
-        <p:txBody>
-          <a:bodyPr rtlCol="0" anchor="ctr"/>
-          <a:lstStyle/>
-          <a:p>
-            <a:pPr algn="ctr"/>
-          </a:p>
-        </p:txBody>
-      </p:sp>
-      <p:sp>
-        <p:nvSpPr>
-          <p:cNvPr id="4" name="TextBox 3"/>
-          <p:cNvSpPr txBox="1"/>
-          <p:nvPr/>
-        </p:nvSpPr>
-        <p:spPr>
-          <a:xfrm>
-            <a:off x="365760" y="27432"/>
-            <a:ext cx="7315200" cy="502920"/>
-          </a:xfrm>
-          <a:prstGeom prst="rect">
-            <a:avLst/>
-          </a:prstGeom>
-          <a:noFill/>
-        </p:spPr>
-        <p:txBody>
-          <a:bodyPr wrap="square" anchor="ctr">
-            <a:spAutoFit/>
-          </a:bodyPr>
-          <a:lstStyle/>
-          <a:p>
-            <a:pPr algn="l">
-              <a:lnSpc>
-                <a:spcPct val="100000"/>
-              </a:lnSpc>
-            </a:pPr>
-            <a:r>
-              <a:rPr sz="1500" b="1">
-                <a:solidFill>
-                  <a:srgbClr val="FFFFFF"/>
-                </a:solidFill>
-                <a:latin typeface="Malgun Gothic"/>
-              </a:rPr>
-              <a:t>🤝 Mangoi Agency User Guide</a:t>
-            </a:r>
-          </a:p>
-        </p:txBody>
-      </p:sp>
-      <p:sp>
-        <p:nvSpPr>
-          <p:cNvPr id="5" name="TextBox 4"/>
-          <p:cNvSpPr txBox="1"/>
-          <p:nvPr/>
-        </p:nvSpPr>
-        <p:spPr>
-          <a:xfrm>
-            <a:off x="8168335" y="27432"/>
-            <a:ext cx="3657600" cy="502920"/>
-          </a:xfrm>
-          <a:prstGeom prst="rect">
-            <a:avLst/>
-          </a:prstGeom>
-          <a:noFill/>
-        </p:spPr>
-        <p:txBody>
-          <a:bodyPr wrap="square" anchor="ctr">
-            <a:spAutoFit/>
-          </a:bodyPr>
-          <a:lstStyle/>
-          <a:p>
-            <a:pPr algn="r">
-              <a:lnSpc>
-                <a:spcPct val="100000"/>
-              </a:lnSpc>
-            </a:pPr>
-            <a:r>
-              <a:rPr sz="1300" b="1">
-                <a:solidFill>
-                  <a:srgbClr val="F1F5F9"/>
-                </a:solidFill>
-                <a:latin typeface="Malgun Gothic"/>
-              </a:rPr>
-              <a:t>Frequently Asked Questions (FAQ)</a:t>
-            </a:r>
-          </a:p>
-        </p:txBody>
-      </p:sp>
-      <p:sp>
-        <p:nvSpPr>
-          <p:cNvPr id="6" name="Rounded Rectangle 5"/>
-          <p:cNvSpPr/>
-          <p:nvPr/>
-        </p:nvSpPr>
-        <p:spPr>
-          <a:xfrm>
-            <a:off x="365760" y="841248"/>
-            <a:ext cx="658368" cy="512064"/>
-          </a:xfrm>
-          <a:prstGeom prst="roundRect">
-            <a:avLst/>
-          </a:prstGeom>
-          <a:solidFill>
-            <a:srgbClr val="E11D48"/>
-          </a:solidFill>
-          <a:ln>
-            <a:noFill/>
-          </a:ln>
-          <a:effectLst/>
-        </p:spPr>
-        <p:style>
-          <a:lnRef idx="1">
-            <a:schemeClr val="accent1"/>
-          </a:lnRef>
-          <a:fillRef idx="3">
-            <a:schemeClr val="accent1"/>
-          </a:fillRef>
-          <a:effectRef idx="2">
-            <a:schemeClr val="accent1"/>
-          </a:effectRef>
-          <a:fontRef idx="minor">
-            <a:schemeClr val="lt1"/>
-          </a:fontRef>
-        </p:style>
-        <p:txBody>
-          <a:bodyPr rtlCol="0" anchor="ctr"/>
-          <a:lstStyle/>
-          <a:p>
-            <a:pPr algn="ctr"/>
-          </a:p>
-        </p:txBody>
-      </p:sp>
-      <p:sp>
-        <p:nvSpPr>
-          <p:cNvPr id="7" name="TextBox 6"/>
-          <p:cNvSpPr txBox="1"/>
-          <p:nvPr/>
-        </p:nvSpPr>
-        <p:spPr>
-          <a:xfrm>
-            <a:off x="365760" y="841248"/>
-            <a:ext cx="658368" cy="512064"/>
-          </a:xfrm>
-          <a:prstGeom prst="rect">
-            <a:avLst/>
-          </a:prstGeom>
-          <a:noFill/>
-        </p:spPr>
-        <p:txBody>
-          <a:bodyPr wrap="square" anchor="ctr">
-            <a:spAutoFit/>
-          </a:bodyPr>
-          <a:lstStyle/>
-          <a:p>
-            <a:pPr algn="ctr">
-              <a:lnSpc>
-                <a:spcPct val="100000"/>
-              </a:lnSpc>
-            </a:pPr>
-            <a:r>
-              <a:rPr sz="1700" b="1">
-                <a:solidFill>
-                  <a:srgbClr val="FFFFFF"/>
-                </a:solidFill>
-                <a:latin typeface="Malgun Gothic"/>
-              </a:rPr>
-              <a:t>25</a:t>
-            </a:r>
-          </a:p>
-        </p:txBody>
-      </p:sp>
-      <p:sp>
-        <p:nvSpPr>
-          <p:cNvPr id="8" name="TextBox 7"/>
-          <p:cNvSpPr txBox="1"/>
-          <p:nvPr/>
-        </p:nvSpPr>
-        <p:spPr>
-          <a:xfrm>
-            <a:off x="1143000" y="868680"/>
-            <a:ext cx="9144000" cy="457200"/>
-          </a:xfrm>
-          <a:prstGeom prst="rect">
-            <a:avLst/>
-          </a:prstGeom>
-          <a:noFill/>
-        </p:spPr>
-        <p:txBody>
-          <a:bodyPr wrap="square" anchor="t">
-            <a:spAutoFit/>
-          </a:bodyPr>
-          <a:lstStyle/>
-          <a:p>
-            <a:pPr algn="l">
-              <a:lnSpc>
-                <a:spcPct val="100000"/>
-              </a:lnSpc>
-            </a:pPr>
-            <a:r>
-              <a:rPr sz="2200" b="1">
-                <a:solidFill>
-                  <a:srgbClr val="E11D48"/>
-                </a:solidFill>
-                <a:latin typeface="Malgun Gothic"/>
-              </a:rPr>
-              <a:t>❓ Frequently Asked Questions (FAQ)</a:t>
-            </a:r>
-          </a:p>
-        </p:txBody>
-      </p:sp>
-      <p:sp>
-        <p:nvSpPr>
-          <p:cNvPr id="9" name="Rounded Rectangle 8"/>
-          <p:cNvSpPr/>
-          <p:nvPr/>
-        </p:nvSpPr>
-        <p:spPr>
-          <a:xfrm>
-            <a:off x="365760" y="1554480"/>
-            <a:ext cx="11460175" cy="868680"/>
-          </a:xfrm>
-          <a:prstGeom prst="roundRect">
-            <a:avLst/>
-          </a:prstGeom>
-          <a:solidFill>
-            <a:srgbClr val="F8FAFC"/>
-          </a:solidFill>
-          <a:ln w="12700">
-            <a:solidFill>
-              <a:srgbClr val="E2E8F0"/>
-            </a:solidFill>
-          </a:ln>
-          <a:effectLst/>
-        </p:spPr>
-        <p:style>
-          <a:lnRef idx="1">
-            <a:schemeClr val="accent1"/>
-          </a:lnRef>
-          <a:fillRef idx="3">
-            <a:schemeClr val="accent1"/>
-          </a:fillRef>
-          <a:effectRef idx="2">
-            <a:schemeClr val="accent1"/>
-          </a:effectRef>
-          <a:fontRef idx="minor">
-            <a:schemeClr val="lt1"/>
-          </a:fontRef>
-        </p:style>
-        <p:txBody>
-          <a:bodyPr rtlCol="0" anchor="ctr"/>
-          <a:lstStyle/>
-          <a:p>
-            <a:pPr algn="ctr"/>
-          </a:p>
-        </p:txBody>
-      </p:sp>
-      <p:sp>
-        <p:nvSpPr>
-          <p:cNvPr id="10" name="TextBox 9"/>
-          <p:cNvSpPr txBox="1"/>
-          <p:nvPr/>
-        </p:nvSpPr>
-        <p:spPr>
-          <a:xfrm>
-            <a:off x="548640" y="1627632"/>
-            <a:ext cx="11094415" cy="365760"/>
-          </a:xfrm>
-          <a:prstGeom prst="rect">
-            <a:avLst/>
-          </a:prstGeom>
-          <a:noFill/>
-        </p:spPr>
-        <p:txBody>
-          <a:bodyPr wrap="square" anchor="t">
-            <a:spAutoFit/>
-          </a:bodyPr>
-          <a:lstStyle/>
-          <a:p>
-            <a:pPr algn="l">
-              <a:lnSpc>
-                <a:spcPct val="100000"/>
-              </a:lnSpc>
-            </a:pPr>
-            <a:r>
-              <a:rPr sz="1350" b="1">
-                <a:solidFill>
-                  <a:srgbClr val="E11D48"/>
-                </a:solidFill>
-                <a:latin typeface="Malgun Gothic"/>
-              </a:rPr>
-              <a:t>Q. Where do I log in?</a:t>
-            </a:r>
-          </a:p>
-        </p:txBody>
-      </p:sp>
-      <p:sp>
-        <p:nvSpPr>
-          <p:cNvPr id="11" name="TextBox 10"/>
-          <p:cNvSpPr txBox="1"/>
-          <p:nvPr/>
-        </p:nvSpPr>
-        <p:spPr>
-          <a:xfrm>
-            <a:off x="548640" y="1965960"/>
-            <a:ext cx="11094415" cy="411480"/>
-          </a:xfrm>
-          <a:prstGeom prst="rect">
-            <a:avLst/>
-          </a:prstGeom>
-          <a:noFill/>
-        </p:spPr>
-        <p:txBody>
-          <a:bodyPr wrap="square" anchor="t">
-            <a:spAutoFit/>
-          </a:bodyPr>
-          <a:lstStyle/>
-          <a:p>
-            <a:pPr algn="l">
-              <a:lnSpc>
-                <a:spcPct val="105000"/>
-              </a:lnSpc>
-            </a:pPr>
-            <a:r>
-              <a:rPr sz="1150" b="0">
-                <a:solidFill>
-                  <a:srgbClr val="475569"/>
-                </a:solidFill>
-                <a:latin typeface="Malgun Gothic"/>
-              </a:rPr>
-              <a:t>A. Log in at admin.mangoi.co.kr. By role (agency), only your agency's data shows automatically.</a:t>
-            </a:r>
-          </a:p>
-        </p:txBody>
-      </p:sp>
-      <p:sp>
-        <p:nvSpPr>
-          <p:cNvPr id="12" name="Rounded Rectangle 11"/>
-          <p:cNvSpPr/>
-          <p:nvPr/>
-        </p:nvSpPr>
-        <p:spPr>
-          <a:xfrm>
-            <a:off x="365760" y="2542032"/>
-            <a:ext cx="11460175" cy="868680"/>
-          </a:xfrm>
-          <a:prstGeom prst="roundRect">
-            <a:avLst/>
-          </a:prstGeom>
-          <a:solidFill>
-            <a:srgbClr val="F8FAFC"/>
-          </a:solidFill>
-          <a:ln w="12700">
-            <a:solidFill>
-              <a:srgbClr val="E2E8F0"/>
-            </a:solidFill>
-          </a:ln>
-          <a:effectLst/>
-        </p:spPr>
-        <p:style>
-          <a:lnRef idx="1">
-            <a:schemeClr val="accent1"/>
-          </a:lnRef>
-          <a:fillRef idx="3">
-            <a:schemeClr val="accent1"/>
-          </a:fillRef>
-          <a:effectRef idx="2">
-            <a:schemeClr val="accent1"/>
-          </a:effectRef>
-          <a:fontRef idx="minor">
-            <a:schemeClr val="lt1"/>
-          </a:fontRef>
-        </p:style>
-        <p:txBody>
-          <a:bodyPr rtlCol="0" anchor="ctr"/>
-          <a:lstStyle/>
-          <a:p>
-            <a:pPr algn="ctr"/>
-          </a:p>
-        </p:txBody>
-      </p:sp>
-      <p:sp>
-        <p:nvSpPr>
-          <p:cNvPr id="13" name="TextBox 12"/>
-          <p:cNvSpPr txBox="1"/>
-          <p:nvPr/>
-        </p:nvSpPr>
-        <p:spPr>
-          <a:xfrm>
-            <a:off x="548640" y="2615184"/>
-            <a:ext cx="11094415" cy="365760"/>
-          </a:xfrm>
-          <a:prstGeom prst="rect">
-            <a:avLst/>
-          </a:prstGeom>
-          <a:noFill/>
-        </p:spPr>
-        <p:txBody>
-          <a:bodyPr wrap="square" anchor="t">
-            <a:spAutoFit/>
-          </a:bodyPr>
-          <a:lstStyle/>
-          <a:p>
-            <a:pPr algn="l">
-              <a:lnSpc>
-                <a:spcPct val="100000"/>
-              </a:lnSpc>
-            </a:pPr>
-            <a:r>
-              <a:rPr sz="1350" b="1">
-                <a:solidFill>
-                  <a:srgbClr val="E11D48"/>
-                </a:solidFill>
-                <a:latin typeface="Malgun Gothic"/>
-              </a:rPr>
-              <a:t>Q. Can I see other agencies' data?</a:t>
-            </a:r>
-          </a:p>
-        </p:txBody>
-      </p:sp>
-      <p:sp>
-        <p:nvSpPr>
-          <p:cNvPr id="14" name="TextBox 13"/>
-          <p:cNvSpPr txBox="1"/>
-          <p:nvPr/>
-        </p:nvSpPr>
-        <p:spPr>
-          <a:xfrm>
-            <a:off x="548640" y="2953512"/>
-            <a:ext cx="11094415" cy="411480"/>
-          </a:xfrm>
-          <a:prstGeom prst="rect">
-            <a:avLst/>
-          </a:prstGeom>
-          <a:noFill/>
-        </p:spPr>
-        <p:txBody>
-          <a:bodyPr wrap="square" anchor="t">
-            <a:spAutoFit/>
-          </a:bodyPr>
-          <a:lstStyle/>
-          <a:p>
-            <a:pPr algn="l">
-              <a:lnSpc>
-                <a:spcPct val="105000"/>
-              </a:lnSpc>
-            </a:pPr>
-            <a:r>
-              <a:rPr sz="1150" b="0">
-                <a:solidFill>
-                  <a:srgbClr val="475569"/>
-                </a:solidFill>
-                <a:latin typeface="Malgun Gothic"/>
-              </a:rPr>
-              <a:t>A. No. By permission scope, only your agency's data is visible.</a:t>
-            </a:r>
-          </a:p>
-        </p:txBody>
-      </p:sp>
-      <p:sp>
-        <p:nvSpPr>
-          <p:cNvPr id="15" name="Rounded Rectangle 14"/>
-          <p:cNvSpPr/>
-          <p:nvPr/>
-        </p:nvSpPr>
-        <p:spPr>
-          <a:xfrm>
-            <a:off x="365760" y="3529584"/>
-            <a:ext cx="11460175" cy="868680"/>
-          </a:xfrm>
-          <a:prstGeom prst="roundRect">
-            <a:avLst/>
-          </a:prstGeom>
-          <a:solidFill>
-            <a:srgbClr val="F8FAFC"/>
-          </a:solidFill>
-          <a:ln w="12700">
-            <a:solidFill>
-              <a:srgbClr val="E2E8F0"/>
-            </a:solidFill>
-          </a:ln>
-          <a:effectLst/>
-        </p:spPr>
-        <p:style>
-          <a:lnRef idx="1">
-            <a:schemeClr val="accent1"/>
-          </a:lnRef>
-          <a:fillRef idx="3">
-            <a:schemeClr val="accent1"/>
-          </a:fillRef>
-          <a:effectRef idx="2">
-            <a:schemeClr val="accent1"/>
-          </a:effectRef>
-          <a:fontRef idx="minor">
-            <a:schemeClr val="lt1"/>
-          </a:fontRef>
-        </p:style>
-        <p:txBody>
-          <a:bodyPr rtlCol="0" anchor="ctr"/>
-          <a:lstStyle/>
-          <a:p>
-            <a:pPr algn="ctr"/>
-          </a:p>
-        </p:txBody>
-      </p:sp>
-      <p:sp>
-        <p:nvSpPr>
-          <p:cNvPr id="16" name="TextBox 15"/>
-          <p:cNvSpPr txBox="1"/>
-          <p:nvPr/>
-        </p:nvSpPr>
-        <p:spPr>
-          <a:xfrm>
-            <a:off x="548640" y="3602736"/>
-            <a:ext cx="11094415" cy="365760"/>
-          </a:xfrm>
-          <a:prstGeom prst="rect">
-            <a:avLst/>
-          </a:prstGeom>
-          <a:noFill/>
-        </p:spPr>
-        <p:txBody>
-          <a:bodyPr wrap="square" anchor="t">
-            <a:spAutoFit/>
-          </a:bodyPr>
-          <a:lstStyle/>
-          <a:p>
-            <a:pPr algn="l">
-              <a:lnSpc>
-                <a:spcPct val="100000"/>
-              </a:lnSpc>
-            </a:pPr>
-            <a:r>
-              <a:rPr sz="1350" b="1">
-                <a:solidFill>
-                  <a:srgbClr val="E11D48"/>
-                </a:solidFill>
-                <a:latin typeface="Malgun Gothic"/>
-              </a:rPr>
-              <a:t>Q. How do I grow enrollment?</a:t>
-            </a:r>
-          </a:p>
-        </p:txBody>
-      </p:sp>
-      <p:sp>
-        <p:nvSpPr>
-          <p:cNvPr id="17" name="TextBox 16"/>
-          <p:cNvSpPr txBox="1"/>
-          <p:nvPr/>
-        </p:nvSpPr>
-        <p:spPr>
-          <a:xfrm>
-            <a:off x="548640" y="3941064"/>
-            <a:ext cx="11094415" cy="411480"/>
-          </a:xfrm>
-          <a:prstGeom prst="rect">
-            <a:avLst/>
-          </a:prstGeom>
-          <a:noFill/>
-        </p:spPr>
-        <p:txBody>
-          <a:bodyPr wrap="square" anchor="t">
-            <a:spAutoFit/>
-          </a:bodyPr>
-          <a:lstStyle/>
-          <a:p>
-            <a:pPr algn="l">
-              <a:lnSpc>
-                <a:spcPct val="105000"/>
-              </a:lnSpc>
-            </a:pPr>
-            <a:r>
-              <a:rPr sz="1150" b="0">
-                <a:solidFill>
-                  <a:srgbClr val="475569"/>
-                </a:solidFill>
-                <a:latin typeface="Malgun Gothic"/>
-              </a:rPr>
-              <a:t>A. Fast counseling response, a smooth trial→enroll flow, and persuading parents with learning reports are key.</a:t>
-            </a:r>
-          </a:p>
-        </p:txBody>
-      </p:sp>
-      <p:sp>
-        <p:nvSpPr>
-          <p:cNvPr id="18" name="Rounded Rectangle 17"/>
-          <p:cNvSpPr/>
-          <p:nvPr/>
-        </p:nvSpPr>
-        <p:spPr>
-          <a:xfrm>
-            <a:off x="365760" y="4517136"/>
-            <a:ext cx="11460175" cy="868680"/>
-          </a:xfrm>
-          <a:prstGeom prst="roundRect">
-            <a:avLst/>
-          </a:prstGeom>
-          <a:solidFill>
-            <a:srgbClr val="F8FAFC"/>
-          </a:solidFill>
-          <a:ln w="12700">
-            <a:solidFill>
-              <a:srgbClr val="E2E8F0"/>
-            </a:solidFill>
-          </a:ln>
-          <a:effectLst/>
-        </p:spPr>
-        <p:style>
-          <a:lnRef idx="1">
-            <a:schemeClr val="accent1"/>
-          </a:lnRef>
-          <a:fillRef idx="3">
-            <a:schemeClr val="accent1"/>
-          </a:fillRef>
-          <a:effectRef idx="2">
-            <a:schemeClr val="accent1"/>
-          </a:effectRef>
-          <a:fontRef idx="minor">
-            <a:schemeClr val="lt1"/>
-          </a:fontRef>
-        </p:style>
-        <p:txBody>
-          <a:bodyPr rtlCol="0" anchor="ctr"/>
-          <a:lstStyle/>
-          <a:p>
-            <a:pPr algn="ctr"/>
-          </a:p>
-        </p:txBody>
-      </p:sp>
-      <p:sp>
-        <p:nvSpPr>
-          <p:cNvPr id="19" name="TextBox 18"/>
-          <p:cNvSpPr txBox="1"/>
-          <p:nvPr/>
-        </p:nvSpPr>
-        <p:spPr>
-          <a:xfrm>
-            <a:off x="548640" y="4590288"/>
-            <a:ext cx="11094415" cy="365760"/>
-          </a:xfrm>
-          <a:prstGeom prst="rect">
-            <a:avLst/>
-          </a:prstGeom>
-          <a:noFill/>
-        </p:spPr>
-        <p:txBody>
-          <a:bodyPr wrap="square" anchor="t">
-            <a:spAutoFit/>
-          </a:bodyPr>
-          <a:lstStyle/>
-          <a:p>
-            <a:pPr algn="l">
-              <a:lnSpc>
-                <a:spcPct val="100000"/>
-              </a:lnSpc>
-            </a:pPr>
-            <a:r>
-              <a:rPr sz="1350" b="1">
-                <a:solidFill>
-                  <a:srgbClr val="E11D48"/>
-                </a:solidFill>
-                <a:latin typeface="Malgun Gothic"/>
-              </a:rPr>
-              <a:t>Q. How do I check settlement?</a:t>
-            </a:r>
-          </a:p>
-        </p:txBody>
-      </p:sp>
-      <p:sp>
-        <p:nvSpPr>
-          <p:cNvPr id="20" name="TextBox 19"/>
-          <p:cNvSpPr txBox="1"/>
-          <p:nvPr/>
-        </p:nvSpPr>
-        <p:spPr>
-          <a:xfrm>
-            <a:off x="548640" y="4928616"/>
-            <a:ext cx="11094415" cy="411480"/>
-          </a:xfrm>
-          <a:prstGeom prst="rect">
-            <a:avLst/>
-          </a:prstGeom>
-          <a:noFill/>
-        </p:spPr>
-        <p:txBody>
-          <a:bodyPr wrap="square" anchor="t">
-            <a:spAutoFit/>
-          </a:bodyPr>
-          <a:lstStyle/>
-          <a:p>
-            <a:pPr algn="l">
-              <a:lnSpc>
-                <a:spcPct val="105000"/>
-              </a:lnSpc>
-            </a:pPr>
-            <a:r>
-              <a:rPr sz="1150" b="0">
-                <a:solidFill>
-                  <a:srgbClr val="475569"/>
-                </a:solidFill>
-                <a:latin typeface="Malgun Gothic"/>
-              </a:rPr>
-              <a:t>A. Branch→agency settlement (received) is auto-calculated by the org tree; check it in the monthly report.</a:t>
-            </a:r>
-          </a:p>
-        </p:txBody>
-      </p:sp>
-      <p:sp>
-        <p:nvSpPr>
-          <p:cNvPr id="21" name="Rounded Rectangle 20"/>
-          <p:cNvSpPr/>
-          <p:nvPr/>
-        </p:nvSpPr>
-        <p:spPr>
-          <a:xfrm>
-            <a:off x="365760" y="5504688"/>
-            <a:ext cx="11460175" cy="868680"/>
-          </a:xfrm>
-          <a:prstGeom prst="roundRect">
-            <a:avLst/>
-          </a:prstGeom>
-          <a:solidFill>
-            <a:srgbClr val="F8FAFC"/>
-          </a:solidFill>
-          <a:ln w="12700">
-            <a:solidFill>
-              <a:srgbClr val="E2E8F0"/>
-            </a:solidFill>
-          </a:ln>
-          <a:effectLst/>
-        </p:spPr>
-        <p:style>
-          <a:lnRef idx="1">
-            <a:schemeClr val="accent1"/>
-          </a:lnRef>
-          <a:fillRef idx="3">
-            <a:schemeClr val="accent1"/>
-          </a:fillRef>
-          <a:effectRef idx="2">
-            <a:schemeClr val="accent1"/>
-          </a:effectRef>
-          <a:fontRef idx="minor">
-            <a:schemeClr val="lt1"/>
-          </a:fontRef>
-        </p:style>
-        <p:txBody>
-          <a:bodyPr rtlCol="0" anchor="ctr"/>
-          <a:lstStyle/>
-          <a:p>
-            <a:pPr algn="ctr"/>
-          </a:p>
-        </p:txBody>
-      </p:sp>
-      <p:sp>
-        <p:nvSpPr>
-          <p:cNvPr id="22" name="TextBox 21"/>
-          <p:cNvSpPr txBox="1"/>
-          <p:nvPr/>
-        </p:nvSpPr>
-        <p:spPr>
-          <a:xfrm>
-            <a:off x="548640" y="5577840"/>
-            <a:ext cx="11094415" cy="365760"/>
-          </a:xfrm>
-          <a:prstGeom prst="rect">
-            <a:avLst/>
-          </a:prstGeom>
-          <a:noFill/>
-        </p:spPr>
-        <p:txBody>
-          <a:bodyPr wrap="square" anchor="t">
-            <a:spAutoFit/>
-          </a:bodyPr>
-          <a:lstStyle/>
-          <a:p>
-            <a:pPr algn="l">
-              <a:lnSpc>
-                <a:spcPct val="100000"/>
-              </a:lnSpc>
-            </a:pPr>
-            <a:r>
-              <a:rPr sz="1350" b="1">
-                <a:solidFill>
-                  <a:srgbClr val="E11D48"/>
-                </a:solidFill>
-                <a:latin typeface="Malgun Gothic"/>
-              </a:rPr>
-              <a:t>Q. A student seems about to quit.</a:t>
-            </a:r>
-          </a:p>
-        </p:txBody>
-      </p:sp>
-      <p:sp>
-        <p:nvSpPr>
-          <p:cNvPr id="23" name="TextBox 22"/>
-          <p:cNvSpPr txBox="1"/>
-          <p:nvPr/>
-        </p:nvSpPr>
-        <p:spPr>
-          <a:xfrm>
-            <a:off x="548640" y="5916168"/>
-            <a:ext cx="11094415" cy="411480"/>
-          </a:xfrm>
-          <a:prstGeom prst="rect">
-            <a:avLst/>
-          </a:prstGeom>
-          <a:noFill/>
-        </p:spPr>
-        <p:txBody>
-          <a:bodyPr wrap="square" anchor="t">
-            <a:spAutoFit/>
-          </a:bodyPr>
-          <a:lstStyle/>
-          <a:p>
-            <a:pPr algn="l">
-              <a:lnSpc>
-                <a:spcPct val="105000"/>
-              </a:lnSpc>
-            </a:pPr>
-            <a:r>
-              <a:rPr sz="1150" b="0">
-                <a:solidFill>
-                  <a:srgbClr val="475569"/>
-                </a:solidFill>
-                <a:latin typeface="Malgun Gothic"/>
-              </a:rPr>
-              <a:t>A. Watch churn-risk signals (absences·performance drop) and intervene quickly with counseling/alert-talk.</a:t>
-            </a:r>
-          </a:p>
-        </p:txBody>
-      </p:sp>
-    </p:spTree>
-  </p:cSld>
-  <p:clrMapOvr>
-    <a:masterClrMapping/>
-  </p:clrMapOvr>
-</p:sld>
-</file>
-
-<file path=ppt/slides/slide29.xml><?xml version="1.0" encoding="utf-8"?>
-<p:sld xmlns:a="http://schemas.openxmlformats.org/drawingml/2006/main" xmlns:p="http://schemas.openxmlformats.org/presentationml/2006/main" xmlns:r="http://schemas.openxmlformats.org/officeDocument/2006/relationships">
-  <p:cSld>
-    <p:bg>
-      <p:bgPr>
-        <a:solidFill>
-          <a:srgbClr val="FFF1F2"/>
-        </a:solidFill>
-        <a:effectLst/>
-      </p:bgPr>
-    </p:bg>
-    <p:spTree>
-      <p:nvGrpSpPr>
-        <p:cNvPr id="1" name=""/>
-        <p:cNvGrpSpPr/>
-        <p:nvPr/>
-      </p:nvGrpSpPr>
-      <p:grpSpPr/>
-      <p:sp>
-        <p:nvSpPr>
-          <p:cNvPr id="2" name="Rectangle 1"/>
-          <p:cNvSpPr/>
-          <p:nvPr/>
-        </p:nvSpPr>
-        <p:spPr>
-          <a:xfrm>
-            <a:off x="0" y="0"/>
-            <a:ext cx="12191695" cy="566928"/>
-          </a:xfrm>
-          <a:prstGeom prst="rect">
-            <a:avLst/>
-          </a:prstGeom>
-          <a:solidFill>
-            <a:srgbClr val="E11D48"/>
-          </a:solidFill>
-          <a:ln>
-            <a:noFill/>
-          </a:ln>
-          <a:effectLst/>
-        </p:spPr>
-        <p:style>
-          <a:lnRef idx="1">
-            <a:schemeClr val="accent1"/>
-          </a:lnRef>
-          <a:fillRef idx="3">
-            <a:schemeClr val="accent1"/>
-          </a:fillRef>
-          <a:effectRef idx="2">
-            <a:schemeClr val="accent1"/>
-          </a:effectRef>
-          <a:fontRef idx="minor">
-            <a:schemeClr val="lt1"/>
-          </a:fontRef>
-        </p:style>
-        <p:txBody>
-          <a:bodyPr rtlCol="0" anchor="ctr"/>
-          <a:lstStyle/>
-          <a:p>
-            <a:pPr algn="ctr"/>
-          </a:p>
-        </p:txBody>
-      </p:sp>
-      <p:sp>
-        <p:nvSpPr>
-          <p:cNvPr id="3" name="Rectangle 2"/>
-          <p:cNvSpPr/>
-          <p:nvPr/>
-        </p:nvSpPr>
-        <p:spPr>
-          <a:xfrm>
-            <a:off x="0" y="566928"/>
-            <a:ext cx="12191695" cy="54864"/>
-          </a:xfrm>
-          <a:prstGeom prst="rect">
-            <a:avLst/>
-          </a:prstGeom>
-          <a:solidFill>
-            <a:srgbClr val="0EA5E9"/>
-          </a:solidFill>
-          <a:ln>
-            <a:noFill/>
-          </a:ln>
-          <a:effectLst/>
-        </p:spPr>
-        <p:style>
-          <a:lnRef idx="1">
-            <a:schemeClr val="accent1"/>
-          </a:lnRef>
-          <a:fillRef idx="3">
-            <a:schemeClr val="accent1"/>
-          </a:fillRef>
-          <a:effectRef idx="2">
-            <a:schemeClr val="accent1"/>
-          </a:effectRef>
-          <a:fontRef idx="minor">
-            <a:schemeClr val="lt1"/>
-          </a:fontRef>
-        </p:style>
-        <p:txBody>
-          <a:bodyPr rtlCol="0" anchor="ctr"/>
-          <a:lstStyle/>
-          <a:p>
-            <a:pPr algn="ctr"/>
-          </a:p>
-        </p:txBody>
-      </p:sp>
-      <p:sp>
-        <p:nvSpPr>
-          <p:cNvPr id="4" name="TextBox 3"/>
-          <p:cNvSpPr txBox="1"/>
-          <p:nvPr/>
-        </p:nvSpPr>
-        <p:spPr>
-          <a:xfrm>
-            <a:off x="365760" y="27432"/>
-            <a:ext cx="7315200" cy="502920"/>
-          </a:xfrm>
-          <a:prstGeom prst="rect">
-            <a:avLst/>
-          </a:prstGeom>
-          <a:noFill/>
-        </p:spPr>
-        <p:txBody>
-          <a:bodyPr wrap="square" anchor="ctr">
-            <a:spAutoFit/>
-          </a:bodyPr>
-          <a:lstStyle/>
-          <a:p>
-            <a:pPr algn="l">
-              <a:lnSpc>
-                <a:spcPct val="100000"/>
-              </a:lnSpc>
-            </a:pPr>
-            <a:r>
-              <a:rPr sz="1500" b="1">
-                <a:solidFill>
-                  <a:srgbClr val="FFFFFF"/>
-                </a:solidFill>
-                <a:latin typeface="Malgun Gothic"/>
-              </a:rPr>
-              <a:t>🤝 Mangoi Agency User Guide</a:t>
-            </a:r>
-          </a:p>
-        </p:txBody>
-      </p:sp>
-      <p:sp>
-        <p:nvSpPr>
-          <p:cNvPr id="5" name="TextBox 4"/>
-          <p:cNvSpPr txBox="1"/>
-          <p:nvPr/>
-        </p:nvSpPr>
-        <p:spPr>
-          <a:xfrm>
-            <a:off x="8168335" y="27432"/>
-            <a:ext cx="3657600" cy="502920"/>
-          </a:xfrm>
-          <a:prstGeom prst="rect">
-            <a:avLst/>
-          </a:prstGeom>
-          <a:noFill/>
-        </p:spPr>
-        <p:txBody>
-          <a:bodyPr wrap="square" anchor="ctr">
-            <a:spAutoFit/>
-          </a:bodyPr>
-          <a:lstStyle/>
-          <a:p>
-            <a:pPr algn="r">
-              <a:lnSpc>
-                <a:spcPct val="100000"/>
-              </a:lnSpc>
-            </a:pPr>
-            <a:r>
-              <a:rPr sz="1300" b="1">
-                <a:solidFill>
-                  <a:srgbClr val="F1F5F9"/>
-                </a:solidFill>
-                <a:latin typeface="Malgun Gothic"/>
-              </a:rPr>
-              <a:t>Checklist</a:t>
-            </a:r>
-          </a:p>
-        </p:txBody>
-      </p:sp>
-      <p:sp>
-        <p:nvSpPr>
-          <p:cNvPr id="6" name="Rounded Rectangle 5"/>
-          <p:cNvSpPr/>
-          <p:nvPr/>
-        </p:nvSpPr>
-        <p:spPr>
-          <a:xfrm>
-            <a:off x="365760" y="841248"/>
-            <a:ext cx="658368" cy="512064"/>
-          </a:xfrm>
-          <a:prstGeom prst="roundRect">
-            <a:avLst/>
-          </a:prstGeom>
-          <a:solidFill>
-            <a:srgbClr val="E11D48"/>
-          </a:solidFill>
-          <a:ln>
-            <a:noFill/>
-          </a:ln>
-          <a:effectLst/>
-        </p:spPr>
-        <p:style>
-          <a:lnRef idx="1">
-            <a:schemeClr val="accent1"/>
-          </a:lnRef>
-          <a:fillRef idx="3">
-            <a:schemeClr val="accent1"/>
-          </a:fillRef>
-          <a:effectRef idx="2">
-            <a:schemeClr val="accent1"/>
-          </a:effectRef>
-          <a:fontRef idx="minor">
-            <a:schemeClr val="lt1"/>
-          </a:fontRef>
-        </p:style>
-        <p:txBody>
-          <a:bodyPr rtlCol="0" anchor="ctr"/>
-          <a:lstStyle/>
-          <a:p>
-            <a:pPr algn="ctr"/>
-          </a:p>
-        </p:txBody>
-      </p:sp>
-      <p:sp>
-        <p:nvSpPr>
-          <p:cNvPr id="7" name="TextBox 6"/>
-          <p:cNvSpPr txBox="1"/>
-          <p:nvPr/>
-        </p:nvSpPr>
-        <p:spPr>
-          <a:xfrm>
-            <a:off x="365760" y="841248"/>
-            <a:ext cx="658368" cy="512064"/>
-          </a:xfrm>
-          <a:prstGeom prst="rect">
-            <a:avLst/>
-          </a:prstGeom>
-          <a:noFill/>
-        </p:spPr>
-        <p:txBody>
-          <a:bodyPr wrap="square" anchor="ctr">
-            <a:spAutoFit/>
-          </a:bodyPr>
-          <a:lstStyle/>
-          <a:p>
-            <a:pPr algn="ctr">
-              <a:lnSpc>
-                <a:spcPct val="100000"/>
-              </a:lnSpc>
-            </a:pPr>
-            <a:r>
-              <a:rPr sz="1700" b="1">
-                <a:solidFill>
-                  <a:srgbClr val="FFFFFF"/>
-                </a:solidFill>
-                <a:latin typeface="Malgun Gothic"/>
-              </a:rPr>
-              <a:t>26</a:t>
-            </a:r>
-          </a:p>
-        </p:txBody>
-      </p:sp>
-      <p:sp>
-        <p:nvSpPr>
-          <p:cNvPr id="8" name="TextBox 7"/>
-          <p:cNvSpPr txBox="1"/>
-          <p:nvPr/>
-        </p:nvSpPr>
-        <p:spPr>
-          <a:xfrm>
-            <a:off x="1143000" y="868680"/>
-            <a:ext cx="9144000" cy="457200"/>
-          </a:xfrm>
-          <a:prstGeom prst="rect">
-            <a:avLst/>
-          </a:prstGeom>
-          <a:noFill/>
-        </p:spPr>
-        <p:txBody>
-          <a:bodyPr wrap="square" anchor="t">
-            <a:spAutoFit/>
-          </a:bodyPr>
-          <a:lstStyle/>
-          <a:p>
-            <a:pPr algn="l">
-              <a:lnSpc>
-                <a:spcPct val="100000"/>
-              </a:lnSpc>
-            </a:pPr>
-            <a:r>
-              <a:rPr sz="2200" b="1">
-                <a:solidFill>
-                  <a:srgbClr val="E11D48"/>
-                </a:solidFill>
-                <a:latin typeface="Malgun Gothic"/>
-              </a:rPr>
-              <a:t>✅ Agency Operations Checklist</a:t>
-            </a:r>
-          </a:p>
-        </p:txBody>
-      </p:sp>
-      <p:sp>
-        <p:nvSpPr>
-          <p:cNvPr id="9" name="Rounded Rectangle 8"/>
-          <p:cNvSpPr/>
-          <p:nvPr/>
-        </p:nvSpPr>
-        <p:spPr>
-          <a:xfrm>
-            <a:off x="457200" y="1645920"/>
-            <a:ext cx="292608" cy="292608"/>
-          </a:xfrm>
-          <a:prstGeom prst="roundRect">
-            <a:avLst/>
-          </a:prstGeom>
-          <a:solidFill>
-            <a:srgbClr val="FFFFFF"/>
-          </a:solidFill>
-          <a:ln w="12700">
-            <a:solidFill>
-              <a:srgbClr val="E11D48"/>
-            </a:solidFill>
-          </a:ln>
-          <a:effectLst/>
-        </p:spPr>
-        <p:style>
-          <a:lnRef idx="1">
-            <a:schemeClr val="accent1"/>
-          </a:lnRef>
-          <a:fillRef idx="3">
-            <a:schemeClr val="accent1"/>
-          </a:fillRef>
-          <a:effectRef idx="2">
-            <a:schemeClr val="accent1"/>
-          </a:effectRef>
-          <a:fontRef idx="minor">
-            <a:schemeClr val="lt1"/>
-          </a:fontRef>
-        </p:style>
-        <p:txBody>
-          <a:bodyPr rtlCol="0" anchor="ctr"/>
-          <a:lstStyle/>
-          <a:p>
-            <a:pPr algn="ctr"/>
-          </a:p>
-        </p:txBody>
-      </p:sp>
-      <p:sp>
-        <p:nvSpPr>
-          <p:cNvPr id="10" name="TextBox 9"/>
-          <p:cNvSpPr txBox="1"/>
-          <p:nvPr/>
-        </p:nvSpPr>
-        <p:spPr>
-          <a:xfrm>
-            <a:off x="914400" y="1581912"/>
-            <a:ext cx="10058400" cy="411480"/>
-          </a:xfrm>
-          <a:prstGeom prst="rect">
-            <a:avLst/>
-          </a:prstGeom>
-          <a:noFill/>
-        </p:spPr>
-        <p:txBody>
-          <a:bodyPr wrap="square" anchor="t">
-            <a:spAutoFit/>
-          </a:bodyPr>
-          <a:lstStyle/>
-          <a:p>
-            <a:pPr algn="l">
-              <a:lnSpc>
-                <a:spcPct val="100000"/>
-              </a:lnSpc>
-            </a:pPr>
-            <a:r>
-              <a:rPr sz="1500" b="1">
-                <a:solidFill>
-                  <a:srgbClr val="334155"/>
-                </a:solidFill>
-                <a:latin typeface="Malgun Gothic"/>
-              </a:rPr>
-              <a:t>Did you check today's revenue/enrollment/attendance?</a:t>
-            </a:r>
-          </a:p>
-        </p:txBody>
-      </p:sp>
-      <p:sp>
-        <p:nvSpPr>
-          <p:cNvPr id="11" name="Rounded Rectangle 10"/>
-          <p:cNvSpPr/>
-          <p:nvPr/>
-        </p:nvSpPr>
-        <p:spPr>
-          <a:xfrm>
-            <a:off x="457200" y="2212848"/>
-            <a:ext cx="292608" cy="292608"/>
-          </a:xfrm>
-          <a:prstGeom prst="roundRect">
-            <a:avLst/>
-          </a:prstGeom>
-          <a:solidFill>
-            <a:srgbClr val="FFFFFF"/>
-          </a:solidFill>
-          <a:ln w="12700">
-            <a:solidFill>
-              <a:srgbClr val="E11D48"/>
-            </a:solidFill>
-          </a:ln>
-          <a:effectLst/>
-        </p:spPr>
-        <p:style>
-          <a:lnRef idx="1">
-            <a:schemeClr val="accent1"/>
-          </a:lnRef>
-          <a:fillRef idx="3">
-            <a:schemeClr val="accent1"/>
-          </a:fillRef>
-          <a:effectRef idx="2">
-            <a:schemeClr val="accent1"/>
-          </a:effectRef>
-          <a:fontRef idx="minor">
-            <a:schemeClr val="lt1"/>
-          </a:fontRef>
-        </p:style>
-        <p:txBody>
-          <a:bodyPr rtlCol="0" anchor="ctr"/>
-          <a:lstStyle/>
-          <a:p>
-            <a:pPr algn="ctr"/>
-          </a:p>
-        </p:txBody>
-      </p:sp>
-      <p:sp>
-        <p:nvSpPr>
-          <p:cNvPr id="12" name="TextBox 11"/>
-          <p:cNvSpPr txBox="1"/>
-          <p:nvPr/>
-        </p:nvSpPr>
-        <p:spPr>
-          <a:xfrm>
-            <a:off x="914400" y="2148840"/>
-            <a:ext cx="10058400" cy="411480"/>
-          </a:xfrm>
-          <a:prstGeom prst="rect">
-            <a:avLst/>
-          </a:prstGeom>
-          <a:noFill/>
-        </p:spPr>
-        <p:txBody>
-          <a:bodyPr wrap="square" anchor="t">
-            <a:spAutoFit/>
-          </a:bodyPr>
-          <a:lstStyle/>
-          <a:p>
-            <a:pPr algn="l">
-              <a:lnSpc>
-                <a:spcPct val="100000"/>
-              </a:lnSpc>
-            </a:pPr>
-            <a:r>
-              <a:rPr sz="1500" b="1">
-                <a:solidFill>
-                  <a:srgbClr val="334155"/>
-                </a:solidFill>
-                <a:latin typeface="Malgun Gothic"/>
-              </a:rPr>
-              <a:t>Did you take and respond to new counseling/inquiries?</a:t>
-            </a:r>
-          </a:p>
-        </p:txBody>
-      </p:sp>
-      <p:sp>
-        <p:nvSpPr>
-          <p:cNvPr id="13" name="Rounded Rectangle 12"/>
-          <p:cNvSpPr/>
-          <p:nvPr/>
-        </p:nvSpPr>
-        <p:spPr>
-          <a:xfrm>
-            <a:off x="457200" y="2779776"/>
-            <a:ext cx="292608" cy="292608"/>
-          </a:xfrm>
-          <a:prstGeom prst="roundRect">
-            <a:avLst/>
-          </a:prstGeom>
-          <a:solidFill>
-            <a:srgbClr val="FFFFFF"/>
-          </a:solidFill>
-          <a:ln w="12700">
-            <a:solidFill>
-              <a:srgbClr val="E11D48"/>
-            </a:solidFill>
-          </a:ln>
-          <a:effectLst/>
-        </p:spPr>
-        <p:style>
-          <a:lnRef idx="1">
-            <a:schemeClr val="accent1"/>
-          </a:lnRef>
-          <a:fillRef idx="3">
-            <a:schemeClr val="accent1"/>
-          </a:fillRef>
-          <a:effectRef idx="2">
-            <a:schemeClr val="accent1"/>
-          </a:effectRef>
-          <a:fontRef idx="minor">
-            <a:schemeClr val="lt1"/>
-          </a:fontRef>
-        </p:style>
-        <p:txBody>
-          <a:bodyPr rtlCol="0" anchor="ctr"/>
-          <a:lstStyle/>
-          <a:p>
-            <a:pPr algn="ctr"/>
-          </a:p>
-        </p:txBody>
-      </p:sp>
-      <p:sp>
-        <p:nvSpPr>
-          <p:cNvPr id="14" name="TextBox 13"/>
-          <p:cNvSpPr txBox="1"/>
-          <p:nvPr/>
-        </p:nvSpPr>
-        <p:spPr>
-          <a:xfrm>
-            <a:off x="914400" y="2715768"/>
-            <a:ext cx="10058400" cy="411480"/>
-          </a:xfrm>
-          <a:prstGeom prst="rect">
-            <a:avLst/>
-          </a:prstGeom>
-          <a:noFill/>
-        </p:spPr>
-        <p:txBody>
-          <a:bodyPr wrap="square" anchor="t">
-            <a:spAutoFit/>
-          </a:bodyPr>
-          <a:lstStyle/>
-          <a:p>
-            <a:pPr algn="l">
-              <a:lnSpc>
-                <a:spcPct val="100000"/>
-              </a:lnSpc>
-            </a:pPr>
-            <a:r>
-              <a:rPr sz="1500" b="1">
-                <a:solidFill>
-                  <a:srgbClr val="334155"/>
-                </a:solidFill>
-                <a:latin typeface="Malgun Gothic"/>
-              </a:rPr>
-              <a:t>Did you check and notify overdue items?</a:t>
-            </a:r>
-          </a:p>
-        </p:txBody>
-      </p:sp>
-      <p:sp>
-        <p:nvSpPr>
-          <p:cNvPr id="15" name="Rounded Rectangle 14"/>
-          <p:cNvSpPr/>
-          <p:nvPr/>
-        </p:nvSpPr>
-        <p:spPr>
-          <a:xfrm>
-            <a:off x="457200" y="3346704"/>
-            <a:ext cx="292608" cy="292608"/>
-          </a:xfrm>
-          <a:prstGeom prst="roundRect">
-            <a:avLst/>
-          </a:prstGeom>
-          <a:solidFill>
-            <a:srgbClr val="FFFFFF"/>
-          </a:solidFill>
-          <a:ln w="12700">
-            <a:solidFill>
-              <a:srgbClr val="E11D48"/>
-            </a:solidFill>
-          </a:ln>
-          <a:effectLst/>
-        </p:spPr>
-        <p:style>
-          <a:lnRef idx="1">
-            <a:schemeClr val="accent1"/>
-          </a:lnRef>
-          <a:fillRef idx="3">
-            <a:schemeClr val="accent1"/>
-          </a:fillRef>
-          <a:effectRef idx="2">
-            <a:schemeClr val="accent1"/>
-          </a:effectRef>
-          <a:fontRef idx="minor">
-            <a:schemeClr val="lt1"/>
-          </a:fontRef>
-        </p:style>
-        <p:txBody>
-          <a:bodyPr rtlCol="0" anchor="ctr"/>
-          <a:lstStyle/>
-          <a:p>
-            <a:pPr algn="ctr"/>
-          </a:p>
-        </p:txBody>
-      </p:sp>
-      <p:sp>
-        <p:nvSpPr>
-          <p:cNvPr id="16" name="TextBox 15"/>
-          <p:cNvSpPr txBox="1"/>
-          <p:nvPr/>
-        </p:nvSpPr>
-        <p:spPr>
-          <a:xfrm>
-            <a:off x="914400" y="3282696"/>
-            <a:ext cx="10058400" cy="411480"/>
-          </a:xfrm>
-          <a:prstGeom prst="rect">
-            <a:avLst/>
-          </a:prstGeom>
-          <a:noFill/>
-        </p:spPr>
-        <p:txBody>
-          <a:bodyPr wrap="square" anchor="t">
-            <a:spAutoFit/>
-          </a:bodyPr>
-          <a:lstStyle/>
-          <a:p>
-            <a:pPr algn="l">
-              <a:lnSpc>
-                <a:spcPct val="100000"/>
-              </a:lnSpc>
-            </a:pPr>
-            <a:r>
-              <a:rPr sz="1500" b="1">
-                <a:solidFill>
-                  <a:srgbClr val="334155"/>
-                </a:solidFill>
-                <a:latin typeface="Malgun Gothic"/>
-              </a:rPr>
-              <a:t>Did you care for at-risk students?</a:t>
-            </a:r>
-          </a:p>
-        </p:txBody>
-      </p:sp>
-      <p:sp>
-        <p:nvSpPr>
-          <p:cNvPr id="17" name="Rounded Rectangle 16"/>
-          <p:cNvSpPr/>
-          <p:nvPr/>
-        </p:nvSpPr>
-        <p:spPr>
-          <a:xfrm>
-            <a:off x="457200" y="3913632"/>
-            <a:ext cx="292608" cy="292608"/>
-          </a:xfrm>
-          <a:prstGeom prst="roundRect">
-            <a:avLst/>
-          </a:prstGeom>
-          <a:solidFill>
-            <a:srgbClr val="FFFFFF"/>
-          </a:solidFill>
-          <a:ln w="12700">
-            <a:solidFill>
-              <a:srgbClr val="E11D48"/>
-            </a:solidFill>
-          </a:ln>
-          <a:effectLst/>
-        </p:spPr>
-        <p:style>
-          <a:lnRef idx="1">
-            <a:schemeClr val="accent1"/>
-          </a:lnRef>
-          <a:fillRef idx="3">
-            <a:schemeClr val="accent1"/>
-          </a:fillRef>
-          <a:effectRef idx="2">
-            <a:schemeClr val="accent1"/>
-          </a:effectRef>
-          <a:fontRef idx="minor">
-            <a:schemeClr val="lt1"/>
-          </a:fontRef>
-        </p:style>
-        <p:txBody>
-          <a:bodyPr rtlCol="0" anchor="ctr"/>
-          <a:lstStyle/>
-          <a:p>
-            <a:pPr algn="ctr"/>
-          </a:p>
-        </p:txBody>
-      </p:sp>
-      <p:sp>
-        <p:nvSpPr>
-          <p:cNvPr id="18" name="TextBox 17"/>
-          <p:cNvSpPr txBox="1"/>
-          <p:nvPr/>
-        </p:nvSpPr>
-        <p:spPr>
-          <a:xfrm>
-            <a:off x="914400" y="3849624"/>
-            <a:ext cx="10058400" cy="411480"/>
-          </a:xfrm>
-          <a:prstGeom prst="rect">
-            <a:avLst/>
-          </a:prstGeom>
-          <a:noFill/>
-        </p:spPr>
-        <p:txBody>
-          <a:bodyPr wrap="square" anchor="t">
-            <a:spAutoFit/>
-          </a:bodyPr>
-          <a:lstStyle/>
-          <a:p>
-            <a:pPr algn="l">
-              <a:lnSpc>
-                <a:spcPct val="100000"/>
-              </a:lnSpc>
-            </a:pPr>
-            <a:r>
-              <a:rPr sz="1500" b="1">
-                <a:solidFill>
-                  <a:srgbClr val="334155"/>
-                </a:solidFill>
-                <a:latin typeface="Malgun Gothic"/>
-              </a:rPr>
-              <a:t>Did you guide parents to the report/My Page?</a:t>
-            </a:r>
-          </a:p>
-        </p:txBody>
-      </p:sp>
-      <p:sp>
-        <p:nvSpPr>
-          <p:cNvPr id="19" name="Rounded Rectangle 18"/>
-          <p:cNvSpPr/>
-          <p:nvPr/>
-        </p:nvSpPr>
-        <p:spPr>
-          <a:xfrm>
-            <a:off x="457200" y="4480560"/>
-            <a:ext cx="292608" cy="292608"/>
-          </a:xfrm>
-          <a:prstGeom prst="roundRect">
-            <a:avLst/>
-          </a:prstGeom>
-          <a:solidFill>
-            <a:srgbClr val="FFFFFF"/>
-          </a:solidFill>
-          <a:ln w="12700">
-            <a:solidFill>
-              <a:srgbClr val="E11D48"/>
-            </a:solidFill>
-          </a:ln>
-          <a:effectLst/>
-        </p:spPr>
-        <p:style>
-          <a:lnRef idx="1">
-            <a:schemeClr val="accent1"/>
-          </a:lnRef>
-          <a:fillRef idx="3">
-            <a:schemeClr val="accent1"/>
-          </a:fillRef>
-          <a:effectRef idx="2">
-            <a:schemeClr val="accent1"/>
-          </a:effectRef>
-          <a:fontRef idx="minor">
-            <a:schemeClr val="lt1"/>
-          </a:fontRef>
-        </p:style>
-        <p:txBody>
-          <a:bodyPr rtlCol="0" anchor="ctr"/>
-          <a:lstStyle/>
-          <a:p>
-            <a:pPr algn="ctr"/>
-          </a:p>
-        </p:txBody>
-      </p:sp>
-      <p:sp>
-        <p:nvSpPr>
-          <p:cNvPr id="20" name="TextBox 19"/>
-          <p:cNvSpPr txBox="1"/>
-          <p:nvPr/>
-        </p:nvSpPr>
-        <p:spPr>
-          <a:xfrm>
-            <a:off x="914400" y="4416552"/>
-            <a:ext cx="10058400" cy="411480"/>
-          </a:xfrm>
-          <a:prstGeom prst="rect">
-            <a:avLst/>
-          </a:prstGeom>
-          <a:noFill/>
-        </p:spPr>
-        <p:txBody>
-          <a:bodyPr wrap="square" anchor="t">
-            <a:spAutoFit/>
-          </a:bodyPr>
-          <a:lstStyle/>
-          <a:p>
-            <a:pPr algn="l">
-              <a:lnSpc>
-                <a:spcPct val="100000"/>
-              </a:lnSpc>
-            </a:pPr>
-            <a:r>
-              <a:rPr sz="1500" b="1">
-                <a:solidFill>
-                  <a:srgbClr val="334155"/>
-                </a:solidFill>
-                <a:latin typeface="Malgun Gothic"/>
-              </a:rPr>
-              <a:t>Did you check this month's settlement (received)?</a:t>
-            </a:r>
-          </a:p>
-        </p:txBody>
-      </p:sp>
-      <p:sp>
-        <p:nvSpPr>
-          <p:cNvPr id="21" name="Rounded Rectangle 20"/>
-          <p:cNvSpPr/>
-          <p:nvPr/>
-        </p:nvSpPr>
-        <p:spPr>
-          <a:xfrm>
-            <a:off x="457200" y="5047488"/>
-            <a:ext cx="292608" cy="292608"/>
-          </a:xfrm>
-          <a:prstGeom prst="roundRect">
-            <a:avLst/>
-          </a:prstGeom>
-          <a:solidFill>
-            <a:srgbClr val="FFFFFF"/>
-          </a:solidFill>
-          <a:ln w="12700">
-            <a:solidFill>
-              <a:srgbClr val="E11D48"/>
-            </a:solidFill>
-          </a:ln>
-          <a:effectLst/>
-        </p:spPr>
-        <p:style>
-          <a:lnRef idx="1">
-            <a:schemeClr val="accent1"/>
-          </a:lnRef>
-          <a:fillRef idx="3">
-            <a:schemeClr val="accent1"/>
-          </a:fillRef>
-          <a:effectRef idx="2">
-            <a:schemeClr val="accent1"/>
-          </a:effectRef>
-          <a:fontRef idx="minor">
-            <a:schemeClr val="lt1"/>
-          </a:fontRef>
-        </p:style>
-        <p:txBody>
-          <a:bodyPr rtlCol="0" anchor="ctr"/>
-          <a:lstStyle/>
-          <a:p>
-            <a:pPr algn="ctr"/>
-          </a:p>
-        </p:txBody>
-      </p:sp>
-      <p:sp>
-        <p:nvSpPr>
-          <p:cNvPr id="22" name="TextBox 21"/>
-          <p:cNvSpPr txBox="1"/>
-          <p:nvPr/>
-        </p:nvSpPr>
-        <p:spPr>
-          <a:xfrm>
-            <a:off x="914400" y="4983480"/>
-            <a:ext cx="10058400" cy="411480"/>
-          </a:xfrm>
-          <a:prstGeom prst="rect">
-            <a:avLst/>
-          </a:prstGeom>
-          <a:noFill/>
-        </p:spPr>
-        <p:txBody>
-          <a:bodyPr wrap="square" anchor="t">
-            <a:spAutoFit/>
-          </a:bodyPr>
-          <a:lstStyle/>
-          <a:p>
-            <a:pPr algn="l">
-              <a:lnSpc>
-                <a:spcPct val="100000"/>
-              </a:lnSpc>
-            </a:pPr>
-            <a:r>
-              <a:rPr sz="1500" b="1">
-                <a:solidFill>
-                  <a:srgbClr val="334155"/>
-                </a:solidFill>
-                <a:latin typeface="Malgun Gothic"/>
-              </a:rPr>
-              <a:t>Did you follow up on trial→enroll?</a:t>
-            </a:r>
-          </a:p>
-        </p:txBody>
-      </p:sp>
-      <p:pic>
-        <p:nvPicPr>
-          <p:cNvPr id="23" name="Picture 22" descr="mango_char.png"/>
-          <p:cNvPicPr>
-            <a:picLocks noChangeAspect="1"/>
-          </p:cNvPicPr>
-          <p:nvPr/>
-        </p:nvPicPr>
-        <p:blipFill>
-          <a:blip r:embed="rId2"/>
-          <a:stretch>
-            <a:fillRect/>
-          </a:stretch>
-        </p:blipFill>
-        <p:spPr>
-          <a:xfrm>
-            <a:off x="9153162" y="4480559"/>
-            <a:ext cx="2489892" cy="2011680"/>
-          </a:xfrm>
-          <a:prstGeom prst="rect">
-            <a:avLst/>
-          </a:prstGeom>
-        </p:spPr>
-      </p:pic>
     </p:spTree>
   </p:cSld>
   <p:clrMapOvr>
@@ -26540,7 +26815,7 @@
         </p:nvSpPr>
         <p:spPr>
           <a:xfrm>
-            <a:off x="6141567" y="1481328"/>
+            <a:off x="411480" y="5321808"/>
             <a:ext cx="384048" cy="228600"/>
           </a:xfrm>
           <a:prstGeom prst="roundRect">
@@ -26584,7 +26859,7 @@
         </p:nvSpPr>
         <p:spPr>
           <a:xfrm>
-            <a:off x="6141567" y="1463040"/>
+            <a:off x="411480" y="5303520"/>
             <a:ext cx="384048" cy="265176"/>
           </a:xfrm>
           <a:prstGeom prst="rect">
@@ -26623,7 +26898,7 @@
         </p:nvSpPr>
         <p:spPr>
           <a:xfrm>
-            <a:off x="6617055" y="1453896"/>
+            <a:off x="886968" y="5294376"/>
             <a:ext cx="4587087" cy="274320"/>
           </a:xfrm>
           <a:prstGeom prst="rect">
@@ -26662,7 +26937,7 @@
         </p:nvSpPr>
         <p:spPr>
           <a:xfrm>
-            <a:off x="11213287" y="1453896"/>
+            <a:off x="5483199" y="5294376"/>
             <a:ext cx="457200" cy="274320"/>
           </a:xfrm>
           <a:prstGeom prst="rect">
@@ -26701,7 +26976,7 @@
         </p:nvSpPr>
         <p:spPr>
           <a:xfrm>
-            <a:off x="6141567" y="1755648"/>
+            <a:off x="6141567" y="1481328"/>
             <a:ext cx="384048" cy="228600"/>
           </a:xfrm>
           <a:prstGeom prst="roundRect">
@@ -26745,7 +27020,7 @@
         </p:nvSpPr>
         <p:spPr>
           <a:xfrm>
-            <a:off x="6141567" y="1737360"/>
+            <a:off x="6141567" y="1463040"/>
             <a:ext cx="384048" cy="265176"/>
           </a:xfrm>
           <a:prstGeom prst="rect">
@@ -26784,7 +27059,7 @@
         </p:nvSpPr>
         <p:spPr>
           <a:xfrm>
-            <a:off x="6617055" y="1728216"/>
+            <a:off x="6617055" y="1453896"/>
             <a:ext cx="4587087" cy="274320"/>
           </a:xfrm>
           <a:prstGeom prst="rect">
@@ -26823,7 +27098,7 @@
         </p:nvSpPr>
         <p:spPr>
           <a:xfrm>
-            <a:off x="11213287" y="1728216"/>
+            <a:off x="11213287" y="1453896"/>
             <a:ext cx="457200" cy="274320"/>
           </a:xfrm>
           <a:prstGeom prst="rect">
@@ -26862,7 +27137,7 @@
         </p:nvSpPr>
         <p:spPr>
           <a:xfrm>
-            <a:off x="6141567" y="2029968"/>
+            <a:off x="6141567" y="1755648"/>
             <a:ext cx="384048" cy="228600"/>
           </a:xfrm>
           <a:prstGeom prst="roundRect">
@@ -26906,7 +27181,7 @@
         </p:nvSpPr>
         <p:spPr>
           <a:xfrm>
-            <a:off x="6141567" y="2011680"/>
+            <a:off x="6141567" y="1737360"/>
             <a:ext cx="384048" cy="265176"/>
           </a:xfrm>
           <a:prstGeom prst="rect">
@@ -26945,7 +27220,7 @@
         </p:nvSpPr>
         <p:spPr>
           <a:xfrm>
-            <a:off x="6617055" y="2002536"/>
+            <a:off x="6617055" y="1728216"/>
             <a:ext cx="4587087" cy="274320"/>
           </a:xfrm>
           <a:prstGeom prst="rect">
@@ -26984,7 +27259,7 @@
         </p:nvSpPr>
         <p:spPr>
           <a:xfrm>
-            <a:off x="11213287" y="2002536"/>
+            <a:off x="11213287" y="1728216"/>
             <a:ext cx="457200" cy="274320"/>
           </a:xfrm>
           <a:prstGeom prst="rect">
@@ -27023,7 +27298,7 @@
         </p:nvSpPr>
         <p:spPr>
           <a:xfrm>
-            <a:off x="6141567" y="2304288"/>
+            <a:off x="6141567" y="2029968"/>
             <a:ext cx="384048" cy="228600"/>
           </a:xfrm>
           <a:prstGeom prst="roundRect">
@@ -27067,7 +27342,7 @@
         </p:nvSpPr>
         <p:spPr>
           <a:xfrm>
-            <a:off x="6141567" y="2286000"/>
+            <a:off x="6141567" y="2011680"/>
             <a:ext cx="384048" cy="265176"/>
           </a:xfrm>
           <a:prstGeom prst="rect">
@@ -27106,7 +27381,7 @@
         </p:nvSpPr>
         <p:spPr>
           <a:xfrm>
-            <a:off x="6617055" y="2276856"/>
+            <a:off x="6617055" y="2002536"/>
             <a:ext cx="4587087" cy="274320"/>
           </a:xfrm>
           <a:prstGeom prst="rect">
@@ -27145,7 +27420,7 @@
         </p:nvSpPr>
         <p:spPr>
           <a:xfrm>
-            <a:off x="11213287" y="2276856"/>
+            <a:off x="11213287" y="2002536"/>
             <a:ext cx="457200" cy="274320"/>
           </a:xfrm>
           <a:prstGeom prst="rect">
@@ -27184,7 +27459,7 @@
         </p:nvSpPr>
         <p:spPr>
           <a:xfrm>
-            <a:off x="6141567" y="2578608"/>
+            <a:off x="6141567" y="2304288"/>
             <a:ext cx="384048" cy="228600"/>
           </a:xfrm>
           <a:prstGeom prst="roundRect">
@@ -27228,7 +27503,7 @@
         </p:nvSpPr>
         <p:spPr>
           <a:xfrm>
-            <a:off x="6141567" y="2560320"/>
+            <a:off x="6141567" y="2286000"/>
             <a:ext cx="384048" cy="265176"/>
           </a:xfrm>
           <a:prstGeom prst="rect">
@@ -27267,7 +27542,7 @@
         </p:nvSpPr>
         <p:spPr>
           <a:xfrm>
-            <a:off x="6617055" y="2551176"/>
+            <a:off x="6617055" y="2276856"/>
             <a:ext cx="4587087" cy="274320"/>
           </a:xfrm>
           <a:prstGeom prst="rect">
@@ -27306,7 +27581,7 @@
         </p:nvSpPr>
         <p:spPr>
           <a:xfrm>
-            <a:off x="11213287" y="2551176"/>
+            <a:off x="11213287" y="2276856"/>
             <a:ext cx="457200" cy="274320"/>
           </a:xfrm>
           <a:prstGeom prst="rect">
@@ -27345,7 +27620,7 @@
         </p:nvSpPr>
         <p:spPr>
           <a:xfrm>
-            <a:off x="6141567" y="2852928"/>
+            <a:off x="6141567" y="2578608"/>
             <a:ext cx="384048" cy="228600"/>
           </a:xfrm>
           <a:prstGeom prst="roundRect">
@@ -27389,7 +27664,7 @@
         </p:nvSpPr>
         <p:spPr>
           <a:xfrm>
-            <a:off x="6141567" y="2834640"/>
+            <a:off x="6141567" y="2560320"/>
             <a:ext cx="384048" cy="265176"/>
           </a:xfrm>
           <a:prstGeom prst="rect">
@@ -27428,7 +27703,7 @@
         </p:nvSpPr>
         <p:spPr>
           <a:xfrm>
-            <a:off x="6617055" y="2825496"/>
+            <a:off x="6617055" y="2551176"/>
             <a:ext cx="4587087" cy="274320"/>
           </a:xfrm>
           <a:prstGeom prst="rect">
@@ -27467,7 +27742,7 @@
         </p:nvSpPr>
         <p:spPr>
           <a:xfrm>
-            <a:off x="11213287" y="2825496"/>
+            <a:off x="11213287" y="2551176"/>
             <a:ext cx="457200" cy="274320"/>
           </a:xfrm>
           <a:prstGeom prst="rect">
@@ -27506,7 +27781,7 @@
         </p:nvSpPr>
         <p:spPr>
           <a:xfrm>
-            <a:off x="6141567" y="3127248"/>
+            <a:off x="6141567" y="2852928"/>
             <a:ext cx="384048" cy="228600"/>
           </a:xfrm>
           <a:prstGeom prst="roundRect">
@@ -27550,7 +27825,7 @@
         </p:nvSpPr>
         <p:spPr>
           <a:xfrm>
-            <a:off x="6141567" y="3108960"/>
+            <a:off x="6141567" y="2834640"/>
             <a:ext cx="384048" cy="265176"/>
           </a:xfrm>
           <a:prstGeom prst="rect">
@@ -27589,7 +27864,7 @@
         </p:nvSpPr>
         <p:spPr>
           <a:xfrm>
-            <a:off x="6617055" y="3099816"/>
+            <a:off x="6617055" y="2825496"/>
             <a:ext cx="4587087" cy="274320"/>
           </a:xfrm>
           <a:prstGeom prst="rect">
@@ -27628,7 +27903,7 @@
         </p:nvSpPr>
         <p:spPr>
           <a:xfrm>
-            <a:off x="11213287" y="3099816"/>
+            <a:off x="11213287" y="2825496"/>
             <a:ext cx="457200" cy="274320"/>
           </a:xfrm>
           <a:prstGeom prst="rect">
@@ -27667,7 +27942,7 @@
         </p:nvSpPr>
         <p:spPr>
           <a:xfrm>
-            <a:off x="6141567" y="3401568"/>
+            <a:off x="6141567" y="3127248"/>
             <a:ext cx="384048" cy="228600"/>
           </a:xfrm>
           <a:prstGeom prst="roundRect">
@@ -27711,7 +27986,7 @@
         </p:nvSpPr>
         <p:spPr>
           <a:xfrm>
-            <a:off x="6141567" y="3383280"/>
+            <a:off x="6141567" y="3108960"/>
             <a:ext cx="384048" cy="265176"/>
           </a:xfrm>
           <a:prstGeom prst="rect">
@@ -27750,7 +28025,7 @@
         </p:nvSpPr>
         <p:spPr>
           <a:xfrm>
-            <a:off x="6617055" y="3374136"/>
+            <a:off x="6617055" y="3099816"/>
             <a:ext cx="4587087" cy="274320"/>
           </a:xfrm>
           <a:prstGeom prst="rect">
@@ -27789,7 +28064,7 @@
         </p:nvSpPr>
         <p:spPr>
           <a:xfrm>
-            <a:off x="11213287" y="3374136"/>
+            <a:off x="11213287" y="3099816"/>
             <a:ext cx="457200" cy="274320"/>
           </a:xfrm>
           <a:prstGeom prst="rect">
@@ -27828,7 +28103,7 @@
         </p:nvSpPr>
         <p:spPr>
           <a:xfrm>
-            <a:off x="6141567" y="3675887"/>
+            <a:off x="6141567" y="3401568"/>
             <a:ext cx="384048" cy="228600"/>
           </a:xfrm>
           <a:prstGeom prst="roundRect">
@@ -27872,7 +28147,7 @@
         </p:nvSpPr>
         <p:spPr>
           <a:xfrm>
-            <a:off x="6141567" y="3657599"/>
+            <a:off x="6141567" y="3383280"/>
             <a:ext cx="384048" cy="265176"/>
           </a:xfrm>
           <a:prstGeom prst="rect">
@@ -27911,7 +28186,7 @@
         </p:nvSpPr>
         <p:spPr>
           <a:xfrm>
-            <a:off x="6617055" y="3648456"/>
+            <a:off x="6617055" y="3374136"/>
             <a:ext cx="4587087" cy="274320"/>
           </a:xfrm>
           <a:prstGeom prst="rect">
@@ -27950,7 +28225,7 @@
         </p:nvSpPr>
         <p:spPr>
           <a:xfrm>
-            <a:off x="11213287" y="3648456"/>
+            <a:off x="11213287" y="3374136"/>
             <a:ext cx="457200" cy="274320"/>
           </a:xfrm>
           <a:prstGeom prst="rect">
@@ -27989,7 +28264,7 @@
         </p:nvSpPr>
         <p:spPr>
           <a:xfrm>
-            <a:off x="6141567" y="3950208"/>
+            <a:off x="6141567" y="3675887"/>
             <a:ext cx="384048" cy="228600"/>
           </a:xfrm>
           <a:prstGeom prst="roundRect">
@@ -28033,7 +28308,7 @@
         </p:nvSpPr>
         <p:spPr>
           <a:xfrm>
-            <a:off x="6141567" y="3931920"/>
+            <a:off x="6141567" y="3657599"/>
             <a:ext cx="384048" cy="265176"/>
           </a:xfrm>
           <a:prstGeom prst="rect">
@@ -28072,7 +28347,7 @@
         </p:nvSpPr>
         <p:spPr>
           <a:xfrm>
-            <a:off x="6617055" y="3922776"/>
+            <a:off x="6617055" y="3648456"/>
             <a:ext cx="4587087" cy="274320"/>
           </a:xfrm>
           <a:prstGeom prst="rect">
@@ -28098,7 +28373,7 @@
                 </a:solidFill>
                 <a:latin typeface="Malgun Gothic"/>
               </a:rPr>
-              <a:t>Feature Summary · Data</a:t>
+              <a:t>Teacher Management, redesigned (roster filters · groups · detail tabs)</a:t>
             </a:r>
           </a:p>
         </p:txBody>
@@ -28111,7 +28386,7 @@
         </p:nvSpPr>
         <p:spPr>
           <a:xfrm>
-            <a:off x="11213287" y="3922776"/>
+            <a:off x="11213287" y="3648456"/>
             <a:ext cx="457200" cy="274320"/>
           </a:xfrm>
           <a:prstGeom prst="rect">
@@ -28150,7 +28425,7 @@
         </p:nvSpPr>
         <p:spPr>
           <a:xfrm>
-            <a:off x="6141567" y="4224528"/>
+            <a:off x="6141567" y="3950208"/>
             <a:ext cx="384048" cy="228600"/>
           </a:xfrm>
           <a:prstGeom prst="roundRect">
@@ -28194,7 +28469,7 @@
         </p:nvSpPr>
         <p:spPr>
           <a:xfrm>
-            <a:off x="6141567" y="4206240"/>
+            <a:off x="6141567" y="3931920"/>
             <a:ext cx="384048" cy="265176"/>
           </a:xfrm>
           <a:prstGeom prst="rect">
@@ -28233,7 +28508,7 @@
         </p:nvSpPr>
         <p:spPr>
           <a:xfrm>
-            <a:off x="6617055" y="4197096"/>
+            <a:off x="6617055" y="3922776"/>
             <a:ext cx="4587087" cy="274320"/>
           </a:xfrm>
           <a:prstGeom prst="rect">
@@ -28259,7 +28534,7 @@
                 </a:solidFill>
                 <a:latin typeface="Malgun Gothic"/>
               </a:rPr>
-              <a:t>Data at a Glance</a:t>
+              <a:t>Sending the Parent Monthly Report (pentagon)</a:t>
             </a:r>
           </a:p>
         </p:txBody>
@@ -28272,7 +28547,7 @@
         </p:nvSpPr>
         <p:spPr>
           <a:xfrm>
-            <a:off x="11213287" y="4197096"/>
+            <a:off x="11213287" y="3922776"/>
             <a:ext cx="457200" cy="274320"/>
           </a:xfrm>
           <a:prstGeom prst="rect">
@@ -28311,7 +28586,7 @@
         </p:nvSpPr>
         <p:spPr>
           <a:xfrm>
-            <a:off x="6141567" y="4498848"/>
+            <a:off x="6141567" y="4224528"/>
             <a:ext cx="384048" cy="228600"/>
           </a:xfrm>
           <a:prstGeom prst="roundRect">
@@ -28355,7 +28630,7 @@
         </p:nvSpPr>
         <p:spPr>
           <a:xfrm>
-            <a:off x="6141567" y="4480560"/>
+            <a:off x="6141567" y="4206240"/>
             <a:ext cx="384048" cy="265176"/>
           </a:xfrm>
           <a:prstGeom prst="rect">
@@ -28394,7 +28669,7 @@
         </p:nvSpPr>
         <p:spPr>
           <a:xfrm>
-            <a:off x="6617055" y="4471416"/>
+            <a:off x="6617055" y="4197096"/>
             <a:ext cx="4587087" cy="274320"/>
           </a:xfrm>
           <a:prstGeom prst="rect">
@@ -28420,7 +28695,7 @@
                 </a:solidFill>
                 <a:latin typeface="Malgun Gothic"/>
               </a:rPr>
-              <a:t>Frequently Asked Questions (FAQ)</a:t>
+              <a:t>Feature Summary · Data</a:t>
             </a:r>
           </a:p>
         </p:txBody>
@@ -28433,7 +28708,7 @@
         </p:nvSpPr>
         <p:spPr>
           <a:xfrm>
-            <a:off x="11213287" y="4471416"/>
+            <a:off x="11213287" y="4197096"/>
             <a:ext cx="457200" cy="274320"/>
           </a:xfrm>
           <a:prstGeom prst="rect">
@@ -28472,7 +28747,7 @@
         </p:nvSpPr>
         <p:spPr>
           <a:xfrm>
-            <a:off x="6141567" y="4773168"/>
+            <a:off x="6141567" y="4498848"/>
             <a:ext cx="384048" cy="228600"/>
           </a:xfrm>
           <a:prstGeom prst="roundRect">
@@ -28516,7 +28791,7 @@
         </p:nvSpPr>
         <p:spPr>
           <a:xfrm>
-            <a:off x="6141567" y="4754880"/>
+            <a:off x="6141567" y="4480560"/>
             <a:ext cx="384048" cy="265176"/>
           </a:xfrm>
           <a:prstGeom prst="rect">
@@ -28555,7 +28830,7 @@
         </p:nvSpPr>
         <p:spPr>
           <a:xfrm>
-            <a:off x="6617055" y="4745736"/>
+            <a:off x="6617055" y="4471416"/>
             <a:ext cx="4587087" cy="274320"/>
           </a:xfrm>
           <a:prstGeom prst="rect">
@@ -28581,7 +28856,7 @@
                 </a:solidFill>
                 <a:latin typeface="Malgun Gothic"/>
               </a:rPr>
-              <a:t>Checklist</a:t>
+              <a:t>Data at a Glance</a:t>
             </a:r>
           </a:p>
         </p:txBody>
@@ -28594,7 +28869,7 @@
         </p:nvSpPr>
         <p:spPr>
           <a:xfrm>
-            <a:off x="11213287" y="4745736"/>
+            <a:off x="11213287" y="4471416"/>
             <a:ext cx="457200" cy="274320"/>
           </a:xfrm>
           <a:prstGeom prst="rect">
@@ -28633,7 +28908,7 @@
         </p:nvSpPr>
         <p:spPr>
           <a:xfrm>
-            <a:off x="6141567" y="5047488"/>
+            <a:off x="6141567" y="4773168"/>
             <a:ext cx="384048" cy="228600"/>
           </a:xfrm>
           <a:prstGeom prst="roundRect">
@@ -28677,6 +28952,167 @@
         </p:nvSpPr>
         <p:spPr>
           <a:xfrm>
+            <a:off x="6141567" y="4754880"/>
+            <a:ext cx="384048" cy="265176"/>
+          </a:xfrm>
+          <a:prstGeom prst="rect">
+            <a:avLst/>
+          </a:prstGeom>
+          <a:noFill/>
+        </p:spPr>
+        <p:txBody>
+          <a:bodyPr wrap="square" anchor="ctr">
+            <a:spAutoFit/>
+          </a:bodyPr>
+          <a:lstStyle/>
+          <a:p>
+            <a:pPr algn="ctr">
+              <a:lnSpc>
+                <a:spcPct val="100000"/>
+              </a:lnSpc>
+            </a:pPr>
+            <a:r>
+              <a:rPr sz="900" b="1">
+                <a:solidFill>
+                  <a:srgbClr val="FFFFFF"/>
+                </a:solidFill>
+                <a:latin typeface="Malgun Gothic"/>
+              </a:rPr>
+              <a:t>27</a:t>
+            </a:r>
+          </a:p>
+        </p:txBody>
+      </p:sp>
+      <p:sp>
+        <p:nvSpPr>
+          <p:cNvPr id="115" name="TextBox 114"/>
+          <p:cNvSpPr txBox="1"/>
+          <p:nvPr/>
+        </p:nvSpPr>
+        <p:spPr>
+          <a:xfrm>
+            <a:off x="6617055" y="4745736"/>
+            <a:ext cx="4587087" cy="274320"/>
+          </a:xfrm>
+          <a:prstGeom prst="rect">
+            <a:avLst/>
+          </a:prstGeom>
+          <a:noFill/>
+        </p:spPr>
+        <p:txBody>
+          <a:bodyPr wrap="square" anchor="ctr">
+            <a:spAutoFit/>
+          </a:bodyPr>
+          <a:lstStyle/>
+          <a:p>
+            <a:pPr algn="l">
+              <a:lnSpc>
+                <a:spcPct val="100000"/>
+              </a:lnSpc>
+            </a:pPr>
+            <a:r>
+              <a:rPr sz="1050" b="1">
+                <a:solidFill>
+                  <a:srgbClr val="334155"/>
+                </a:solidFill>
+                <a:latin typeface="Malgun Gothic"/>
+              </a:rPr>
+              <a:t>Frequently Asked Questions (FAQ)</a:t>
+            </a:r>
+          </a:p>
+        </p:txBody>
+      </p:sp>
+      <p:sp>
+        <p:nvSpPr>
+          <p:cNvPr id="116" name="TextBox 115"/>
+          <p:cNvSpPr txBox="1"/>
+          <p:nvPr/>
+        </p:nvSpPr>
+        <p:spPr>
+          <a:xfrm>
+            <a:off x="11213287" y="4745736"/>
+            <a:ext cx="457200" cy="274320"/>
+          </a:xfrm>
+          <a:prstGeom prst="rect">
+            <a:avLst/>
+          </a:prstGeom>
+          <a:noFill/>
+        </p:spPr>
+        <p:txBody>
+          <a:bodyPr wrap="square" anchor="ctr">
+            <a:spAutoFit/>
+          </a:bodyPr>
+          <a:lstStyle/>
+          <a:p>
+            <a:pPr algn="r">
+              <a:lnSpc>
+                <a:spcPct val="100000"/>
+              </a:lnSpc>
+            </a:pPr>
+            <a:r>
+              <a:rPr sz="1050" b="1">
+                <a:solidFill>
+                  <a:srgbClr val="E11D48"/>
+                </a:solidFill>
+                <a:latin typeface="Malgun Gothic"/>
+              </a:rPr>
+              <a:t>30</a:t>
+            </a:r>
+          </a:p>
+        </p:txBody>
+      </p:sp>
+      <p:sp>
+        <p:nvSpPr>
+          <p:cNvPr id="117" name="Rounded Rectangle 116"/>
+          <p:cNvSpPr/>
+          <p:nvPr/>
+        </p:nvSpPr>
+        <p:spPr>
+          <a:xfrm>
+            <a:off x="6141567" y="5047488"/>
+            <a:ext cx="384048" cy="228600"/>
+          </a:xfrm>
+          <a:prstGeom prst="roundRect">
+            <a:avLst/>
+          </a:prstGeom>
+          <a:solidFill>
+            <a:srgbClr val="E11D48"/>
+          </a:solidFill>
+          <a:ln>
+            <a:noFill/>
+          </a:ln>
+          <a:effectLst/>
+        </p:spPr>
+        <p:style>
+          <a:lnRef idx="1">
+            <a:schemeClr val="accent1"/>
+          </a:lnRef>
+          <a:fillRef idx="3">
+            <a:schemeClr val="accent1"/>
+          </a:fillRef>
+          <a:effectRef idx="2">
+            <a:schemeClr val="accent1"/>
+          </a:effectRef>
+          <a:fontRef idx="minor">
+            <a:schemeClr val="lt1"/>
+          </a:fontRef>
+        </p:style>
+        <p:txBody>
+          <a:bodyPr rtlCol="0" anchor="ctr"/>
+          <a:lstStyle/>
+          <a:p>
+            <a:pPr algn="ctr"/>
+          </a:p>
+        </p:txBody>
+      </p:sp>
+      <p:sp>
+        <p:nvSpPr>
+          <p:cNvPr id="118" name="TextBox 117"/>
+          <p:cNvSpPr txBox="1"/>
+          <p:nvPr/>
+        </p:nvSpPr>
+        <p:spPr>
+          <a:xfrm>
             <a:off x="6141567" y="5029200"/>
             <a:ext cx="384048" cy="265176"/>
           </a:xfrm>
@@ -28703,14 +29139,14 @@
                 </a:solidFill>
                 <a:latin typeface="Malgun Gothic"/>
               </a:rPr>
-              <a:t>27</a:t>
-            </a:r>
-          </a:p>
-        </p:txBody>
-      </p:sp>
-      <p:sp>
-        <p:nvSpPr>
-          <p:cNvPr id="115" name="TextBox 114"/>
+              <a:t>28</a:t>
+            </a:r>
+          </a:p>
+        </p:txBody>
+      </p:sp>
+      <p:sp>
+        <p:nvSpPr>
+          <p:cNvPr id="119" name="TextBox 118"/>
           <p:cNvSpPr txBox="1"/>
           <p:nvPr/>
         </p:nvSpPr>
@@ -28742,14 +29178,14 @@
                 </a:solidFill>
                 <a:latin typeface="Malgun Gothic"/>
               </a:rPr>
-              <a:t>Conclusion</a:t>
-            </a:r>
-          </a:p>
-        </p:txBody>
-      </p:sp>
-      <p:sp>
-        <p:nvSpPr>
-          <p:cNvPr id="116" name="TextBox 115"/>
+              <a:t>Checklist</a:t>
+            </a:r>
+          </a:p>
+        </p:txBody>
+      </p:sp>
+      <p:sp>
+        <p:nvSpPr>
+          <p:cNvPr id="120" name="TextBox 119"/>
           <p:cNvSpPr txBox="1"/>
           <p:nvPr/>
         </p:nvSpPr>
@@ -28781,7 +29217,168 @@
                 </a:solidFill>
                 <a:latin typeface="Malgun Gothic"/>
               </a:rPr>
-              <a:t>30</a:t>
+              <a:t>31</a:t>
+            </a:r>
+          </a:p>
+        </p:txBody>
+      </p:sp>
+      <p:sp>
+        <p:nvSpPr>
+          <p:cNvPr id="121" name="Rounded Rectangle 120"/>
+          <p:cNvSpPr/>
+          <p:nvPr/>
+        </p:nvSpPr>
+        <p:spPr>
+          <a:xfrm>
+            <a:off x="6141567" y="5321808"/>
+            <a:ext cx="384048" cy="228600"/>
+          </a:xfrm>
+          <a:prstGeom prst="roundRect">
+            <a:avLst/>
+          </a:prstGeom>
+          <a:solidFill>
+            <a:srgbClr val="E11D48"/>
+          </a:solidFill>
+          <a:ln>
+            <a:noFill/>
+          </a:ln>
+          <a:effectLst/>
+        </p:spPr>
+        <p:style>
+          <a:lnRef idx="1">
+            <a:schemeClr val="accent1"/>
+          </a:lnRef>
+          <a:fillRef idx="3">
+            <a:schemeClr val="accent1"/>
+          </a:fillRef>
+          <a:effectRef idx="2">
+            <a:schemeClr val="accent1"/>
+          </a:effectRef>
+          <a:fontRef idx="minor">
+            <a:schemeClr val="lt1"/>
+          </a:fontRef>
+        </p:style>
+        <p:txBody>
+          <a:bodyPr rtlCol="0" anchor="ctr"/>
+          <a:lstStyle/>
+          <a:p>
+            <a:pPr algn="ctr"/>
+          </a:p>
+        </p:txBody>
+      </p:sp>
+      <p:sp>
+        <p:nvSpPr>
+          <p:cNvPr id="122" name="TextBox 121"/>
+          <p:cNvSpPr txBox="1"/>
+          <p:nvPr/>
+        </p:nvSpPr>
+        <p:spPr>
+          <a:xfrm>
+            <a:off x="6141567" y="5303520"/>
+            <a:ext cx="384048" cy="265176"/>
+          </a:xfrm>
+          <a:prstGeom prst="rect">
+            <a:avLst/>
+          </a:prstGeom>
+          <a:noFill/>
+        </p:spPr>
+        <p:txBody>
+          <a:bodyPr wrap="square" anchor="ctr">
+            <a:spAutoFit/>
+          </a:bodyPr>
+          <a:lstStyle/>
+          <a:p>
+            <a:pPr algn="ctr">
+              <a:lnSpc>
+                <a:spcPct val="100000"/>
+              </a:lnSpc>
+            </a:pPr>
+            <a:r>
+              <a:rPr sz="900" b="1">
+                <a:solidFill>
+                  <a:srgbClr val="FFFFFF"/>
+                </a:solidFill>
+                <a:latin typeface="Malgun Gothic"/>
+              </a:rPr>
+              <a:t>29</a:t>
+            </a:r>
+          </a:p>
+        </p:txBody>
+      </p:sp>
+      <p:sp>
+        <p:nvSpPr>
+          <p:cNvPr id="123" name="TextBox 122"/>
+          <p:cNvSpPr txBox="1"/>
+          <p:nvPr/>
+        </p:nvSpPr>
+        <p:spPr>
+          <a:xfrm>
+            <a:off x="6617055" y="5294376"/>
+            <a:ext cx="4587087" cy="274320"/>
+          </a:xfrm>
+          <a:prstGeom prst="rect">
+            <a:avLst/>
+          </a:prstGeom>
+          <a:noFill/>
+        </p:spPr>
+        <p:txBody>
+          <a:bodyPr wrap="square" anchor="ctr">
+            <a:spAutoFit/>
+          </a:bodyPr>
+          <a:lstStyle/>
+          <a:p>
+            <a:pPr algn="l">
+              <a:lnSpc>
+                <a:spcPct val="100000"/>
+              </a:lnSpc>
+            </a:pPr>
+            <a:r>
+              <a:rPr sz="1050" b="1">
+                <a:solidFill>
+                  <a:srgbClr val="334155"/>
+                </a:solidFill>
+                <a:latin typeface="Malgun Gothic"/>
+              </a:rPr>
+              <a:t>Conclusion</a:t>
+            </a:r>
+          </a:p>
+        </p:txBody>
+      </p:sp>
+      <p:sp>
+        <p:nvSpPr>
+          <p:cNvPr id="124" name="TextBox 123"/>
+          <p:cNvSpPr txBox="1"/>
+          <p:nvPr/>
+        </p:nvSpPr>
+        <p:spPr>
+          <a:xfrm>
+            <a:off x="11213287" y="5294376"/>
+            <a:ext cx="457200" cy="274320"/>
+          </a:xfrm>
+          <a:prstGeom prst="rect">
+            <a:avLst/>
+          </a:prstGeom>
+          <a:noFill/>
+        </p:spPr>
+        <p:txBody>
+          <a:bodyPr wrap="square" anchor="ctr">
+            <a:spAutoFit/>
+          </a:bodyPr>
+          <a:lstStyle/>
+          <a:p>
+            <a:pPr algn="r">
+              <a:lnSpc>
+                <a:spcPct val="100000"/>
+              </a:lnSpc>
+            </a:pPr>
+            <a:r>
+              <a:rPr sz="1050" b="1">
+                <a:solidFill>
+                  <a:srgbClr val="E11D48"/>
+                </a:solidFill>
+                <a:latin typeface="Malgun Gothic"/>
+              </a:rPr>
+              <a:t>32</a:t>
             </a:r>
           </a:p>
         </p:txBody>
@@ -28973,7 +29570,7 @@
                 </a:solidFill>
                 <a:latin typeface="Malgun Gothic"/>
               </a:rPr>
-              <a:t>Conclusion</a:t>
+              <a:t>Frequently Asked Questions (FAQ)</a:t>
             </a:r>
           </a:p>
         </p:txBody>
@@ -29057,6 +29654,1873 @@
                 <a:latin typeface="Malgun Gothic"/>
               </a:rPr>
               <a:t>27</a:t>
+            </a:r>
+          </a:p>
+        </p:txBody>
+      </p:sp>
+      <p:sp>
+        <p:nvSpPr>
+          <p:cNvPr id="8" name="TextBox 7"/>
+          <p:cNvSpPr txBox="1"/>
+          <p:nvPr/>
+        </p:nvSpPr>
+        <p:spPr>
+          <a:xfrm>
+            <a:off x="1143000" y="868680"/>
+            <a:ext cx="9144000" cy="457200"/>
+          </a:xfrm>
+          <a:prstGeom prst="rect">
+            <a:avLst/>
+          </a:prstGeom>
+          <a:noFill/>
+        </p:spPr>
+        <p:txBody>
+          <a:bodyPr wrap="square" anchor="t">
+            <a:spAutoFit/>
+          </a:bodyPr>
+          <a:lstStyle/>
+          <a:p>
+            <a:pPr algn="l">
+              <a:lnSpc>
+                <a:spcPct val="100000"/>
+              </a:lnSpc>
+            </a:pPr>
+            <a:r>
+              <a:rPr sz="2200" b="1">
+                <a:solidFill>
+                  <a:srgbClr val="E11D48"/>
+                </a:solidFill>
+                <a:latin typeface="Malgun Gothic"/>
+              </a:rPr>
+              <a:t>❓ Frequently Asked Questions (FAQ)</a:t>
+            </a:r>
+          </a:p>
+        </p:txBody>
+      </p:sp>
+      <p:sp>
+        <p:nvSpPr>
+          <p:cNvPr id="9" name="Rounded Rectangle 8"/>
+          <p:cNvSpPr/>
+          <p:nvPr/>
+        </p:nvSpPr>
+        <p:spPr>
+          <a:xfrm>
+            <a:off x="365760" y="1554480"/>
+            <a:ext cx="11460175" cy="868680"/>
+          </a:xfrm>
+          <a:prstGeom prst="roundRect">
+            <a:avLst/>
+          </a:prstGeom>
+          <a:solidFill>
+            <a:srgbClr val="F8FAFC"/>
+          </a:solidFill>
+          <a:ln w="12700">
+            <a:solidFill>
+              <a:srgbClr val="E2E8F0"/>
+            </a:solidFill>
+          </a:ln>
+          <a:effectLst/>
+        </p:spPr>
+        <p:style>
+          <a:lnRef idx="1">
+            <a:schemeClr val="accent1"/>
+          </a:lnRef>
+          <a:fillRef idx="3">
+            <a:schemeClr val="accent1"/>
+          </a:fillRef>
+          <a:effectRef idx="2">
+            <a:schemeClr val="accent1"/>
+          </a:effectRef>
+          <a:fontRef idx="minor">
+            <a:schemeClr val="lt1"/>
+          </a:fontRef>
+        </p:style>
+        <p:txBody>
+          <a:bodyPr rtlCol="0" anchor="ctr"/>
+          <a:lstStyle/>
+          <a:p>
+            <a:pPr algn="ctr"/>
+          </a:p>
+        </p:txBody>
+      </p:sp>
+      <p:sp>
+        <p:nvSpPr>
+          <p:cNvPr id="10" name="TextBox 9"/>
+          <p:cNvSpPr txBox="1"/>
+          <p:nvPr/>
+        </p:nvSpPr>
+        <p:spPr>
+          <a:xfrm>
+            <a:off x="548640" y="1627632"/>
+            <a:ext cx="11094415" cy="365760"/>
+          </a:xfrm>
+          <a:prstGeom prst="rect">
+            <a:avLst/>
+          </a:prstGeom>
+          <a:noFill/>
+        </p:spPr>
+        <p:txBody>
+          <a:bodyPr wrap="square" anchor="t">
+            <a:spAutoFit/>
+          </a:bodyPr>
+          <a:lstStyle/>
+          <a:p>
+            <a:pPr algn="l">
+              <a:lnSpc>
+                <a:spcPct val="100000"/>
+              </a:lnSpc>
+            </a:pPr>
+            <a:r>
+              <a:rPr sz="1350" b="1">
+                <a:solidFill>
+                  <a:srgbClr val="E11D48"/>
+                </a:solidFill>
+                <a:latin typeface="Malgun Gothic"/>
+              </a:rPr>
+              <a:t>Q. Where do I log in?</a:t>
+            </a:r>
+          </a:p>
+        </p:txBody>
+      </p:sp>
+      <p:sp>
+        <p:nvSpPr>
+          <p:cNvPr id="11" name="TextBox 10"/>
+          <p:cNvSpPr txBox="1"/>
+          <p:nvPr/>
+        </p:nvSpPr>
+        <p:spPr>
+          <a:xfrm>
+            <a:off x="548640" y="1965960"/>
+            <a:ext cx="11094415" cy="411480"/>
+          </a:xfrm>
+          <a:prstGeom prst="rect">
+            <a:avLst/>
+          </a:prstGeom>
+          <a:noFill/>
+        </p:spPr>
+        <p:txBody>
+          <a:bodyPr wrap="square" anchor="t">
+            <a:spAutoFit/>
+          </a:bodyPr>
+          <a:lstStyle/>
+          <a:p>
+            <a:pPr algn="l">
+              <a:lnSpc>
+                <a:spcPct val="105000"/>
+              </a:lnSpc>
+            </a:pPr>
+            <a:r>
+              <a:rPr sz="1150" b="0">
+                <a:solidFill>
+                  <a:srgbClr val="475569"/>
+                </a:solidFill>
+                <a:latin typeface="Malgun Gothic"/>
+              </a:rPr>
+              <a:t>A. Log in at admin.mangoi.co.kr. By role (agency), only your agency's data shows automatically.</a:t>
+            </a:r>
+          </a:p>
+        </p:txBody>
+      </p:sp>
+      <p:sp>
+        <p:nvSpPr>
+          <p:cNvPr id="12" name="Rounded Rectangle 11"/>
+          <p:cNvSpPr/>
+          <p:nvPr/>
+        </p:nvSpPr>
+        <p:spPr>
+          <a:xfrm>
+            <a:off x="365760" y="2542032"/>
+            <a:ext cx="11460175" cy="868680"/>
+          </a:xfrm>
+          <a:prstGeom prst="roundRect">
+            <a:avLst/>
+          </a:prstGeom>
+          <a:solidFill>
+            <a:srgbClr val="F8FAFC"/>
+          </a:solidFill>
+          <a:ln w="12700">
+            <a:solidFill>
+              <a:srgbClr val="E2E8F0"/>
+            </a:solidFill>
+          </a:ln>
+          <a:effectLst/>
+        </p:spPr>
+        <p:style>
+          <a:lnRef idx="1">
+            <a:schemeClr val="accent1"/>
+          </a:lnRef>
+          <a:fillRef idx="3">
+            <a:schemeClr val="accent1"/>
+          </a:fillRef>
+          <a:effectRef idx="2">
+            <a:schemeClr val="accent1"/>
+          </a:effectRef>
+          <a:fontRef idx="minor">
+            <a:schemeClr val="lt1"/>
+          </a:fontRef>
+        </p:style>
+        <p:txBody>
+          <a:bodyPr rtlCol="0" anchor="ctr"/>
+          <a:lstStyle/>
+          <a:p>
+            <a:pPr algn="ctr"/>
+          </a:p>
+        </p:txBody>
+      </p:sp>
+      <p:sp>
+        <p:nvSpPr>
+          <p:cNvPr id="13" name="TextBox 12"/>
+          <p:cNvSpPr txBox="1"/>
+          <p:nvPr/>
+        </p:nvSpPr>
+        <p:spPr>
+          <a:xfrm>
+            <a:off x="548640" y="2615184"/>
+            <a:ext cx="11094415" cy="365760"/>
+          </a:xfrm>
+          <a:prstGeom prst="rect">
+            <a:avLst/>
+          </a:prstGeom>
+          <a:noFill/>
+        </p:spPr>
+        <p:txBody>
+          <a:bodyPr wrap="square" anchor="t">
+            <a:spAutoFit/>
+          </a:bodyPr>
+          <a:lstStyle/>
+          <a:p>
+            <a:pPr algn="l">
+              <a:lnSpc>
+                <a:spcPct val="100000"/>
+              </a:lnSpc>
+            </a:pPr>
+            <a:r>
+              <a:rPr sz="1350" b="1">
+                <a:solidFill>
+                  <a:srgbClr val="E11D48"/>
+                </a:solidFill>
+                <a:latin typeface="Malgun Gothic"/>
+              </a:rPr>
+              <a:t>Q. Can I see other agencies' data?</a:t>
+            </a:r>
+          </a:p>
+        </p:txBody>
+      </p:sp>
+      <p:sp>
+        <p:nvSpPr>
+          <p:cNvPr id="14" name="TextBox 13"/>
+          <p:cNvSpPr txBox="1"/>
+          <p:nvPr/>
+        </p:nvSpPr>
+        <p:spPr>
+          <a:xfrm>
+            <a:off x="548640" y="2953512"/>
+            <a:ext cx="11094415" cy="411480"/>
+          </a:xfrm>
+          <a:prstGeom prst="rect">
+            <a:avLst/>
+          </a:prstGeom>
+          <a:noFill/>
+        </p:spPr>
+        <p:txBody>
+          <a:bodyPr wrap="square" anchor="t">
+            <a:spAutoFit/>
+          </a:bodyPr>
+          <a:lstStyle/>
+          <a:p>
+            <a:pPr algn="l">
+              <a:lnSpc>
+                <a:spcPct val="105000"/>
+              </a:lnSpc>
+            </a:pPr>
+            <a:r>
+              <a:rPr sz="1150" b="0">
+                <a:solidFill>
+                  <a:srgbClr val="475569"/>
+                </a:solidFill>
+                <a:latin typeface="Malgun Gothic"/>
+              </a:rPr>
+              <a:t>A. No. By permission scope, only your agency's data is visible.</a:t>
+            </a:r>
+          </a:p>
+        </p:txBody>
+      </p:sp>
+      <p:sp>
+        <p:nvSpPr>
+          <p:cNvPr id="15" name="Rounded Rectangle 14"/>
+          <p:cNvSpPr/>
+          <p:nvPr/>
+        </p:nvSpPr>
+        <p:spPr>
+          <a:xfrm>
+            <a:off x="365760" y="3529584"/>
+            <a:ext cx="11460175" cy="868680"/>
+          </a:xfrm>
+          <a:prstGeom prst="roundRect">
+            <a:avLst/>
+          </a:prstGeom>
+          <a:solidFill>
+            <a:srgbClr val="F8FAFC"/>
+          </a:solidFill>
+          <a:ln w="12700">
+            <a:solidFill>
+              <a:srgbClr val="E2E8F0"/>
+            </a:solidFill>
+          </a:ln>
+          <a:effectLst/>
+        </p:spPr>
+        <p:style>
+          <a:lnRef idx="1">
+            <a:schemeClr val="accent1"/>
+          </a:lnRef>
+          <a:fillRef idx="3">
+            <a:schemeClr val="accent1"/>
+          </a:fillRef>
+          <a:effectRef idx="2">
+            <a:schemeClr val="accent1"/>
+          </a:effectRef>
+          <a:fontRef idx="minor">
+            <a:schemeClr val="lt1"/>
+          </a:fontRef>
+        </p:style>
+        <p:txBody>
+          <a:bodyPr rtlCol="0" anchor="ctr"/>
+          <a:lstStyle/>
+          <a:p>
+            <a:pPr algn="ctr"/>
+          </a:p>
+        </p:txBody>
+      </p:sp>
+      <p:sp>
+        <p:nvSpPr>
+          <p:cNvPr id="16" name="TextBox 15"/>
+          <p:cNvSpPr txBox="1"/>
+          <p:nvPr/>
+        </p:nvSpPr>
+        <p:spPr>
+          <a:xfrm>
+            <a:off x="548640" y="3602736"/>
+            <a:ext cx="11094415" cy="365760"/>
+          </a:xfrm>
+          <a:prstGeom prst="rect">
+            <a:avLst/>
+          </a:prstGeom>
+          <a:noFill/>
+        </p:spPr>
+        <p:txBody>
+          <a:bodyPr wrap="square" anchor="t">
+            <a:spAutoFit/>
+          </a:bodyPr>
+          <a:lstStyle/>
+          <a:p>
+            <a:pPr algn="l">
+              <a:lnSpc>
+                <a:spcPct val="100000"/>
+              </a:lnSpc>
+            </a:pPr>
+            <a:r>
+              <a:rPr sz="1350" b="1">
+                <a:solidFill>
+                  <a:srgbClr val="E11D48"/>
+                </a:solidFill>
+                <a:latin typeface="Malgun Gothic"/>
+              </a:rPr>
+              <a:t>Q. How do I grow enrollment?</a:t>
+            </a:r>
+          </a:p>
+        </p:txBody>
+      </p:sp>
+      <p:sp>
+        <p:nvSpPr>
+          <p:cNvPr id="17" name="TextBox 16"/>
+          <p:cNvSpPr txBox="1"/>
+          <p:nvPr/>
+        </p:nvSpPr>
+        <p:spPr>
+          <a:xfrm>
+            <a:off x="548640" y="3941064"/>
+            <a:ext cx="11094415" cy="411480"/>
+          </a:xfrm>
+          <a:prstGeom prst="rect">
+            <a:avLst/>
+          </a:prstGeom>
+          <a:noFill/>
+        </p:spPr>
+        <p:txBody>
+          <a:bodyPr wrap="square" anchor="t">
+            <a:spAutoFit/>
+          </a:bodyPr>
+          <a:lstStyle/>
+          <a:p>
+            <a:pPr algn="l">
+              <a:lnSpc>
+                <a:spcPct val="105000"/>
+              </a:lnSpc>
+            </a:pPr>
+            <a:r>
+              <a:rPr sz="1150" b="0">
+                <a:solidFill>
+                  <a:srgbClr val="475569"/>
+                </a:solidFill>
+                <a:latin typeface="Malgun Gothic"/>
+              </a:rPr>
+              <a:t>A. Fast counseling response, a smooth trial→enroll flow, and persuading parents with learning reports are key.</a:t>
+            </a:r>
+          </a:p>
+        </p:txBody>
+      </p:sp>
+      <p:sp>
+        <p:nvSpPr>
+          <p:cNvPr id="18" name="Rounded Rectangle 17"/>
+          <p:cNvSpPr/>
+          <p:nvPr/>
+        </p:nvSpPr>
+        <p:spPr>
+          <a:xfrm>
+            <a:off x="365760" y="4517136"/>
+            <a:ext cx="11460175" cy="868680"/>
+          </a:xfrm>
+          <a:prstGeom prst="roundRect">
+            <a:avLst/>
+          </a:prstGeom>
+          <a:solidFill>
+            <a:srgbClr val="F8FAFC"/>
+          </a:solidFill>
+          <a:ln w="12700">
+            <a:solidFill>
+              <a:srgbClr val="E2E8F0"/>
+            </a:solidFill>
+          </a:ln>
+          <a:effectLst/>
+        </p:spPr>
+        <p:style>
+          <a:lnRef idx="1">
+            <a:schemeClr val="accent1"/>
+          </a:lnRef>
+          <a:fillRef idx="3">
+            <a:schemeClr val="accent1"/>
+          </a:fillRef>
+          <a:effectRef idx="2">
+            <a:schemeClr val="accent1"/>
+          </a:effectRef>
+          <a:fontRef idx="minor">
+            <a:schemeClr val="lt1"/>
+          </a:fontRef>
+        </p:style>
+        <p:txBody>
+          <a:bodyPr rtlCol="0" anchor="ctr"/>
+          <a:lstStyle/>
+          <a:p>
+            <a:pPr algn="ctr"/>
+          </a:p>
+        </p:txBody>
+      </p:sp>
+      <p:sp>
+        <p:nvSpPr>
+          <p:cNvPr id="19" name="TextBox 18"/>
+          <p:cNvSpPr txBox="1"/>
+          <p:nvPr/>
+        </p:nvSpPr>
+        <p:spPr>
+          <a:xfrm>
+            <a:off x="548640" y="4590288"/>
+            <a:ext cx="11094415" cy="365760"/>
+          </a:xfrm>
+          <a:prstGeom prst="rect">
+            <a:avLst/>
+          </a:prstGeom>
+          <a:noFill/>
+        </p:spPr>
+        <p:txBody>
+          <a:bodyPr wrap="square" anchor="t">
+            <a:spAutoFit/>
+          </a:bodyPr>
+          <a:lstStyle/>
+          <a:p>
+            <a:pPr algn="l">
+              <a:lnSpc>
+                <a:spcPct val="100000"/>
+              </a:lnSpc>
+            </a:pPr>
+            <a:r>
+              <a:rPr sz="1350" b="1">
+                <a:solidFill>
+                  <a:srgbClr val="E11D48"/>
+                </a:solidFill>
+                <a:latin typeface="Malgun Gothic"/>
+              </a:rPr>
+              <a:t>Q. How do I check settlement?</a:t>
+            </a:r>
+          </a:p>
+        </p:txBody>
+      </p:sp>
+      <p:sp>
+        <p:nvSpPr>
+          <p:cNvPr id="20" name="TextBox 19"/>
+          <p:cNvSpPr txBox="1"/>
+          <p:nvPr/>
+        </p:nvSpPr>
+        <p:spPr>
+          <a:xfrm>
+            <a:off x="548640" y="4928616"/>
+            <a:ext cx="11094415" cy="411480"/>
+          </a:xfrm>
+          <a:prstGeom prst="rect">
+            <a:avLst/>
+          </a:prstGeom>
+          <a:noFill/>
+        </p:spPr>
+        <p:txBody>
+          <a:bodyPr wrap="square" anchor="t">
+            <a:spAutoFit/>
+          </a:bodyPr>
+          <a:lstStyle/>
+          <a:p>
+            <a:pPr algn="l">
+              <a:lnSpc>
+                <a:spcPct val="105000"/>
+              </a:lnSpc>
+            </a:pPr>
+            <a:r>
+              <a:rPr sz="1150" b="0">
+                <a:solidFill>
+                  <a:srgbClr val="475569"/>
+                </a:solidFill>
+                <a:latin typeface="Malgun Gothic"/>
+              </a:rPr>
+              <a:t>A. Branch→agency settlement (received) is auto-calculated by the org tree; check it in the monthly report.</a:t>
+            </a:r>
+          </a:p>
+        </p:txBody>
+      </p:sp>
+      <p:sp>
+        <p:nvSpPr>
+          <p:cNvPr id="21" name="Rounded Rectangle 20"/>
+          <p:cNvSpPr/>
+          <p:nvPr/>
+        </p:nvSpPr>
+        <p:spPr>
+          <a:xfrm>
+            <a:off x="365760" y="5504688"/>
+            <a:ext cx="11460175" cy="868680"/>
+          </a:xfrm>
+          <a:prstGeom prst="roundRect">
+            <a:avLst/>
+          </a:prstGeom>
+          <a:solidFill>
+            <a:srgbClr val="F8FAFC"/>
+          </a:solidFill>
+          <a:ln w="12700">
+            <a:solidFill>
+              <a:srgbClr val="E2E8F0"/>
+            </a:solidFill>
+          </a:ln>
+          <a:effectLst/>
+        </p:spPr>
+        <p:style>
+          <a:lnRef idx="1">
+            <a:schemeClr val="accent1"/>
+          </a:lnRef>
+          <a:fillRef idx="3">
+            <a:schemeClr val="accent1"/>
+          </a:fillRef>
+          <a:effectRef idx="2">
+            <a:schemeClr val="accent1"/>
+          </a:effectRef>
+          <a:fontRef idx="minor">
+            <a:schemeClr val="lt1"/>
+          </a:fontRef>
+        </p:style>
+        <p:txBody>
+          <a:bodyPr rtlCol="0" anchor="ctr"/>
+          <a:lstStyle/>
+          <a:p>
+            <a:pPr algn="ctr"/>
+          </a:p>
+        </p:txBody>
+      </p:sp>
+      <p:sp>
+        <p:nvSpPr>
+          <p:cNvPr id="22" name="TextBox 21"/>
+          <p:cNvSpPr txBox="1"/>
+          <p:nvPr/>
+        </p:nvSpPr>
+        <p:spPr>
+          <a:xfrm>
+            <a:off x="548640" y="5577840"/>
+            <a:ext cx="11094415" cy="365760"/>
+          </a:xfrm>
+          <a:prstGeom prst="rect">
+            <a:avLst/>
+          </a:prstGeom>
+          <a:noFill/>
+        </p:spPr>
+        <p:txBody>
+          <a:bodyPr wrap="square" anchor="t">
+            <a:spAutoFit/>
+          </a:bodyPr>
+          <a:lstStyle/>
+          <a:p>
+            <a:pPr algn="l">
+              <a:lnSpc>
+                <a:spcPct val="100000"/>
+              </a:lnSpc>
+            </a:pPr>
+            <a:r>
+              <a:rPr sz="1350" b="1">
+                <a:solidFill>
+                  <a:srgbClr val="E11D48"/>
+                </a:solidFill>
+                <a:latin typeface="Malgun Gothic"/>
+              </a:rPr>
+              <a:t>Q. A student seems about to quit.</a:t>
+            </a:r>
+          </a:p>
+        </p:txBody>
+      </p:sp>
+      <p:sp>
+        <p:nvSpPr>
+          <p:cNvPr id="23" name="TextBox 22"/>
+          <p:cNvSpPr txBox="1"/>
+          <p:nvPr/>
+        </p:nvSpPr>
+        <p:spPr>
+          <a:xfrm>
+            <a:off x="548640" y="5916168"/>
+            <a:ext cx="11094415" cy="411480"/>
+          </a:xfrm>
+          <a:prstGeom prst="rect">
+            <a:avLst/>
+          </a:prstGeom>
+          <a:noFill/>
+        </p:spPr>
+        <p:txBody>
+          <a:bodyPr wrap="square" anchor="t">
+            <a:spAutoFit/>
+          </a:bodyPr>
+          <a:lstStyle/>
+          <a:p>
+            <a:pPr algn="l">
+              <a:lnSpc>
+                <a:spcPct val="105000"/>
+              </a:lnSpc>
+            </a:pPr>
+            <a:r>
+              <a:rPr sz="1150" b="0">
+                <a:solidFill>
+                  <a:srgbClr val="475569"/>
+                </a:solidFill>
+                <a:latin typeface="Malgun Gothic"/>
+              </a:rPr>
+              <a:t>A. Watch churn-risk signals (absences·performance drop) and intervene quickly with counseling/alert-talk.</a:t>
+            </a:r>
+          </a:p>
+        </p:txBody>
+      </p:sp>
+    </p:spTree>
+  </p:cSld>
+  <p:clrMapOvr>
+    <a:masterClrMapping/>
+  </p:clrMapOvr>
+</p:sld>
+</file>
+
+<file path=ppt/slides/slide31.xml><?xml version="1.0" encoding="utf-8"?>
+<p:sld xmlns:a="http://schemas.openxmlformats.org/drawingml/2006/main" xmlns:p="http://schemas.openxmlformats.org/presentationml/2006/main" xmlns:r="http://schemas.openxmlformats.org/officeDocument/2006/relationships">
+  <p:cSld>
+    <p:bg>
+      <p:bgPr>
+        <a:solidFill>
+          <a:srgbClr val="FFF1F2"/>
+        </a:solidFill>
+        <a:effectLst/>
+      </p:bgPr>
+    </p:bg>
+    <p:spTree>
+      <p:nvGrpSpPr>
+        <p:cNvPr id="1" name=""/>
+        <p:cNvGrpSpPr/>
+        <p:nvPr/>
+      </p:nvGrpSpPr>
+      <p:grpSpPr/>
+      <p:sp>
+        <p:nvSpPr>
+          <p:cNvPr id="2" name="Rectangle 1"/>
+          <p:cNvSpPr/>
+          <p:nvPr/>
+        </p:nvSpPr>
+        <p:spPr>
+          <a:xfrm>
+            <a:off x="0" y="0"/>
+            <a:ext cx="12191695" cy="566928"/>
+          </a:xfrm>
+          <a:prstGeom prst="rect">
+            <a:avLst/>
+          </a:prstGeom>
+          <a:solidFill>
+            <a:srgbClr val="E11D48"/>
+          </a:solidFill>
+          <a:ln>
+            <a:noFill/>
+          </a:ln>
+          <a:effectLst/>
+        </p:spPr>
+        <p:style>
+          <a:lnRef idx="1">
+            <a:schemeClr val="accent1"/>
+          </a:lnRef>
+          <a:fillRef idx="3">
+            <a:schemeClr val="accent1"/>
+          </a:fillRef>
+          <a:effectRef idx="2">
+            <a:schemeClr val="accent1"/>
+          </a:effectRef>
+          <a:fontRef idx="minor">
+            <a:schemeClr val="lt1"/>
+          </a:fontRef>
+        </p:style>
+        <p:txBody>
+          <a:bodyPr rtlCol="0" anchor="ctr"/>
+          <a:lstStyle/>
+          <a:p>
+            <a:pPr algn="ctr"/>
+          </a:p>
+        </p:txBody>
+      </p:sp>
+      <p:sp>
+        <p:nvSpPr>
+          <p:cNvPr id="3" name="Rectangle 2"/>
+          <p:cNvSpPr/>
+          <p:nvPr/>
+        </p:nvSpPr>
+        <p:spPr>
+          <a:xfrm>
+            <a:off x="0" y="566928"/>
+            <a:ext cx="12191695" cy="54864"/>
+          </a:xfrm>
+          <a:prstGeom prst="rect">
+            <a:avLst/>
+          </a:prstGeom>
+          <a:solidFill>
+            <a:srgbClr val="0EA5E9"/>
+          </a:solidFill>
+          <a:ln>
+            <a:noFill/>
+          </a:ln>
+          <a:effectLst/>
+        </p:spPr>
+        <p:style>
+          <a:lnRef idx="1">
+            <a:schemeClr val="accent1"/>
+          </a:lnRef>
+          <a:fillRef idx="3">
+            <a:schemeClr val="accent1"/>
+          </a:fillRef>
+          <a:effectRef idx="2">
+            <a:schemeClr val="accent1"/>
+          </a:effectRef>
+          <a:fontRef idx="minor">
+            <a:schemeClr val="lt1"/>
+          </a:fontRef>
+        </p:style>
+        <p:txBody>
+          <a:bodyPr rtlCol="0" anchor="ctr"/>
+          <a:lstStyle/>
+          <a:p>
+            <a:pPr algn="ctr"/>
+          </a:p>
+        </p:txBody>
+      </p:sp>
+      <p:sp>
+        <p:nvSpPr>
+          <p:cNvPr id="4" name="TextBox 3"/>
+          <p:cNvSpPr txBox="1"/>
+          <p:nvPr/>
+        </p:nvSpPr>
+        <p:spPr>
+          <a:xfrm>
+            <a:off x="365760" y="27432"/>
+            <a:ext cx="7315200" cy="502920"/>
+          </a:xfrm>
+          <a:prstGeom prst="rect">
+            <a:avLst/>
+          </a:prstGeom>
+          <a:noFill/>
+        </p:spPr>
+        <p:txBody>
+          <a:bodyPr wrap="square" anchor="ctr">
+            <a:spAutoFit/>
+          </a:bodyPr>
+          <a:lstStyle/>
+          <a:p>
+            <a:pPr algn="l">
+              <a:lnSpc>
+                <a:spcPct val="100000"/>
+              </a:lnSpc>
+            </a:pPr>
+            <a:r>
+              <a:rPr sz="1500" b="1">
+                <a:solidFill>
+                  <a:srgbClr val="FFFFFF"/>
+                </a:solidFill>
+                <a:latin typeface="Malgun Gothic"/>
+              </a:rPr>
+              <a:t>🤝 Mangoi Agency User Guide</a:t>
+            </a:r>
+          </a:p>
+        </p:txBody>
+      </p:sp>
+      <p:sp>
+        <p:nvSpPr>
+          <p:cNvPr id="5" name="TextBox 4"/>
+          <p:cNvSpPr txBox="1"/>
+          <p:nvPr/>
+        </p:nvSpPr>
+        <p:spPr>
+          <a:xfrm>
+            <a:off x="8168335" y="27432"/>
+            <a:ext cx="3657600" cy="502920"/>
+          </a:xfrm>
+          <a:prstGeom prst="rect">
+            <a:avLst/>
+          </a:prstGeom>
+          <a:noFill/>
+        </p:spPr>
+        <p:txBody>
+          <a:bodyPr wrap="square" anchor="ctr">
+            <a:spAutoFit/>
+          </a:bodyPr>
+          <a:lstStyle/>
+          <a:p>
+            <a:pPr algn="r">
+              <a:lnSpc>
+                <a:spcPct val="100000"/>
+              </a:lnSpc>
+            </a:pPr>
+            <a:r>
+              <a:rPr sz="1300" b="1">
+                <a:solidFill>
+                  <a:srgbClr val="F1F5F9"/>
+                </a:solidFill>
+                <a:latin typeface="Malgun Gothic"/>
+              </a:rPr>
+              <a:t>Checklist</a:t>
+            </a:r>
+          </a:p>
+        </p:txBody>
+      </p:sp>
+      <p:sp>
+        <p:nvSpPr>
+          <p:cNvPr id="6" name="Rounded Rectangle 5"/>
+          <p:cNvSpPr/>
+          <p:nvPr/>
+        </p:nvSpPr>
+        <p:spPr>
+          <a:xfrm>
+            <a:off x="365760" y="841248"/>
+            <a:ext cx="658368" cy="512064"/>
+          </a:xfrm>
+          <a:prstGeom prst="roundRect">
+            <a:avLst/>
+          </a:prstGeom>
+          <a:solidFill>
+            <a:srgbClr val="E11D48"/>
+          </a:solidFill>
+          <a:ln>
+            <a:noFill/>
+          </a:ln>
+          <a:effectLst/>
+        </p:spPr>
+        <p:style>
+          <a:lnRef idx="1">
+            <a:schemeClr val="accent1"/>
+          </a:lnRef>
+          <a:fillRef idx="3">
+            <a:schemeClr val="accent1"/>
+          </a:fillRef>
+          <a:effectRef idx="2">
+            <a:schemeClr val="accent1"/>
+          </a:effectRef>
+          <a:fontRef idx="minor">
+            <a:schemeClr val="lt1"/>
+          </a:fontRef>
+        </p:style>
+        <p:txBody>
+          <a:bodyPr rtlCol="0" anchor="ctr"/>
+          <a:lstStyle/>
+          <a:p>
+            <a:pPr algn="ctr"/>
+          </a:p>
+        </p:txBody>
+      </p:sp>
+      <p:sp>
+        <p:nvSpPr>
+          <p:cNvPr id="7" name="TextBox 6"/>
+          <p:cNvSpPr txBox="1"/>
+          <p:nvPr/>
+        </p:nvSpPr>
+        <p:spPr>
+          <a:xfrm>
+            <a:off x="365760" y="841248"/>
+            <a:ext cx="658368" cy="512064"/>
+          </a:xfrm>
+          <a:prstGeom prst="rect">
+            <a:avLst/>
+          </a:prstGeom>
+          <a:noFill/>
+        </p:spPr>
+        <p:txBody>
+          <a:bodyPr wrap="square" anchor="ctr">
+            <a:spAutoFit/>
+          </a:bodyPr>
+          <a:lstStyle/>
+          <a:p>
+            <a:pPr algn="ctr">
+              <a:lnSpc>
+                <a:spcPct val="100000"/>
+              </a:lnSpc>
+            </a:pPr>
+            <a:r>
+              <a:rPr sz="1700" b="1">
+                <a:solidFill>
+                  <a:srgbClr val="FFFFFF"/>
+                </a:solidFill>
+                <a:latin typeface="Malgun Gothic"/>
+              </a:rPr>
+              <a:t>28</a:t>
+            </a:r>
+          </a:p>
+        </p:txBody>
+      </p:sp>
+      <p:sp>
+        <p:nvSpPr>
+          <p:cNvPr id="8" name="TextBox 7"/>
+          <p:cNvSpPr txBox="1"/>
+          <p:nvPr/>
+        </p:nvSpPr>
+        <p:spPr>
+          <a:xfrm>
+            <a:off x="1143000" y="868680"/>
+            <a:ext cx="9144000" cy="457200"/>
+          </a:xfrm>
+          <a:prstGeom prst="rect">
+            <a:avLst/>
+          </a:prstGeom>
+          <a:noFill/>
+        </p:spPr>
+        <p:txBody>
+          <a:bodyPr wrap="square" anchor="t">
+            <a:spAutoFit/>
+          </a:bodyPr>
+          <a:lstStyle/>
+          <a:p>
+            <a:pPr algn="l">
+              <a:lnSpc>
+                <a:spcPct val="100000"/>
+              </a:lnSpc>
+            </a:pPr>
+            <a:r>
+              <a:rPr sz="2200" b="1">
+                <a:solidFill>
+                  <a:srgbClr val="E11D48"/>
+                </a:solidFill>
+                <a:latin typeface="Malgun Gothic"/>
+              </a:rPr>
+              <a:t>✅ Agency Operations Checklist</a:t>
+            </a:r>
+          </a:p>
+        </p:txBody>
+      </p:sp>
+      <p:sp>
+        <p:nvSpPr>
+          <p:cNvPr id="9" name="Rounded Rectangle 8"/>
+          <p:cNvSpPr/>
+          <p:nvPr/>
+        </p:nvSpPr>
+        <p:spPr>
+          <a:xfrm>
+            <a:off x="457200" y="1645920"/>
+            <a:ext cx="292608" cy="292608"/>
+          </a:xfrm>
+          <a:prstGeom prst="roundRect">
+            <a:avLst/>
+          </a:prstGeom>
+          <a:solidFill>
+            <a:srgbClr val="FFFFFF"/>
+          </a:solidFill>
+          <a:ln w="12700">
+            <a:solidFill>
+              <a:srgbClr val="E11D48"/>
+            </a:solidFill>
+          </a:ln>
+          <a:effectLst/>
+        </p:spPr>
+        <p:style>
+          <a:lnRef idx="1">
+            <a:schemeClr val="accent1"/>
+          </a:lnRef>
+          <a:fillRef idx="3">
+            <a:schemeClr val="accent1"/>
+          </a:fillRef>
+          <a:effectRef idx="2">
+            <a:schemeClr val="accent1"/>
+          </a:effectRef>
+          <a:fontRef idx="minor">
+            <a:schemeClr val="lt1"/>
+          </a:fontRef>
+        </p:style>
+        <p:txBody>
+          <a:bodyPr rtlCol="0" anchor="ctr"/>
+          <a:lstStyle/>
+          <a:p>
+            <a:pPr algn="ctr"/>
+          </a:p>
+        </p:txBody>
+      </p:sp>
+      <p:sp>
+        <p:nvSpPr>
+          <p:cNvPr id="10" name="TextBox 9"/>
+          <p:cNvSpPr txBox="1"/>
+          <p:nvPr/>
+        </p:nvSpPr>
+        <p:spPr>
+          <a:xfrm>
+            <a:off x="914400" y="1581912"/>
+            <a:ext cx="10058400" cy="411480"/>
+          </a:xfrm>
+          <a:prstGeom prst="rect">
+            <a:avLst/>
+          </a:prstGeom>
+          <a:noFill/>
+        </p:spPr>
+        <p:txBody>
+          <a:bodyPr wrap="square" anchor="t">
+            <a:spAutoFit/>
+          </a:bodyPr>
+          <a:lstStyle/>
+          <a:p>
+            <a:pPr algn="l">
+              <a:lnSpc>
+                <a:spcPct val="100000"/>
+              </a:lnSpc>
+            </a:pPr>
+            <a:r>
+              <a:rPr sz="1500" b="1">
+                <a:solidFill>
+                  <a:srgbClr val="334155"/>
+                </a:solidFill>
+                <a:latin typeface="Malgun Gothic"/>
+              </a:rPr>
+              <a:t>Did you check today's revenue/enrollment/attendance?</a:t>
+            </a:r>
+          </a:p>
+        </p:txBody>
+      </p:sp>
+      <p:sp>
+        <p:nvSpPr>
+          <p:cNvPr id="11" name="Rounded Rectangle 10"/>
+          <p:cNvSpPr/>
+          <p:nvPr/>
+        </p:nvSpPr>
+        <p:spPr>
+          <a:xfrm>
+            <a:off x="457200" y="2212848"/>
+            <a:ext cx="292608" cy="292608"/>
+          </a:xfrm>
+          <a:prstGeom prst="roundRect">
+            <a:avLst/>
+          </a:prstGeom>
+          <a:solidFill>
+            <a:srgbClr val="FFFFFF"/>
+          </a:solidFill>
+          <a:ln w="12700">
+            <a:solidFill>
+              <a:srgbClr val="E11D48"/>
+            </a:solidFill>
+          </a:ln>
+          <a:effectLst/>
+        </p:spPr>
+        <p:style>
+          <a:lnRef idx="1">
+            <a:schemeClr val="accent1"/>
+          </a:lnRef>
+          <a:fillRef idx="3">
+            <a:schemeClr val="accent1"/>
+          </a:fillRef>
+          <a:effectRef idx="2">
+            <a:schemeClr val="accent1"/>
+          </a:effectRef>
+          <a:fontRef idx="minor">
+            <a:schemeClr val="lt1"/>
+          </a:fontRef>
+        </p:style>
+        <p:txBody>
+          <a:bodyPr rtlCol="0" anchor="ctr"/>
+          <a:lstStyle/>
+          <a:p>
+            <a:pPr algn="ctr"/>
+          </a:p>
+        </p:txBody>
+      </p:sp>
+      <p:sp>
+        <p:nvSpPr>
+          <p:cNvPr id="12" name="TextBox 11"/>
+          <p:cNvSpPr txBox="1"/>
+          <p:nvPr/>
+        </p:nvSpPr>
+        <p:spPr>
+          <a:xfrm>
+            <a:off x="914400" y="2148840"/>
+            <a:ext cx="10058400" cy="411480"/>
+          </a:xfrm>
+          <a:prstGeom prst="rect">
+            <a:avLst/>
+          </a:prstGeom>
+          <a:noFill/>
+        </p:spPr>
+        <p:txBody>
+          <a:bodyPr wrap="square" anchor="t">
+            <a:spAutoFit/>
+          </a:bodyPr>
+          <a:lstStyle/>
+          <a:p>
+            <a:pPr algn="l">
+              <a:lnSpc>
+                <a:spcPct val="100000"/>
+              </a:lnSpc>
+            </a:pPr>
+            <a:r>
+              <a:rPr sz="1500" b="1">
+                <a:solidFill>
+                  <a:srgbClr val="334155"/>
+                </a:solidFill>
+                <a:latin typeface="Malgun Gothic"/>
+              </a:rPr>
+              <a:t>Did you take and respond to new counseling/inquiries?</a:t>
+            </a:r>
+          </a:p>
+        </p:txBody>
+      </p:sp>
+      <p:sp>
+        <p:nvSpPr>
+          <p:cNvPr id="13" name="Rounded Rectangle 12"/>
+          <p:cNvSpPr/>
+          <p:nvPr/>
+        </p:nvSpPr>
+        <p:spPr>
+          <a:xfrm>
+            <a:off x="457200" y="2779776"/>
+            <a:ext cx="292608" cy="292608"/>
+          </a:xfrm>
+          <a:prstGeom prst="roundRect">
+            <a:avLst/>
+          </a:prstGeom>
+          <a:solidFill>
+            <a:srgbClr val="FFFFFF"/>
+          </a:solidFill>
+          <a:ln w="12700">
+            <a:solidFill>
+              <a:srgbClr val="E11D48"/>
+            </a:solidFill>
+          </a:ln>
+          <a:effectLst/>
+        </p:spPr>
+        <p:style>
+          <a:lnRef idx="1">
+            <a:schemeClr val="accent1"/>
+          </a:lnRef>
+          <a:fillRef idx="3">
+            <a:schemeClr val="accent1"/>
+          </a:fillRef>
+          <a:effectRef idx="2">
+            <a:schemeClr val="accent1"/>
+          </a:effectRef>
+          <a:fontRef idx="minor">
+            <a:schemeClr val="lt1"/>
+          </a:fontRef>
+        </p:style>
+        <p:txBody>
+          <a:bodyPr rtlCol="0" anchor="ctr"/>
+          <a:lstStyle/>
+          <a:p>
+            <a:pPr algn="ctr"/>
+          </a:p>
+        </p:txBody>
+      </p:sp>
+      <p:sp>
+        <p:nvSpPr>
+          <p:cNvPr id="14" name="TextBox 13"/>
+          <p:cNvSpPr txBox="1"/>
+          <p:nvPr/>
+        </p:nvSpPr>
+        <p:spPr>
+          <a:xfrm>
+            <a:off x="914400" y="2715768"/>
+            <a:ext cx="10058400" cy="411480"/>
+          </a:xfrm>
+          <a:prstGeom prst="rect">
+            <a:avLst/>
+          </a:prstGeom>
+          <a:noFill/>
+        </p:spPr>
+        <p:txBody>
+          <a:bodyPr wrap="square" anchor="t">
+            <a:spAutoFit/>
+          </a:bodyPr>
+          <a:lstStyle/>
+          <a:p>
+            <a:pPr algn="l">
+              <a:lnSpc>
+                <a:spcPct val="100000"/>
+              </a:lnSpc>
+            </a:pPr>
+            <a:r>
+              <a:rPr sz="1500" b="1">
+                <a:solidFill>
+                  <a:srgbClr val="334155"/>
+                </a:solidFill>
+                <a:latin typeface="Malgun Gothic"/>
+              </a:rPr>
+              <a:t>Did you check and notify overdue items?</a:t>
+            </a:r>
+          </a:p>
+        </p:txBody>
+      </p:sp>
+      <p:sp>
+        <p:nvSpPr>
+          <p:cNvPr id="15" name="Rounded Rectangle 14"/>
+          <p:cNvSpPr/>
+          <p:nvPr/>
+        </p:nvSpPr>
+        <p:spPr>
+          <a:xfrm>
+            <a:off x="457200" y="3346704"/>
+            <a:ext cx="292608" cy="292608"/>
+          </a:xfrm>
+          <a:prstGeom prst="roundRect">
+            <a:avLst/>
+          </a:prstGeom>
+          <a:solidFill>
+            <a:srgbClr val="FFFFFF"/>
+          </a:solidFill>
+          <a:ln w="12700">
+            <a:solidFill>
+              <a:srgbClr val="E11D48"/>
+            </a:solidFill>
+          </a:ln>
+          <a:effectLst/>
+        </p:spPr>
+        <p:style>
+          <a:lnRef idx="1">
+            <a:schemeClr val="accent1"/>
+          </a:lnRef>
+          <a:fillRef idx="3">
+            <a:schemeClr val="accent1"/>
+          </a:fillRef>
+          <a:effectRef idx="2">
+            <a:schemeClr val="accent1"/>
+          </a:effectRef>
+          <a:fontRef idx="minor">
+            <a:schemeClr val="lt1"/>
+          </a:fontRef>
+        </p:style>
+        <p:txBody>
+          <a:bodyPr rtlCol="0" anchor="ctr"/>
+          <a:lstStyle/>
+          <a:p>
+            <a:pPr algn="ctr"/>
+          </a:p>
+        </p:txBody>
+      </p:sp>
+      <p:sp>
+        <p:nvSpPr>
+          <p:cNvPr id="16" name="TextBox 15"/>
+          <p:cNvSpPr txBox="1"/>
+          <p:nvPr/>
+        </p:nvSpPr>
+        <p:spPr>
+          <a:xfrm>
+            <a:off x="914400" y="3282696"/>
+            <a:ext cx="10058400" cy="411480"/>
+          </a:xfrm>
+          <a:prstGeom prst="rect">
+            <a:avLst/>
+          </a:prstGeom>
+          <a:noFill/>
+        </p:spPr>
+        <p:txBody>
+          <a:bodyPr wrap="square" anchor="t">
+            <a:spAutoFit/>
+          </a:bodyPr>
+          <a:lstStyle/>
+          <a:p>
+            <a:pPr algn="l">
+              <a:lnSpc>
+                <a:spcPct val="100000"/>
+              </a:lnSpc>
+            </a:pPr>
+            <a:r>
+              <a:rPr sz="1500" b="1">
+                <a:solidFill>
+                  <a:srgbClr val="334155"/>
+                </a:solidFill>
+                <a:latin typeface="Malgun Gothic"/>
+              </a:rPr>
+              <a:t>Did you care for at-risk students?</a:t>
+            </a:r>
+          </a:p>
+        </p:txBody>
+      </p:sp>
+      <p:sp>
+        <p:nvSpPr>
+          <p:cNvPr id="17" name="Rounded Rectangle 16"/>
+          <p:cNvSpPr/>
+          <p:nvPr/>
+        </p:nvSpPr>
+        <p:spPr>
+          <a:xfrm>
+            <a:off x="457200" y="3913632"/>
+            <a:ext cx="292608" cy="292608"/>
+          </a:xfrm>
+          <a:prstGeom prst="roundRect">
+            <a:avLst/>
+          </a:prstGeom>
+          <a:solidFill>
+            <a:srgbClr val="FFFFFF"/>
+          </a:solidFill>
+          <a:ln w="12700">
+            <a:solidFill>
+              <a:srgbClr val="E11D48"/>
+            </a:solidFill>
+          </a:ln>
+          <a:effectLst/>
+        </p:spPr>
+        <p:style>
+          <a:lnRef idx="1">
+            <a:schemeClr val="accent1"/>
+          </a:lnRef>
+          <a:fillRef idx="3">
+            <a:schemeClr val="accent1"/>
+          </a:fillRef>
+          <a:effectRef idx="2">
+            <a:schemeClr val="accent1"/>
+          </a:effectRef>
+          <a:fontRef idx="minor">
+            <a:schemeClr val="lt1"/>
+          </a:fontRef>
+        </p:style>
+        <p:txBody>
+          <a:bodyPr rtlCol="0" anchor="ctr"/>
+          <a:lstStyle/>
+          <a:p>
+            <a:pPr algn="ctr"/>
+          </a:p>
+        </p:txBody>
+      </p:sp>
+      <p:sp>
+        <p:nvSpPr>
+          <p:cNvPr id="18" name="TextBox 17"/>
+          <p:cNvSpPr txBox="1"/>
+          <p:nvPr/>
+        </p:nvSpPr>
+        <p:spPr>
+          <a:xfrm>
+            <a:off x="914400" y="3849624"/>
+            <a:ext cx="10058400" cy="411480"/>
+          </a:xfrm>
+          <a:prstGeom prst="rect">
+            <a:avLst/>
+          </a:prstGeom>
+          <a:noFill/>
+        </p:spPr>
+        <p:txBody>
+          <a:bodyPr wrap="square" anchor="t">
+            <a:spAutoFit/>
+          </a:bodyPr>
+          <a:lstStyle/>
+          <a:p>
+            <a:pPr algn="l">
+              <a:lnSpc>
+                <a:spcPct val="100000"/>
+              </a:lnSpc>
+            </a:pPr>
+            <a:r>
+              <a:rPr sz="1500" b="1">
+                <a:solidFill>
+                  <a:srgbClr val="334155"/>
+                </a:solidFill>
+                <a:latin typeface="Malgun Gothic"/>
+              </a:rPr>
+              <a:t>Did you guide parents to the report/My Page?</a:t>
+            </a:r>
+          </a:p>
+        </p:txBody>
+      </p:sp>
+      <p:sp>
+        <p:nvSpPr>
+          <p:cNvPr id="19" name="Rounded Rectangle 18"/>
+          <p:cNvSpPr/>
+          <p:nvPr/>
+        </p:nvSpPr>
+        <p:spPr>
+          <a:xfrm>
+            <a:off x="457200" y="4480560"/>
+            <a:ext cx="292608" cy="292608"/>
+          </a:xfrm>
+          <a:prstGeom prst="roundRect">
+            <a:avLst/>
+          </a:prstGeom>
+          <a:solidFill>
+            <a:srgbClr val="FFFFFF"/>
+          </a:solidFill>
+          <a:ln w="12700">
+            <a:solidFill>
+              <a:srgbClr val="E11D48"/>
+            </a:solidFill>
+          </a:ln>
+          <a:effectLst/>
+        </p:spPr>
+        <p:style>
+          <a:lnRef idx="1">
+            <a:schemeClr val="accent1"/>
+          </a:lnRef>
+          <a:fillRef idx="3">
+            <a:schemeClr val="accent1"/>
+          </a:fillRef>
+          <a:effectRef idx="2">
+            <a:schemeClr val="accent1"/>
+          </a:effectRef>
+          <a:fontRef idx="minor">
+            <a:schemeClr val="lt1"/>
+          </a:fontRef>
+        </p:style>
+        <p:txBody>
+          <a:bodyPr rtlCol="0" anchor="ctr"/>
+          <a:lstStyle/>
+          <a:p>
+            <a:pPr algn="ctr"/>
+          </a:p>
+        </p:txBody>
+      </p:sp>
+      <p:sp>
+        <p:nvSpPr>
+          <p:cNvPr id="20" name="TextBox 19"/>
+          <p:cNvSpPr txBox="1"/>
+          <p:nvPr/>
+        </p:nvSpPr>
+        <p:spPr>
+          <a:xfrm>
+            <a:off x="914400" y="4416552"/>
+            <a:ext cx="10058400" cy="411480"/>
+          </a:xfrm>
+          <a:prstGeom prst="rect">
+            <a:avLst/>
+          </a:prstGeom>
+          <a:noFill/>
+        </p:spPr>
+        <p:txBody>
+          <a:bodyPr wrap="square" anchor="t">
+            <a:spAutoFit/>
+          </a:bodyPr>
+          <a:lstStyle/>
+          <a:p>
+            <a:pPr algn="l">
+              <a:lnSpc>
+                <a:spcPct val="100000"/>
+              </a:lnSpc>
+            </a:pPr>
+            <a:r>
+              <a:rPr sz="1500" b="1">
+                <a:solidFill>
+                  <a:srgbClr val="334155"/>
+                </a:solidFill>
+                <a:latin typeface="Malgun Gothic"/>
+              </a:rPr>
+              <a:t>Did you check this month's settlement (received)?</a:t>
+            </a:r>
+          </a:p>
+        </p:txBody>
+      </p:sp>
+      <p:sp>
+        <p:nvSpPr>
+          <p:cNvPr id="21" name="Rounded Rectangle 20"/>
+          <p:cNvSpPr/>
+          <p:nvPr/>
+        </p:nvSpPr>
+        <p:spPr>
+          <a:xfrm>
+            <a:off x="457200" y="5047488"/>
+            <a:ext cx="292608" cy="292608"/>
+          </a:xfrm>
+          <a:prstGeom prst="roundRect">
+            <a:avLst/>
+          </a:prstGeom>
+          <a:solidFill>
+            <a:srgbClr val="FFFFFF"/>
+          </a:solidFill>
+          <a:ln w="12700">
+            <a:solidFill>
+              <a:srgbClr val="E11D48"/>
+            </a:solidFill>
+          </a:ln>
+          <a:effectLst/>
+        </p:spPr>
+        <p:style>
+          <a:lnRef idx="1">
+            <a:schemeClr val="accent1"/>
+          </a:lnRef>
+          <a:fillRef idx="3">
+            <a:schemeClr val="accent1"/>
+          </a:fillRef>
+          <a:effectRef idx="2">
+            <a:schemeClr val="accent1"/>
+          </a:effectRef>
+          <a:fontRef idx="minor">
+            <a:schemeClr val="lt1"/>
+          </a:fontRef>
+        </p:style>
+        <p:txBody>
+          <a:bodyPr rtlCol="0" anchor="ctr"/>
+          <a:lstStyle/>
+          <a:p>
+            <a:pPr algn="ctr"/>
+          </a:p>
+        </p:txBody>
+      </p:sp>
+      <p:sp>
+        <p:nvSpPr>
+          <p:cNvPr id="22" name="TextBox 21"/>
+          <p:cNvSpPr txBox="1"/>
+          <p:nvPr/>
+        </p:nvSpPr>
+        <p:spPr>
+          <a:xfrm>
+            <a:off x="914400" y="4983480"/>
+            <a:ext cx="10058400" cy="411480"/>
+          </a:xfrm>
+          <a:prstGeom prst="rect">
+            <a:avLst/>
+          </a:prstGeom>
+          <a:noFill/>
+        </p:spPr>
+        <p:txBody>
+          <a:bodyPr wrap="square" anchor="t">
+            <a:spAutoFit/>
+          </a:bodyPr>
+          <a:lstStyle/>
+          <a:p>
+            <a:pPr algn="l">
+              <a:lnSpc>
+                <a:spcPct val="100000"/>
+              </a:lnSpc>
+            </a:pPr>
+            <a:r>
+              <a:rPr sz="1500" b="1">
+                <a:solidFill>
+                  <a:srgbClr val="334155"/>
+                </a:solidFill>
+                <a:latin typeface="Malgun Gothic"/>
+              </a:rPr>
+              <a:t>Did you follow up on trial→enroll?</a:t>
+            </a:r>
+          </a:p>
+        </p:txBody>
+      </p:sp>
+      <p:pic>
+        <p:nvPicPr>
+          <p:cNvPr id="23" name="Picture 22" descr="mango_char.png"/>
+          <p:cNvPicPr>
+            <a:picLocks noChangeAspect="1"/>
+          </p:cNvPicPr>
+          <p:nvPr/>
+        </p:nvPicPr>
+        <p:blipFill>
+          <a:blip r:embed="rId2"/>
+          <a:stretch>
+            <a:fillRect/>
+          </a:stretch>
+        </p:blipFill>
+        <p:spPr>
+          <a:xfrm>
+            <a:off x="9153162" y="4480559"/>
+            <a:ext cx="2489892" cy="2011680"/>
+          </a:xfrm>
+          <a:prstGeom prst="rect">
+            <a:avLst/>
+          </a:prstGeom>
+        </p:spPr>
+      </p:pic>
+    </p:spTree>
+  </p:cSld>
+  <p:clrMapOvr>
+    <a:masterClrMapping/>
+  </p:clrMapOvr>
+</p:sld>
+</file>
+
+<file path=ppt/slides/slide32.xml><?xml version="1.0" encoding="utf-8"?>
+<p:sld xmlns:a="http://schemas.openxmlformats.org/drawingml/2006/main" xmlns:p="http://schemas.openxmlformats.org/presentationml/2006/main" xmlns:r="http://schemas.openxmlformats.org/officeDocument/2006/relationships">
+  <p:cSld>
+    <p:bg>
+      <p:bgPr>
+        <a:solidFill>
+          <a:srgbClr val="FFFFFF"/>
+        </a:solidFill>
+        <a:effectLst/>
+      </p:bgPr>
+    </p:bg>
+    <p:spTree>
+      <p:nvGrpSpPr>
+        <p:cNvPr id="1" name=""/>
+        <p:cNvGrpSpPr/>
+        <p:nvPr/>
+      </p:nvGrpSpPr>
+      <p:grpSpPr/>
+      <p:sp>
+        <p:nvSpPr>
+          <p:cNvPr id="2" name="Rectangle 1"/>
+          <p:cNvSpPr/>
+          <p:nvPr/>
+        </p:nvSpPr>
+        <p:spPr>
+          <a:xfrm>
+            <a:off x="0" y="0"/>
+            <a:ext cx="12191695" cy="566928"/>
+          </a:xfrm>
+          <a:prstGeom prst="rect">
+            <a:avLst/>
+          </a:prstGeom>
+          <a:solidFill>
+            <a:srgbClr val="E11D48"/>
+          </a:solidFill>
+          <a:ln>
+            <a:noFill/>
+          </a:ln>
+          <a:effectLst/>
+        </p:spPr>
+        <p:style>
+          <a:lnRef idx="1">
+            <a:schemeClr val="accent1"/>
+          </a:lnRef>
+          <a:fillRef idx="3">
+            <a:schemeClr val="accent1"/>
+          </a:fillRef>
+          <a:effectRef idx="2">
+            <a:schemeClr val="accent1"/>
+          </a:effectRef>
+          <a:fontRef idx="minor">
+            <a:schemeClr val="lt1"/>
+          </a:fontRef>
+        </p:style>
+        <p:txBody>
+          <a:bodyPr rtlCol="0" anchor="ctr"/>
+          <a:lstStyle/>
+          <a:p>
+            <a:pPr algn="ctr"/>
+          </a:p>
+        </p:txBody>
+      </p:sp>
+      <p:sp>
+        <p:nvSpPr>
+          <p:cNvPr id="3" name="Rectangle 2"/>
+          <p:cNvSpPr/>
+          <p:nvPr/>
+        </p:nvSpPr>
+        <p:spPr>
+          <a:xfrm>
+            <a:off x="0" y="566928"/>
+            <a:ext cx="12191695" cy="54864"/>
+          </a:xfrm>
+          <a:prstGeom prst="rect">
+            <a:avLst/>
+          </a:prstGeom>
+          <a:solidFill>
+            <a:srgbClr val="0EA5E9"/>
+          </a:solidFill>
+          <a:ln>
+            <a:noFill/>
+          </a:ln>
+          <a:effectLst/>
+        </p:spPr>
+        <p:style>
+          <a:lnRef idx="1">
+            <a:schemeClr val="accent1"/>
+          </a:lnRef>
+          <a:fillRef idx="3">
+            <a:schemeClr val="accent1"/>
+          </a:fillRef>
+          <a:effectRef idx="2">
+            <a:schemeClr val="accent1"/>
+          </a:effectRef>
+          <a:fontRef idx="minor">
+            <a:schemeClr val="lt1"/>
+          </a:fontRef>
+        </p:style>
+        <p:txBody>
+          <a:bodyPr rtlCol="0" anchor="ctr"/>
+          <a:lstStyle/>
+          <a:p>
+            <a:pPr algn="ctr"/>
+          </a:p>
+        </p:txBody>
+      </p:sp>
+      <p:sp>
+        <p:nvSpPr>
+          <p:cNvPr id="4" name="TextBox 3"/>
+          <p:cNvSpPr txBox="1"/>
+          <p:nvPr/>
+        </p:nvSpPr>
+        <p:spPr>
+          <a:xfrm>
+            <a:off x="365760" y="27432"/>
+            <a:ext cx="7315200" cy="502920"/>
+          </a:xfrm>
+          <a:prstGeom prst="rect">
+            <a:avLst/>
+          </a:prstGeom>
+          <a:noFill/>
+        </p:spPr>
+        <p:txBody>
+          <a:bodyPr wrap="square" anchor="ctr">
+            <a:spAutoFit/>
+          </a:bodyPr>
+          <a:lstStyle/>
+          <a:p>
+            <a:pPr algn="l">
+              <a:lnSpc>
+                <a:spcPct val="100000"/>
+              </a:lnSpc>
+            </a:pPr>
+            <a:r>
+              <a:rPr sz="1500" b="1">
+                <a:solidFill>
+                  <a:srgbClr val="FFFFFF"/>
+                </a:solidFill>
+                <a:latin typeface="Malgun Gothic"/>
+              </a:rPr>
+              <a:t>🤝 Mangoi Agency User Guide</a:t>
+            </a:r>
+          </a:p>
+        </p:txBody>
+      </p:sp>
+      <p:sp>
+        <p:nvSpPr>
+          <p:cNvPr id="5" name="TextBox 4"/>
+          <p:cNvSpPr txBox="1"/>
+          <p:nvPr/>
+        </p:nvSpPr>
+        <p:spPr>
+          <a:xfrm>
+            <a:off x="8168335" y="27432"/>
+            <a:ext cx="3657600" cy="502920"/>
+          </a:xfrm>
+          <a:prstGeom prst="rect">
+            <a:avLst/>
+          </a:prstGeom>
+          <a:noFill/>
+        </p:spPr>
+        <p:txBody>
+          <a:bodyPr wrap="square" anchor="ctr">
+            <a:spAutoFit/>
+          </a:bodyPr>
+          <a:lstStyle/>
+          <a:p>
+            <a:pPr algn="r">
+              <a:lnSpc>
+                <a:spcPct val="100000"/>
+              </a:lnSpc>
+            </a:pPr>
+            <a:r>
+              <a:rPr sz="1300" b="1">
+                <a:solidFill>
+                  <a:srgbClr val="F1F5F9"/>
+                </a:solidFill>
+                <a:latin typeface="Malgun Gothic"/>
+              </a:rPr>
+              <a:t>Conclusion</a:t>
+            </a:r>
+          </a:p>
+        </p:txBody>
+      </p:sp>
+      <p:sp>
+        <p:nvSpPr>
+          <p:cNvPr id="6" name="Rounded Rectangle 5"/>
+          <p:cNvSpPr/>
+          <p:nvPr/>
+        </p:nvSpPr>
+        <p:spPr>
+          <a:xfrm>
+            <a:off x="365760" y="841248"/>
+            <a:ext cx="658368" cy="512064"/>
+          </a:xfrm>
+          <a:prstGeom prst="roundRect">
+            <a:avLst/>
+          </a:prstGeom>
+          <a:solidFill>
+            <a:srgbClr val="E11D48"/>
+          </a:solidFill>
+          <a:ln>
+            <a:noFill/>
+          </a:ln>
+          <a:effectLst/>
+        </p:spPr>
+        <p:style>
+          <a:lnRef idx="1">
+            <a:schemeClr val="accent1"/>
+          </a:lnRef>
+          <a:fillRef idx="3">
+            <a:schemeClr val="accent1"/>
+          </a:fillRef>
+          <a:effectRef idx="2">
+            <a:schemeClr val="accent1"/>
+          </a:effectRef>
+          <a:fontRef idx="minor">
+            <a:schemeClr val="lt1"/>
+          </a:fontRef>
+        </p:style>
+        <p:txBody>
+          <a:bodyPr rtlCol="0" anchor="ctr"/>
+          <a:lstStyle/>
+          <a:p>
+            <a:pPr algn="ctr"/>
+          </a:p>
+        </p:txBody>
+      </p:sp>
+      <p:sp>
+        <p:nvSpPr>
+          <p:cNvPr id="7" name="TextBox 6"/>
+          <p:cNvSpPr txBox="1"/>
+          <p:nvPr/>
+        </p:nvSpPr>
+        <p:spPr>
+          <a:xfrm>
+            <a:off x="365760" y="841248"/>
+            <a:ext cx="658368" cy="512064"/>
+          </a:xfrm>
+          <a:prstGeom prst="rect">
+            <a:avLst/>
+          </a:prstGeom>
+          <a:noFill/>
+        </p:spPr>
+        <p:txBody>
+          <a:bodyPr wrap="square" anchor="ctr">
+            <a:spAutoFit/>
+          </a:bodyPr>
+          <a:lstStyle/>
+          <a:p>
+            <a:pPr algn="ctr">
+              <a:lnSpc>
+                <a:spcPct val="100000"/>
+              </a:lnSpc>
+            </a:pPr>
+            <a:r>
+              <a:rPr sz="1700" b="1">
+                <a:solidFill>
+                  <a:srgbClr val="FFFFFF"/>
+                </a:solidFill>
+                <a:latin typeface="Malgun Gothic"/>
+              </a:rPr>
+              <a:t>29</a:t>
             </a:r>
           </a:p>
         </p:txBody>
@@ -30301,7 +32765,7 @@
 </p:sld>
 </file>
 
-<file path=ppt/slides/slide31.xml><?xml version="1.0" encoding="utf-8"?>
+<file path=ppt/slides/slide33.xml><?xml version="1.0" encoding="utf-8"?>
 <p:sld xmlns:a="http://schemas.openxmlformats.org/drawingml/2006/main" xmlns:p="http://schemas.openxmlformats.org/presentationml/2006/main" xmlns:r="http://schemas.openxmlformats.org/officeDocument/2006/relationships">
   <p:cSld>
     <p:bg>
